--- a/ppt/VikasReddyAmanagantti_X25178849_industrial-equipment-monitoring.pptx
+++ b/ppt/VikasReddyAmanagantti_X25178849_industrial-equipment-monitoring.pptx
@@ -1228,8 +1228,8 @@
         </p:nvSpPr>
         <p:spPr>
           <a:xfrm>
-            <a:off x="658368" y="2743200"/>
-            <a:ext cx="10241280" cy="1005840"/>
+            <a:off x="658368" y="2697480"/>
+            <a:ext cx="10424160" cy="1371600"/>
           </a:xfrm>
           <a:prstGeom prst="rect">
             <a:avLst/>
@@ -1248,7 +1248,7 @@
               <a:buNone/>
             </a:pPr>
             <a:r>
-              <a:rPr lang="en-US" sz="2100" dirty="0">
+              <a:rPr lang="en-US" sz="2000" dirty="0">
                 <a:solidFill>
                   <a:srgbClr val="CDD9E0"/>
                 </a:solidFill>
@@ -1258,7 +1258,7 @@
               </a:rPr>
               <a:t>A walk-round reads each gauge once — but a machine fails across heat, vibration, bearing noise, speed and power at the same time, in the minutes between rounds.</a:t>
             </a:r>
-            <a:endParaRPr lang="en-US" sz="2100" dirty="0"/>
+            <a:endParaRPr lang="en-US" sz="2000" dirty="0"/>
           </a:p>
         </p:txBody>
       </p:sp>
@@ -2527,7 +2527,7 @@
         <p:spPr>
           <a:xfrm>
             <a:off x="640080" y="5212080"/>
-            <a:ext cx="10972800" cy="548640"/>
+            <a:ext cx="10972800" cy="640080"/>
           </a:xfrm>
           <a:prstGeom prst="rect">
             <a:avLst/>
@@ -2543,7 +2543,7 @@
               <a:buNone/>
             </a:pPr>
             <a:r>
-              <a:rPr lang="en-US" sz="1600" i="1" dirty="0">
+              <a:rPr lang="en-US" sz="1500" i="1" dirty="0">
                 <a:solidFill>
                   <a:srgbClr val="37474F"/>
                 </a:solidFill>
@@ -2553,7 +2553,7 @@
               </a:rPr>
               <a:t>Alarms fire at the fog node — the cloud receives one compact aggregate per window, not a firehose of raw readings.</a:t>
             </a:r>
-            <a:endParaRPr lang="en-US" sz="1600" dirty="0"/>
+            <a:endParaRPr lang="en-US" sz="1500" dirty="0"/>
           </a:p>
         </p:txBody>
       </p:sp>
@@ -3196,12 +3196,12 @@
         </p:nvSpPr>
         <p:spPr>
           <a:xfrm>
-            <a:off x="731520" y="1965960"/>
-            <a:ext cx="10698480" cy="1600200"/>
+            <a:off x="731520" y="1920240"/>
+            <a:ext cx="10698480" cy="1965960"/>
           </a:xfrm>
           <a:prstGeom prst="roundRect">
             <a:avLst>
-              <a:gd name="adj" fmla="val 5714"/>
+              <a:gd name="adj" fmla="val 4651"/>
             </a:avLst>
           </a:prstGeom>
           <a:solidFill>
@@ -3223,7 +3223,7 @@
         </p:nvSpPr>
         <p:spPr>
           <a:xfrm>
-            <a:off x="1005840" y="2167128"/>
+            <a:off x="1005840" y="2103120"/>
             <a:ext cx="3657600" cy="457200"/>
           </a:xfrm>
           <a:prstGeom prst="rect">
@@ -3240,7 +3240,7 @@
               <a:buNone/>
             </a:pPr>
             <a:r>
-              <a:rPr lang="en-US" sz="2000" b="1" dirty="0">
+              <a:rPr lang="en-US" sz="1900" b="1" dirty="0">
                 <a:solidFill>
                   <a:srgbClr val="F0A500"/>
                 </a:solidFill>
@@ -3250,7 +3250,7 @@
               </a:rPr>
               <a:t>Problem</a:t>
             </a:r>
-            <a:endParaRPr lang="en-US" sz="2000" dirty="0"/>
+            <a:endParaRPr lang="en-US" sz="1900" dirty="0"/>
           </a:p>
         </p:txBody>
       </p:sp>
@@ -3262,8 +3262,8 @@
         </p:nvSpPr>
         <p:spPr>
           <a:xfrm>
-            <a:off x="1005840" y="2624328"/>
-            <a:ext cx="9966960" cy="822960"/>
+            <a:off x="1005840" y="2578608"/>
+            <a:ext cx="9966960" cy="1188720"/>
           </a:xfrm>
           <a:prstGeom prst="rect">
             <a:avLst/>
@@ -3282,7 +3282,7 @@
               <a:buNone/>
             </a:pPr>
             <a:r>
-              <a:rPr lang="en-US" sz="1450" dirty="0">
+              <a:rPr lang="en-US" sz="1300" dirty="0">
                 <a:solidFill>
                   <a:srgbClr val="CDD9E0"/>
                 </a:solidFill>
@@ -3292,7 +3292,7 @@
               </a:rPr>
               <a:t>Sensor posts arrive on several web-server threads while a timer seals the ten-second window on its own thread — and both touch the same buffer. Hold a lock across the whole close and every arriving reading stalls; drop it and a reading landing on the boundary is lost or double-counted.</a:t>
             </a:r>
-            <a:endParaRPr lang="en-US" sz="1450" dirty="0"/>
+            <a:endParaRPr lang="en-US" sz="1300" dirty="0"/>
           </a:p>
         </p:txBody>
       </p:sp>
@@ -3304,12 +3304,12 @@
         </p:nvSpPr>
         <p:spPr>
           <a:xfrm>
-            <a:off x="731520" y="3886200"/>
-            <a:ext cx="10698480" cy="1600200"/>
+            <a:off x="731520" y="4041648"/>
+            <a:ext cx="10698480" cy="1965960"/>
           </a:xfrm>
           <a:prstGeom prst="roundRect">
             <a:avLst>
-              <a:gd name="adj" fmla="val 5714"/>
+              <a:gd name="adj" fmla="val 4651"/>
             </a:avLst>
           </a:prstGeom>
           <a:solidFill>
@@ -3331,7 +3331,7 @@
         </p:nvSpPr>
         <p:spPr>
           <a:xfrm>
-            <a:off x="1005840" y="4087368"/>
+            <a:off x="1005840" y="4224528"/>
             <a:ext cx="3657600" cy="457200"/>
           </a:xfrm>
           <a:prstGeom prst="rect">
@@ -3348,7 +3348,7 @@
               <a:buNone/>
             </a:pPr>
             <a:r>
-              <a:rPr lang="en-US" sz="2000" b="1" dirty="0">
+              <a:rPr lang="en-US" sz="1900" b="1" dirty="0">
                 <a:solidFill>
                   <a:srgbClr val="6C8A9A"/>
                 </a:solidFill>
@@ -3358,7 +3358,7 @@
               </a:rPr>
               <a:t>Solution</a:t>
             </a:r>
-            <a:endParaRPr lang="en-US" sz="2000" dirty="0"/>
+            <a:endParaRPr lang="en-US" sz="1900" dirty="0"/>
           </a:p>
         </p:txBody>
       </p:sp>
@@ -3370,8 +3370,8 @@
         </p:nvSpPr>
         <p:spPr>
           <a:xfrm>
-            <a:off x="1005840" y="4544568"/>
-            <a:ext cx="9966960" cy="822960"/>
+            <a:off x="1005840" y="4700016"/>
+            <a:ext cx="9966960" cy="1188720"/>
           </a:xfrm>
           <a:prstGeom prst="rect">
             <a:avLst/>
@@ -3390,7 +3390,7 @@
               <a:buNone/>
             </a:pPr>
             <a:r>
-              <a:rPr lang="en-US" sz="1450" dirty="0">
+              <a:rPr lang="en-US" sz="1300" dirty="0">
                 <a:solidFill>
                   <a:srgbClr val="CDD9E0"/>
                 </a:solidFill>
@@ -3400,7 +3400,7 @@
               </a:rPr>
               <a:t>Take the lock only long enough to swap the filled buffer aside and install an empty one, then run all aggregation and alarm evaluation on the swapped-out copy outside the lock. The hot ingest path never waits, and every reading still lands in exactly one window.</a:t>
             </a:r>
-            <a:endParaRPr lang="en-US" sz="1450" dirty="0"/>
+            <a:endParaRPr lang="en-US" sz="1300" dirty="0"/>
           </a:p>
         </p:txBody>
       </p:sp>

--- a/ppt/VikasReddyAmanagantti_X25178849_industrial-equipment-monitoring.pptx
+++ b/ppt/VikasReddyAmanagantti_X25178849_industrial-equipment-monitoring.pptx
@@ -1150,20 +1150,59 @@
         </p:nvSpPr>
         <p:spPr>
           <a:xfrm>
-            <a:off x="640080" y="914400"/>
-            <a:ext cx="10972800" cy="1280160"/>
-          </a:xfrm>
-          <a:prstGeom prst="rect">
-            <a:avLst/>
-          </a:prstGeom>
-          <a:noFill/>
-          <a:ln/>
-        </p:spPr>
-        <p:txBody>
-          <a:bodyPr wrap="square" rtlCol="0" anchor="t"/>
-          <a:lstStyle/>
-          <a:p>
-            <a:pPr algn="l" indent="0" marL="0">
+            <a:off x="658368" y="640080"/>
+            <a:ext cx="10972800" cy="365760"/>
+          </a:xfrm>
+          <a:prstGeom prst="rect">
+            <a:avLst/>
+          </a:prstGeom>
+          <a:noFill/>
+          <a:ln/>
+        </p:spPr>
+        <p:txBody>
+          <a:bodyPr wrap="square" rtlCol="0" anchor="ctr"/>
+          <a:lstStyle/>
+          <a:p>
+            <a:pPr indent="0" marL="0">
+              <a:buNone/>
+            </a:pPr>
+            <a:r>
+              <a:rPr lang="en-US" sz="1400" b="1" spc="300" kern="0" dirty="0">
+                <a:solidFill>
+                  <a:srgbClr val="F0A500"/>
+                </a:solidFill>
+                <a:latin typeface="Calibri" pitchFamily="34" charset="0"/>
+                <a:ea typeface="Calibri" pitchFamily="34" charset="-122"/>
+                <a:cs typeface="Calibri" pitchFamily="34" charset="-120"/>
+              </a:rPr>
+              <a:t>INDUSTRIAL EQUIPMENT PREDICTIVE MONITORING</a:t>
+            </a:r>
+            <a:endParaRPr lang="en-US" sz="1400" dirty="0"/>
+          </a:p>
+        </p:txBody>
+      </p:sp>
+      <p:sp>
+        <p:nvSpPr>
+          <p:cNvPr id="3" name="Text 1"/>
+          <p:cNvSpPr/>
+          <p:nvPr/>
+        </p:nvSpPr>
+        <p:spPr>
+          <a:xfrm>
+            <a:off x="640080" y="2514600"/>
+            <a:ext cx="10972800" cy="1188720"/>
+          </a:xfrm>
+          <a:prstGeom prst="rect">
+            <a:avLst/>
+          </a:prstGeom>
+          <a:noFill/>
+          <a:ln/>
+        </p:spPr>
+        <p:txBody>
+          <a:bodyPr wrap="square" rtlCol="0" anchor="ctr"/>
+          <a:lstStyle/>
+          <a:p>
+            <a:pPr indent="0" marL="0">
               <a:buNone/>
             </a:pPr>
             <a:r>
@@ -1183,13 +1222,13 @@
       </p:sp>
       <p:sp>
         <p:nvSpPr>
-          <p:cNvPr id="3" name="Text 1"/>
-          <p:cNvSpPr/>
-          <p:nvPr/>
-        </p:nvSpPr>
-        <p:spPr>
-          <a:xfrm>
-            <a:off x="658368" y="2148840"/>
+          <p:cNvPr id="4" name="Text 2"/>
+          <p:cNvSpPr/>
+          <p:nvPr/>
+        </p:nvSpPr>
+        <p:spPr>
+          <a:xfrm>
+            <a:off x="658368" y="3703320"/>
             <a:ext cx="10972800" cy="365760"/>
           </a:xfrm>
           <a:prstGeom prst="rect">
@@ -1222,14 +1261,14 @@
       </p:sp>
       <p:sp>
         <p:nvSpPr>
-          <p:cNvPr id="4" name="Text 2"/>
-          <p:cNvSpPr/>
-          <p:nvPr/>
-        </p:nvSpPr>
-        <p:spPr>
-          <a:xfrm>
-            <a:off x="658368" y="2697480"/>
-            <a:ext cx="10424160" cy="1371600"/>
+          <p:cNvPr id="5" name="Text 3"/>
+          <p:cNvSpPr/>
+          <p:nvPr/>
+        </p:nvSpPr>
+        <p:spPr>
+          <a:xfrm>
+            <a:off x="658368" y="4251960"/>
+            <a:ext cx="10424160" cy="1188720"/>
           </a:xfrm>
           <a:prstGeom prst="rect">
             <a:avLst/>
@@ -1243,12 +1282,12 @@
           <a:p>
             <a:pPr indent="0" marL="0">
               <a:lnSpc>
-                <a:spcPct val="110000"/>
+                <a:spcPct val="108000"/>
               </a:lnSpc>
               <a:buNone/>
             </a:pPr>
             <a:r>
-              <a:rPr lang="en-US" sz="2000" dirty="0">
+              <a:rPr lang="en-US" sz="1800" dirty="0">
                 <a:solidFill>
                   <a:srgbClr val="CDD9E0"/>
                 </a:solidFill>
@@ -1258,19 +1297,19 @@
               </a:rPr>
               <a:t>A walk-round reads each gauge once — but a machine fails across heat, vibration, bearing noise, speed and power at the same time, in the minutes between rounds.</a:t>
             </a:r>
-            <a:endParaRPr lang="en-US" sz="2000" dirty="0"/>
-          </a:p>
-        </p:txBody>
-      </p:sp>
-      <p:sp>
-        <p:nvSpPr>
-          <p:cNvPr id="5" name="Shape 3"/>
-          <p:cNvSpPr/>
-          <p:nvPr/>
-        </p:nvSpPr>
-        <p:spPr>
-          <a:xfrm>
-            <a:off x="658368" y="4206240"/>
+            <a:endParaRPr lang="en-US" sz="1800" dirty="0"/>
+          </a:p>
+        </p:txBody>
+      </p:sp>
+      <p:sp>
+        <p:nvSpPr>
+          <p:cNvPr id="6" name="Shape 4"/>
+          <p:cNvSpPr/>
+          <p:nvPr/>
+        </p:nvSpPr>
+        <p:spPr>
+          <a:xfrm>
+            <a:off x="658368" y="5623560"/>
             <a:ext cx="2651760" cy="566928"/>
           </a:xfrm>
           <a:prstGeom prst="roundRect">
@@ -1291,13 +1330,13 @@
       </p:sp>
       <p:sp>
         <p:nvSpPr>
-          <p:cNvPr id="6" name="Text 4"/>
-          <p:cNvSpPr/>
-          <p:nvPr/>
-        </p:nvSpPr>
-        <p:spPr>
-          <a:xfrm>
-            <a:off x="658368" y="4206240"/>
+          <p:cNvPr id="7" name="Text 5"/>
+          <p:cNvSpPr/>
+          <p:nvPr/>
+        </p:nvSpPr>
+        <p:spPr>
+          <a:xfrm>
+            <a:off x="658368" y="5623560"/>
             <a:ext cx="2651760" cy="566928"/>
           </a:xfrm>
           <a:prstGeom prst="rect">
@@ -1314,7 +1353,7 @@
               <a:buNone/>
             </a:pPr>
             <a:r>
-              <a:rPr lang="en-US" sz="1400" b="1" dirty="0">
+              <a:rPr lang="en-US" sz="1350" b="1" dirty="0">
                 <a:solidFill>
                   <a:srgbClr val="F0A500"/>
                 </a:solidFill>
@@ -1324,19 +1363,19 @@
               </a:rPr>
               <a:t>Motor temp &gt; 95 °C</a:t>
             </a:r>
-            <a:endParaRPr lang="en-US" sz="1400" dirty="0"/>
-          </a:p>
-        </p:txBody>
-      </p:sp>
-      <p:sp>
-        <p:nvSpPr>
-          <p:cNvPr id="7" name="Shape 5"/>
-          <p:cNvSpPr/>
-          <p:nvPr/>
-        </p:nvSpPr>
-        <p:spPr>
-          <a:xfrm>
-            <a:off x="3538728" y="4206240"/>
+            <a:endParaRPr lang="en-US" sz="1350" dirty="0"/>
+          </a:p>
+        </p:txBody>
+      </p:sp>
+      <p:sp>
+        <p:nvSpPr>
+          <p:cNvPr id="8" name="Shape 6"/>
+          <p:cNvSpPr/>
+          <p:nvPr/>
+        </p:nvSpPr>
+        <p:spPr>
+          <a:xfrm>
+            <a:off x="3538728" y="5623560"/>
             <a:ext cx="2651760" cy="566928"/>
           </a:xfrm>
           <a:prstGeom prst="roundRect">
@@ -1357,13 +1396,13 @@
       </p:sp>
       <p:sp>
         <p:nvSpPr>
-          <p:cNvPr id="8" name="Text 6"/>
-          <p:cNvSpPr/>
-          <p:nvPr/>
-        </p:nvSpPr>
-        <p:spPr>
-          <a:xfrm>
-            <a:off x="3538728" y="4206240"/>
+          <p:cNvPr id="9" name="Text 7"/>
+          <p:cNvSpPr/>
+          <p:nvPr/>
+        </p:nvSpPr>
+        <p:spPr>
+          <a:xfrm>
+            <a:off x="3538728" y="5623560"/>
             <a:ext cx="2651760" cy="566928"/>
           </a:xfrm>
           <a:prstGeom prst="rect">
@@ -1380,7 +1419,7 @@
               <a:buNone/>
             </a:pPr>
             <a:r>
-              <a:rPr lang="en-US" sz="1400" b="1" dirty="0">
+              <a:rPr lang="en-US" sz="1350" b="1" dirty="0">
                 <a:solidFill>
                   <a:srgbClr val="F0A500"/>
                 </a:solidFill>
@@ -1390,19 +1429,19 @@
               </a:rPr>
               <a:t>Vibration &gt; 7 mm/s</a:t>
             </a:r>
-            <a:endParaRPr lang="en-US" sz="1400" dirty="0"/>
-          </a:p>
-        </p:txBody>
-      </p:sp>
-      <p:sp>
-        <p:nvSpPr>
-          <p:cNvPr id="9" name="Shape 7"/>
-          <p:cNvSpPr/>
-          <p:nvPr/>
-        </p:nvSpPr>
-        <p:spPr>
-          <a:xfrm>
-            <a:off x="6419088" y="4206240"/>
+            <a:endParaRPr lang="en-US" sz="1350" dirty="0"/>
+          </a:p>
+        </p:txBody>
+      </p:sp>
+      <p:sp>
+        <p:nvSpPr>
+          <p:cNvPr id="10" name="Shape 8"/>
+          <p:cNvSpPr/>
+          <p:nvPr/>
+        </p:nvSpPr>
+        <p:spPr>
+          <a:xfrm>
+            <a:off x="6419088" y="5623560"/>
             <a:ext cx="2651760" cy="566928"/>
           </a:xfrm>
           <a:prstGeom prst="roundRect">
@@ -1423,13 +1462,13 @@
       </p:sp>
       <p:sp>
         <p:nvSpPr>
-          <p:cNvPr id="10" name="Text 8"/>
-          <p:cNvSpPr/>
-          <p:nvPr/>
-        </p:nvSpPr>
-        <p:spPr>
-          <a:xfrm>
-            <a:off x="6419088" y="4206240"/>
+          <p:cNvPr id="11" name="Text 9"/>
+          <p:cNvSpPr/>
+          <p:nvPr/>
+        </p:nvSpPr>
+        <p:spPr>
+          <a:xfrm>
+            <a:off x="6419088" y="5623560"/>
             <a:ext cx="2651760" cy="566928"/>
           </a:xfrm>
           <a:prstGeom prst="rect">
@@ -1446,7 +1485,7 @@
               <a:buNone/>
             </a:pPr>
             <a:r>
-              <a:rPr lang="en-US" sz="1400" b="1" dirty="0">
+              <a:rPr lang="en-US" sz="1350" b="1" dirty="0">
                 <a:solidFill>
                   <a:srgbClr val="F0A500"/>
                 </a:solidFill>
@@ -1456,20 +1495,20 @@
               </a:rPr>
               <a:t>Speed 1,000–3,400 RPM</a:t>
             </a:r>
-            <a:endParaRPr lang="en-US" sz="1400" dirty="0"/>
-          </a:p>
-        </p:txBody>
-      </p:sp>
-      <p:sp>
-        <p:nvSpPr>
-          <p:cNvPr id="11" name="Text 9"/>
-          <p:cNvSpPr/>
-          <p:nvPr/>
-        </p:nvSpPr>
-        <p:spPr>
-          <a:xfrm>
-            <a:off x="658368" y="6126480"/>
-            <a:ext cx="10972800" cy="365760"/>
+            <a:endParaRPr lang="en-US" sz="1350" dirty="0"/>
+          </a:p>
+        </p:txBody>
+      </p:sp>
+      <p:sp>
+        <p:nvSpPr>
+          <p:cNvPr id="12" name="Text 10"/>
+          <p:cNvSpPr/>
+          <p:nvPr/>
+        </p:nvSpPr>
+        <p:spPr>
+          <a:xfrm>
+            <a:off x="658368" y="6400800"/>
+            <a:ext cx="10972800" cy="320040"/>
           </a:xfrm>
           <a:prstGeom prst="rect">
             <a:avLst/>
@@ -1485,7 +1524,7 @@
               <a:buNone/>
             </a:pPr>
             <a:r>
-              <a:rPr lang="en-US" sz="1300" dirty="0">
+              <a:rPr lang="en-US" sz="1250" dirty="0">
                 <a:solidFill>
                   <a:srgbClr val="5F6E78"/>
                 </a:solidFill>
@@ -1495,7 +1534,7 @@
               </a:rPr>
               <a:t>Fog &amp; Edge Computing (H9FECC)   ·   deployed live on AWS</a:t>
             </a:r>
-            <a:endParaRPr lang="en-US" sz="1300" dirty="0"/>
+            <a:endParaRPr lang="en-US" sz="1250" dirty="0"/>
           </a:p>
         </p:txBody>
       </p:sp>
@@ -1578,12 +1617,12 @@
         </p:nvSpPr>
         <p:spPr>
           <a:xfrm>
-            <a:off x="640080" y="2468880"/>
-            <a:ext cx="1572768" cy="1371600"/>
+            <a:off x="640080" y="1554480"/>
+            <a:ext cx="3200400" cy="3383280"/>
           </a:xfrm>
           <a:prstGeom prst="roundRect">
             <a:avLst>
-              <a:gd name="adj" fmla="val 6667"/>
+              <a:gd name="adj" fmla="val 2857"/>
             </a:avLst>
           </a:prstGeom>
           <a:solidFill>
@@ -1599,146 +1638,63 @@
       </p:sp>
       <p:sp>
         <p:nvSpPr>
-          <p:cNvPr id="4" name="Shape 2"/>
-          <p:cNvSpPr/>
-          <p:nvPr/>
-        </p:nvSpPr>
-        <p:spPr>
-          <a:xfrm>
-            <a:off x="1325880" y="2670048"/>
-            <a:ext cx="201168" cy="201168"/>
-          </a:xfrm>
-          <a:prstGeom prst="ellipse">
-            <a:avLst/>
-          </a:prstGeom>
-          <a:solidFill>
-            <a:srgbClr val="6C8A9A"/>
-          </a:solidFill>
-          <a:ln/>
-        </p:spPr>
-      </p:sp>
-      <p:sp>
-        <p:nvSpPr>
-          <p:cNvPr id="5" name="Text 3"/>
-          <p:cNvSpPr/>
-          <p:nvPr/>
-        </p:nvSpPr>
-        <p:spPr>
-          <a:xfrm>
-            <a:off x="594360" y="2926080"/>
-            <a:ext cx="1664208" cy="411480"/>
-          </a:xfrm>
-          <a:prstGeom prst="rect">
-            <a:avLst/>
-          </a:prstGeom>
-          <a:noFill/>
-          <a:ln/>
-        </p:spPr>
-        <p:txBody>
-          <a:bodyPr wrap="square" lIns="0" tIns="0" rIns="0" bIns="0" rtlCol="0" anchor="ctr"/>
+          <p:cNvPr id="4" name="Text 2"/>
+          <p:cNvSpPr/>
+          <p:nvPr/>
+        </p:nvSpPr>
+        <p:spPr>
+          <a:xfrm>
+            <a:off x="640080" y="1691640"/>
+            <a:ext cx="3200400" cy="365760"/>
+          </a:xfrm>
+          <a:prstGeom prst="rect">
+            <a:avLst/>
+          </a:prstGeom>
+          <a:noFill/>
+          <a:ln/>
+        </p:spPr>
+        <p:txBody>
+          <a:bodyPr wrap="square" rtlCol="0" anchor="ctr"/>
           <a:lstStyle/>
           <a:p>
             <a:pPr algn="ctr" indent="0" marL="0">
               <a:buNone/>
             </a:pPr>
             <a:r>
-              <a:rPr lang="en-US" sz="1450" b="1" dirty="0">
-                <a:solidFill>
-                  <a:srgbClr val="1E2A33"/>
+              <a:rPr lang="en-US" sz="1200" b="1" spc="300" kern="0" dirty="0">
+                <a:solidFill>
+                  <a:srgbClr val="6C8A9A"/>
                 </a:solidFill>
                 <a:latin typeface="Calibri" pitchFamily="34" charset="0"/>
                 <a:ea typeface="Calibri" pitchFamily="34" charset="-122"/>
                 <a:cs typeface="Calibri" pitchFamily="34" charset="-120"/>
               </a:rPr>
-              <a:t>Machine sensors</a:t>
-            </a:r>
-            <a:endParaRPr lang="en-US" sz="1450" dirty="0"/>
-          </a:p>
-        </p:txBody>
-      </p:sp>
-      <p:sp>
-        <p:nvSpPr>
-          <p:cNvPr id="6" name="Text 4"/>
-          <p:cNvSpPr/>
-          <p:nvPr/>
-        </p:nvSpPr>
-        <p:spPr>
-          <a:xfrm>
-            <a:off x="621792" y="3310128"/>
-            <a:ext cx="1609344" cy="457200"/>
-          </a:xfrm>
-          <a:prstGeom prst="rect">
-            <a:avLst/>
-          </a:prstGeom>
-          <a:noFill/>
-          <a:ln/>
-        </p:spPr>
-        <p:txBody>
-          <a:bodyPr wrap="square" lIns="0" tIns="0" rIns="0" bIns="0" rtlCol="0" anchor="t"/>
-          <a:lstStyle/>
-          <a:p>
-            <a:pPr algn="ctr" indent="0" marL="0">
-              <a:buNone/>
-            </a:pPr>
-            <a:r>
-              <a:rPr lang="en-US" sz="1050" dirty="0">
-                <a:solidFill>
-                  <a:srgbClr val="5F6E78"/>
-                </a:solidFill>
-                <a:latin typeface="Calibri" pitchFamily="34" charset="0"/>
-                <a:ea typeface="Calibri" pitchFamily="34" charset="-122"/>
-                <a:cs typeface="Calibri" pitchFamily="34" charset="-120"/>
-              </a:rPr>
-              <a:t>10 units · 2 lines</a:t>
-            </a:r>
-            <a:endParaRPr lang="en-US" sz="1050" dirty="0"/>
-          </a:p>
-        </p:txBody>
-      </p:sp>
-      <p:sp>
-        <p:nvSpPr>
-          <p:cNvPr id="7" name="Shape 5"/>
-          <p:cNvSpPr/>
-          <p:nvPr/>
-        </p:nvSpPr>
-        <p:spPr>
-          <a:xfrm>
-            <a:off x="2231136" y="3154680"/>
-            <a:ext cx="258409" cy="0"/>
-          </a:xfrm>
-          <a:prstGeom prst="line">
-            <a:avLst/>
-          </a:prstGeom>
-          <a:noFill/>
-          <a:ln w="25400">
-            <a:solidFill>
-              <a:srgbClr val="6C8A9A"/>
-            </a:solidFill>
-            <a:prstDash val="solid"/>
-            <a:tailEnd type="triangle"/>
-          </a:ln>
-        </p:spPr>
-      </p:sp>
-      <p:sp>
-        <p:nvSpPr>
-          <p:cNvPr id="8" name="Shape 6"/>
-          <p:cNvSpPr/>
-          <p:nvPr/>
-        </p:nvSpPr>
-        <p:spPr>
-          <a:xfrm>
-            <a:off x="2507833" y="2468880"/>
-            <a:ext cx="1572768" cy="1371600"/>
+              <a:t>EDGE</a:t>
+            </a:r>
+            <a:endParaRPr lang="en-US" sz="1200" dirty="0"/>
+          </a:p>
+        </p:txBody>
+      </p:sp>
+      <p:sp>
+        <p:nvSpPr>
+          <p:cNvPr id="5" name="Shape 3"/>
+          <p:cNvSpPr/>
+          <p:nvPr/>
+        </p:nvSpPr>
+        <p:spPr>
+          <a:xfrm>
+            <a:off x="914400" y="2286000"/>
+            <a:ext cx="2651760" cy="1005840"/>
           </a:xfrm>
           <a:prstGeom prst="roundRect">
             <a:avLst>
-              <a:gd name="adj" fmla="val 6667"/>
+              <a:gd name="adj" fmla="val 7273"/>
             </a:avLst>
           </a:prstGeom>
           <a:solidFill>
-            <a:srgbClr val="EEF2F4"/>
+            <a:srgbClr val="FFFFFF"/>
           </a:solidFill>
-          <a:ln w="19050">
+          <a:ln w="15240">
             <a:solidFill>
               <a:srgbClr val="6C8A9A"/>
             </a:solidFill>
@@ -1748,34 +1704,14 @@
       </p:sp>
       <p:sp>
         <p:nvSpPr>
-          <p:cNvPr id="9" name="Shape 7"/>
-          <p:cNvSpPr/>
-          <p:nvPr/>
-        </p:nvSpPr>
-        <p:spPr>
-          <a:xfrm>
-            <a:off x="3193633" y="2670048"/>
-            <a:ext cx="201168" cy="201168"/>
-          </a:xfrm>
-          <a:prstGeom prst="ellipse">
-            <a:avLst/>
-          </a:prstGeom>
-          <a:solidFill>
-            <a:srgbClr val="6C8A9A"/>
-          </a:solidFill>
-          <a:ln/>
-        </p:spPr>
-      </p:sp>
-      <p:sp>
-        <p:nvSpPr>
-          <p:cNvPr id="10" name="Text 8"/>
-          <p:cNvSpPr/>
-          <p:nvPr/>
-        </p:nvSpPr>
-        <p:spPr>
-          <a:xfrm>
-            <a:off x="2462113" y="2926080"/>
-            <a:ext cx="1664208" cy="411480"/>
+          <p:cNvPr id="6" name="Text 4"/>
+          <p:cNvSpPr/>
+          <p:nvPr/>
+        </p:nvSpPr>
+        <p:spPr>
+          <a:xfrm>
+            <a:off x="914400" y="2432304"/>
+            <a:ext cx="2651760" cy="365760"/>
           </a:xfrm>
           <a:prstGeom prst="rect">
             <a:avLst/>
@@ -1791,7 +1727,7 @@
               <a:buNone/>
             </a:pPr>
             <a:r>
-              <a:rPr lang="en-US" sz="1450" b="1" dirty="0">
+              <a:rPr lang="en-US" sz="1400" b="1" dirty="0">
                 <a:solidFill>
                   <a:srgbClr val="1E2A33"/>
                 </a:solidFill>
@@ -1799,38 +1735,38 @@
                 <a:ea typeface="Calibri" pitchFamily="34" charset="-122"/>
                 <a:cs typeface="Calibri" pitchFamily="34" charset="-120"/>
               </a:rPr>
-              <a:t>Fog node</a:t>
-            </a:r>
-            <a:endParaRPr lang="en-US" sz="1450" dirty="0"/>
-          </a:p>
-        </p:txBody>
-      </p:sp>
-      <p:sp>
-        <p:nvSpPr>
-          <p:cNvPr id="11" name="Text 9"/>
-          <p:cNvSpPr/>
-          <p:nvPr/>
-        </p:nvSpPr>
-        <p:spPr>
-          <a:xfrm>
-            <a:off x="2489545" y="3310128"/>
-            <a:ext cx="1609344" cy="457200"/>
-          </a:xfrm>
-          <a:prstGeom prst="rect">
-            <a:avLst/>
-          </a:prstGeom>
-          <a:noFill/>
-          <a:ln/>
-        </p:spPr>
-        <p:txBody>
-          <a:bodyPr wrap="square" lIns="0" tIns="0" rIns="0" bIns="0" rtlCol="0" anchor="t"/>
+              <a:t>Machine sensors</a:t>
+            </a:r>
+            <a:endParaRPr lang="en-US" sz="1400" dirty="0"/>
+          </a:p>
+        </p:txBody>
+      </p:sp>
+      <p:sp>
+        <p:nvSpPr>
+          <p:cNvPr id="7" name="Text 5"/>
+          <p:cNvSpPr/>
+          <p:nvPr/>
+        </p:nvSpPr>
+        <p:spPr>
+          <a:xfrm>
+            <a:off x="914400" y="2816352"/>
+            <a:ext cx="2651760" cy="365760"/>
+          </a:xfrm>
+          <a:prstGeom prst="rect">
+            <a:avLst/>
+          </a:prstGeom>
+          <a:noFill/>
+          <a:ln/>
+        </p:spPr>
+        <p:txBody>
+          <a:bodyPr wrap="square" lIns="0" tIns="0" rIns="0" bIns="0" rtlCol="0" anchor="ctr"/>
           <a:lstStyle/>
           <a:p>
             <a:pPr algn="ctr" indent="0" marL="0">
               <a:buNone/>
             </a:pPr>
             <a:r>
-              <a:rPr lang="en-US" sz="1050" dirty="0">
+              <a:rPr lang="en-US" sz="1000" dirty="0">
                 <a:solidFill>
                   <a:srgbClr val="5F6E78"/>
                 </a:solidFill>
@@ -1838,50 +1774,155 @@
                 <a:ea typeface="Calibri" pitchFamily="34" charset="-122"/>
                 <a:cs typeface="Calibri" pitchFamily="34" charset="-120"/>
               </a:rPr>
-              <a:t>10 s windows · edge alarms</a:t>
-            </a:r>
-            <a:endParaRPr lang="en-US" sz="1050" dirty="0"/>
-          </a:p>
-        </p:txBody>
-      </p:sp>
-      <p:sp>
-        <p:nvSpPr>
-          <p:cNvPr id="12" name="Shape 10"/>
-          <p:cNvSpPr/>
-          <p:nvPr/>
-        </p:nvSpPr>
-        <p:spPr>
-          <a:xfrm>
-            <a:off x="4098889" y="3154680"/>
-            <a:ext cx="258409" cy="0"/>
-          </a:xfrm>
-          <a:prstGeom prst="line">
-            <a:avLst/>
-          </a:prstGeom>
-          <a:noFill/>
-          <a:ln w="25400">
+              <a:t>10 units · 2 lines</a:t>
+            </a:r>
+            <a:endParaRPr lang="en-US" sz="1000" dirty="0"/>
+          </a:p>
+        </p:txBody>
+      </p:sp>
+      <p:sp>
+        <p:nvSpPr>
+          <p:cNvPr id="8" name="Shape 6"/>
+          <p:cNvSpPr/>
+          <p:nvPr/>
+        </p:nvSpPr>
+        <p:spPr>
+          <a:xfrm>
+            <a:off x="914400" y="3520440"/>
+            <a:ext cx="2651760" cy="1005840"/>
+          </a:xfrm>
+          <a:prstGeom prst="roundRect">
+            <a:avLst>
+              <a:gd name="adj" fmla="val 7273"/>
+            </a:avLst>
+          </a:prstGeom>
+          <a:solidFill>
+            <a:srgbClr val="FFFFFF"/>
+          </a:solidFill>
+          <a:ln w="15240">
             <a:solidFill>
               <a:srgbClr val="6C8A9A"/>
             </a:solidFill>
             <a:prstDash val="solid"/>
+          </a:ln>
+        </p:spPr>
+      </p:sp>
+      <p:sp>
+        <p:nvSpPr>
+          <p:cNvPr id="9" name="Text 7"/>
+          <p:cNvSpPr/>
+          <p:nvPr/>
+        </p:nvSpPr>
+        <p:spPr>
+          <a:xfrm>
+            <a:off x="914400" y="3666744"/>
+            <a:ext cx="2651760" cy="365760"/>
+          </a:xfrm>
+          <a:prstGeom prst="rect">
+            <a:avLst/>
+          </a:prstGeom>
+          <a:noFill/>
+          <a:ln/>
+        </p:spPr>
+        <p:txBody>
+          <a:bodyPr wrap="square" lIns="0" tIns="0" rIns="0" bIns="0" rtlCol="0" anchor="ctr"/>
+          <a:lstStyle/>
+          <a:p>
+            <a:pPr algn="ctr" indent="0" marL="0">
+              <a:buNone/>
+            </a:pPr>
+            <a:r>
+              <a:rPr lang="en-US" sz="1400" b="1" dirty="0">
+                <a:solidFill>
+                  <a:srgbClr val="1E2A33"/>
+                </a:solidFill>
+                <a:latin typeface="Calibri" pitchFamily="34" charset="0"/>
+                <a:ea typeface="Calibri" pitchFamily="34" charset="-122"/>
+                <a:cs typeface="Calibri" pitchFamily="34" charset="-120"/>
+              </a:rPr>
+              <a:t>Fog node</a:t>
+            </a:r>
+            <a:endParaRPr lang="en-US" sz="1400" dirty="0"/>
+          </a:p>
+        </p:txBody>
+      </p:sp>
+      <p:sp>
+        <p:nvSpPr>
+          <p:cNvPr id="10" name="Text 8"/>
+          <p:cNvSpPr/>
+          <p:nvPr/>
+        </p:nvSpPr>
+        <p:spPr>
+          <a:xfrm>
+            <a:off x="914400" y="4050792"/>
+            <a:ext cx="2651760" cy="365760"/>
+          </a:xfrm>
+          <a:prstGeom prst="rect">
+            <a:avLst/>
+          </a:prstGeom>
+          <a:noFill/>
+          <a:ln/>
+        </p:spPr>
+        <p:txBody>
+          <a:bodyPr wrap="square" lIns="0" tIns="0" rIns="0" bIns="0" rtlCol="0" anchor="ctr"/>
+          <a:lstStyle/>
+          <a:p>
+            <a:pPr algn="ctr" indent="0" marL="0">
+              <a:buNone/>
+            </a:pPr>
+            <a:r>
+              <a:rPr lang="en-US" sz="1000" dirty="0">
+                <a:solidFill>
+                  <a:srgbClr val="5F6E78"/>
+                </a:solidFill>
+                <a:latin typeface="Calibri" pitchFamily="34" charset="0"/>
+                <a:ea typeface="Calibri" pitchFamily="34" charset="-122"/>
+                <a:cs typeface="Calibri" pitchFamily="34" charset="-120"/>
+              </a:rPr>
+              <a:t>10 s windows · edge alarms</a:t>
+            </a:r>
+            <a:endParaRPr lang="en-US" sz="1000" dirty="0"/>
+          </a:p>
+        </p:txBody>
+      </p:sp>
+      <p:sp>
+        <p:nvSpPr>
+          <p:cNvPr id="11" name="Shape 9"/>
+          <p:cNvSpPr/>
+          <p:nvPr/>
+        </p:nvSpPr>
+        <p:spPr>
+          <a:xfrm>
+            <a:off x="3886200" y="3246120"/>
+            <a:ext cx="502920" cy="0"/>
+          </a:xfrm>
+          <a:prstGeom prst="line">
+            <a:avLst/>
+          </a:prstGeom>
+          <a:noFill/>
+          <a:ln w="31750">
+            <a:solidFill>
+              <a:srgbClr val="37474F"/>
+            </a:solidFill>
+            <a:prstDash val="solid"/>
             <a:tailEnd type="triangle"/>
           </a:ln>
         </p:spPr>
       </p:sp>
       <p:sp>
         <p:nvSpPr>
-          <p:cNvPr id="13" name="Shape 11"/>
-          <p:cNvSpPr/>
-          <p:nvPr/>
-        </p:nvSpPr>
-        <p:spPr>
-          <a:xfrm>
-            <a:off x="4375587" y="2468880"/>
-            <a:ext cx="1572768" cy="1371600"/>
+          <p:cNvPr id="12" name="Shape 10"/>
+          <p:cNvSpPr/>
+          <p:nvPr/>
+        </p:nvSpPr>
+        <p:spPr>
+          <a:xfrm>
+            <a:off x="4572000" y="1554480"/>
+            <a:ext cx="6949440" cy="3383280"/>
           </a:xfrm>
           <a:prstGeom prst="roundRect">
             <a:avLst>
-              <a:gd name="adj" fmla="val 6667"/>
+              <a:gd name="adj" fmla="val 2703"/>
             </a:avLst>
           </a:prstGeom>
           <a:solidFill>
@@ -1897,99 +1938,145 @@
       </p:sp>
       <p:sp>
         <p:nvSpPr>
-          <p:cNvPr id="14" name="Shape 12"/>
-          <p:cNvSpPr/>
-          <p:nvPr/>
-        </p:nvSpPr>
-        <p:spPr>
-          <a:xfrm>
-            <a:off x="5061387" y="2670048"/>
-            <a:ext cx="201168" cy="201168"/>
-          </a:xfrm>
-          <a:prstGeom prst="ellipse">
-            <a:avLst/>
-          </a:prstGeom>
-          <a:solidFill>
-            <a:srgbClr val="37474F"/>
-          </a:solidFill>
-          <a:ln/>
-        </p:spPr>
-      </p:sp>
-      <p:sp>
-        <p:nvSpPr>
-          <p:cNvPr id="15" name="Text 13"/>
-          <p:cNvSpPr/>
-          <p:nvPr/>
-        </p:nvSpPr>
-        <p:spPr>
-          <a:xfrm>
-            <a:off x="4329867" y="2926080"/>
-            <a:ext cx="1664208" cy="411480"/>
-          </a:xfrm>
-          <a:prstGeom prst="rect">
-            <a:avLst/>
-          </a:prstGeom>
-          <a:noFill/>
-          <a:ln/>
-        </p:spPr>
-        <p:txBody>
-          <a:bodyPr wrap="square" lIns="0" tIns="0" rIns="0" bIns="0" rtlCol="0" anchor="ctr"/>
+          <p:cNvPr id="13" name="Text 11"/>
+          <p:cNvSpPr/>
+          <p:nvPr/>
+        </p:nvSpPr>
+        <p:spPr>
+          <a:xfrm>
+            <a:off x="4572000" y="1691640"/>
+            <a:ext cx="6949440" cy="365760"/>
+          </a:xfrm>
+          <a:prstGeom prst="rect">
+            <a:avLst/>
+          </a:prstGeom>
+          <a:noFill/>
+          <a:ln/>
+        </p:spPr>
+        <p:txBody>
+          <a:bodyPr wrap="square" rtlCol="0" anchor="ctr"/>
           <a:lstStyle/>
           <a:p>
             <a:pPr algn="ctr" indent="0" marL="0">
               <a:buNone/>
             </a:pPr>
             <a:r>
-              <a:rPr lang="en-US" sz="1450" b="1" dirty="0">
-                <a:solidFill>
-                  <a:srgbClr val="1E2A33"/>
+              <a:rPr lang="en-US" sz="1200" b="1" spc="200" kern="0" dirty="0">
+                <a:solidFill>
+                  <a:srgbClr val="37474F"/>
                 </a:solidFill>
                 <a:latin typeface="Calibri" pitchFamily="34" charset="0"/>
                 <a:ea typeface="Calibri" pitchFamily="34" charset="-122"/>
                 <a:cs typeface="Calibri" pitchFamily="34" charset="-120"/>
               </a:rPr>
-              <a:t>Amazon SQS</a:t>
-            </a:r>
-            <a:endParaRPr lang="en-US" sz="1450" dirty="0"/>
-          </a:p>
-        </p:txBody>
-      </p:sp>
-      <p:sp>
-        <p:nvSpPr>
-          <p:cNvPr id="16" name="Text 14"/>
-          <p:cNvSpPr/>
-          <p:nvPr/>
-        </p:nvSpPr>
-        <p:spPr>
-          <a:xfrm>
-            <a:off x="4357299" y="3310128"/>
-            <a:ext cx="1609344" cy="457200"/>
-          </a:xfrm>
-          <a:prstGeom prst="rect">
-            <a:avLst/>
-          </a:prstGeom>
-          <a:noFill/>
-          <a:ln/>
-        </p:spPr>
-        <p:txBody>
-          <a:bodyPr wrap="square" lIns="0" tIns="0" rIns="0" bIns="0" rtlCol="0" anchor="t"/>
+              <a:t>CLOUD (serverless)</a:t>
+            </a:r>
+            <a:endParaRPr lang="en-US" sz="1200" dirty="0"/>
+          </a:p>
+        </p:txBody>
+      </p:sp>
+      <p:sp>
+        <p:nvSpPr>
+          <p:cNvPr id="14" name="Shape 12"/>
+          <p:cNvSpPr/>
+          <p:nvPr/>
+        </p:nvSpPr>
+        <p:spPr>
+          <a:xfrm>
+            <a:off x="4846320" y="2651760"/>
+            <a:ext cx="1463040" cy="1371600"/>
+          </a:xfrm>
+          <a:prstGeom prst="roundRect">
+            <a:avLst>
+              <a:gd name="adj" fmla="val 5333"/>
+            </a:avLst>
+          </a:prstGeom>
+          <a:solidFill>
+            <a:srgbClr val="FFFFFF"/>
+          </a:solidFill>
+          <a:ln w="15240">
+            <a:solidFill>
+              <a:srgbClr val="37474F"/>
+            </a:solidFill>
+            <a:prstDash val="solid"/>
+          </a:ln>
+        </p:spPr>
+      </p:sp>
+      <p:sp>
+        <p:nvSpPr>
+          <p:cNvPr id="15" name="Text 13"/>
+          <p:cNvSpPr/>
+          <p:nvPr/>
+        </p:nvSpPr>
+        <p:spPr>
+          <a:xfrm>
+            <a:off x="4800600" y="2907792"/>
+            <a:ext cx="1554480" cy="457200"/>
+          </a:xfrm>
+          <a:prstGeom prst="rect">
+            <a:avLst/>
+          </a:prstGeom>
+          <a:noFill/>
+          <a:ln/>
+        </p:spPr>
+        <p:txBody>
+          <a:bodyPr wrap="square" lIns="0" tIns="0" rIns="0" bIns="0" rtlCol="0" anchor="ctr"/>
           <a:lstStyle/>
           <a:p>
             <a:pPr algn="ctr" indent="0" marL="0">
               <a:buNone/>
             </a:pPr>
             <a:r>
-              <a:rPr lang="en-US" sz="1050" dirty="0">
-                <a:solidFill>
-                  <a:srgbClr val="5F6E78"/>
+              <a:rPr lang="en-US" sz="1250" b="1" dirty="0">
+                <a:solidFill>
+                  <a:srgbClr val="1E2A33"/>
                 </a:solidFill>
                 <a:latin typeface="Calibri" pitchFamily="34" charset="0"/>
                 <a:ea typeface="Calibri" pitchFamily="34" charset="-122"/>
                 <a:cs typeface="Calibri" pitchFamily="34" charset="-120"/>
               </a:rPr>
+              <a:t>Amazon SQS</a:t>
+            </a:r>
+            <a:endParaRPr lang="en-US" sz="1250" dirty="0"/>
+          </a:p>
+        </p:txBody>
+      </p:sp>
+      <p:sp>
+        <p:nvSpPr>
+          <p:cNvPr id="16" name="Text 14"/>
+          <p:cNvSpPr/>
+          <p:nvPr/>
+        </p:nvSpPr>
+        <p:spPr>
+          <a:xfrm>
+            <a:off x="4828032" y="3401568"/>
+            <a:ext cx="1499616" cy="457200"/>
+          </a:xfrm>
+          <a:prstGeom prst="rect">
+            <a:avLst/>
+          </a:prstGeom>
+          <a:noFill/>
+          <a:ln/>
+        </p:spPr>
+        <p:txBody>
+          <a:bodyPr wrap="square" lIns="0" tIns="0" rIns="0" bIns="0" rtlCol="0" anchor="ctr"/>
+          <a:lstStyle/>
+          <a:p>
+            <a:pPr algn="ctr" indent="0" marL="0">
+              <a:buNone/>
+            </a:pPr>
+            <a:r>
+              <a:rPr lang="en-US" sz="900" dirty="0">
+                <a:solidFill>
+                  <a:srgbClr val="5F6E78"/>
+                </a:solidFill>
+                <a:latin typeface="Calibri" pitchFamily="34" charset="0"/>
+                <a:ea typeface="Calibri" pitchFamily="34" charset="-122"/>
+                <a:cs typeface="Calibri" pitchFamily="34" charset="-120"/>
+              </a:rPr>
               <a:t>one aggregate / window</a:t>
             </a:r>
-            <a:endParaRPr lang="en-US" sz="1050" dirty="0"/>
+            <a:endParaRPr lang="en-US" sz="900" dirty="0"/>
           </a:p>
         </p:txBody>
       </p:sp>
@@ -2001,14 +2088,14 @@
         </p:nvSpPr>
         <p:spPr>
           <a:xfrm>
-            <a:off x="5966643" y="3154680"/>
-            <a:ext cx="258409" cy="0"/>
+            <a:off x="6318504" y="3337560"/>
+            <a:ext cx="164592" cy="0"/>
           </a:xfrm>
           <a:prstGeom prst="line">
             <a:avLst/>
           </a:prstGeom>
           <a:noFill/>
-          <a:ln w="25400">
+          <a:ln w="20320">
             <a:solidFill>
               <a:srgbClr val="6C8A9A"/>
             </a:solidFill>
@@ -2025,18 +2112,18 @@
         </p:nvSpPr>
         <p:spPr>
           <a:xfrm>
-            <a:off x="6243340" y="2468880"/>
-            <a:ext cx="1572768" cy="1371600"/>
+            <a:off x="6492240" y="2651760"/>
+            <a:ext cx="1463040" cy="1371600"/>
           </a:xfrm>
           <a:prstGeom prst="roundRect">
             <a:avLst>
-              <a:gd name="adj" fmla="val 6667"/>
+              <a:gd name="adj" fmla="val 5333"/>
             </a:avLst>
           </a:prstGeom>
           <a:solidFill>
-            <a:srgbClr val="EEF2F4"/>
+            <a:srgbClr val="FFFFFF"/>
           </a:solidFill>
-          <a:ln w="19050">
+          <a:ln w="15240">
             <a:solidFill>
               <a:srgbClr val="37474F"/>
             </a:solidFill>
@@ -2046,34 +2133,14 @@
       </p:sp>
       <p:sp>
         <p:nvSpPr>
-          <p:cNvPr id="19" name="Shape 17"/>
-          <p:cNvSpPr/>
-          <p:nvPr/>
-        </p:nvSpPr>
-        <p:spPr>
-          <a:xfrm>
-            <a:off x="6929140" y="2670048"/>
-            <a:ext cx="201168" cy="201168"/>
-          </a:xfrm>
-          <a:prstGeom prst="ellipse">
-            <a:avLst/>
-          </a:prstGeom>
-          <a:solidFill>
-            <a:srgbClr val="37474F"/>
-          </a:solidFill>
-          <a:ln/>
-        </p:spPr>
-      </p:sp>
-      <p:sp>
-        <p:nvSpPr>
-          <p:cNvPr id="20" name="Text 18"/>
-          <p:cNvSpPr/>
-          <p:nvPr/>
-        </p:nvSpPr>
-        <p:spPr>
-          <a:xfrm>
-            <a:off x="6197620" y="2926080"/>
-            <a:ext cx="1664208" cy="411480"/>
+          <p:cNvPr id="19" name="Text 17"/>
+          <p:cNvSpPr/>
+          <p:nvPr/>
+        </p:nvSpPr>
+        <p:spPr>
+          <a:xfrm>
+            <a:off x="6446520" y="2907792"/>
+            <a:ext cx="1554480" cy="457200"/>
           </a:xfrm>
           <a:prstGeom prst="rect">
             <a:avLst/>
@@ -2089,7 +2156,7 @@
               <a:buNone/>
             </a:pPr>
             <a:r>
-              <a:rPr lang="en-US" sz="1450" b="1" dirty="0">
+              <a:rPr lang="en-US" sz="1250" b="1" dirty="0">
                 <a:solidFill>
                   <a:srgbClr val="1E2A33"/>
                 </a:solidFill>
@@ -2099,36 +2166,36 @@
               </a:rPr>
               <a:t>AWS Lambda</a:t>
             </a:r>
-            <a:endParaRPr lang="en-US" sz="1450" dirty="0"/>
-          </a:p>
-        </p:txBody>
-      </p:sp>
-      <p:sp>
-        <p:nvSpPr>
-          <p:cNvPr id="21" name="Text 19"/>
-          <p:cNvSpPr/>
-          <p:nvPr/>
-        </p:nvSpPr>
-        <p:spPr>
-          <a:xfrm>
-            <a:off x="6225052" y="3310128"/>
-            <a:ext cx="1609344" cy="457200"/>
-          </a:xfrm>
-          <a:prstGeom prst="rect">
-            <a:avLst/>
-          </a:prstGeom>
-          <a:noFill/>
-          <a:ln/>
-        </p:spPr>
-        <p:txBody>
-          <a:bodyPr wrap="square" lIns="0" tIns="0" rIns="0" bIns="0" rtlCol="0" anchor="t"/>
+            <a:endParaRPr lang="en-US" sz="1250" dirty="0"/>
+          </a:p>
+        </p:txBody>
+      </p:sp>
+      <p:sp>
+        <p:nvSpPr>
+          <p:cNvPr id="20" name="Text 18"/>
+          <p:cNvSpPr/>
+          <p:nvPr/>
+        </p:nvSpPr>
+        <p:spPr>
+          <a:xfrm>
+            <a:off x="6473952" y="3401568"/>
+            <a:ext cx="1499616" cy="457200"/>
+          </a:xfrm>
+          <a:prstGeom prst="rect">
+            <a:avLst/>
+          </a:prstGeom>
+          <a:noFill/>
+          <a:ln/>
+        </p:spPr>
+        <p:txBody>
+          <a:bodyPr wrap="square" lIns="0" tIns="0" rIns="0" bIns="0" rtlCol="0" anchor="ctr"/>
           <a:lstStyle/>
           <a:p>
             <a:pPr algn="ctr" indent="0" marL="0">
               <a:buNone/>
             </a:pPr>
             <a:r>
-              <a:rPr lang="en-US" sz="1050" dirty="0">
+              <a:rPr lang="en-US" sz="900" dirty="0">
                 <a:solidFill>
                   <a:srgbClr val="5F6E78"/>
                 </a:solidFill>
@@ -2138,26 +2205,26 @@
               </a:rPr>
               <a:t>java17 ingest</a:t>
             </a:r>
-            <a:endParaRPr lang="en-US" sz="1050" dirty="0"/>
-          </a:p>
-        </p:txBody>
-      </p:sp>
-      <p:sp>
-        <p:nvSpPr>
-          <p:cNvPr id="22" name="Shape 20"/>
-          <p:cNvSpPr/>
-          <p:nvPr/>
-        </p:nvSpPr>
-        <p:spPr>
-          <a:xfrm>
-            <a:off x="7834396" y="3154680"/>
-            <a:ext cx="258409" cy="0"/>
+            <a:endParaRPr lang="en-US" sz="900" dirty="0"/>
+          </a:p>
+        </p:txBody>
+      </p:sp>
+      <p:sp>
+        <p:nvSpPr>
+          <p:cNvPr id="21" name="Shape 19"/>
+          <p:cNvSpPr/>
+          <p:nvPr/>
+        </p:nvSpPr>
+        <p:spPr>
+          <a:xfrm>
+            <a:off x="7964424" y="3337560"/>
+            <a:ext cx="164592" cy="0"/>
           </a:xfrm>
           <a:prstGeom prst="line">
             <a:avLst/>
           </a:prstGeom>
           <a:noFill/>
-          <a:ln w="25400">
+          <a:ln w="20320">
             <a:solidFill>
               <a:srgbClr val="6C8A9A"/>
             </a:solidFill>
@@ -2168,24 +2235,24 @@
       </p:sp>
       <p:sp>
         <p:nvSpPr>
-          <p:cNvPr id="23" name="Shape 21"/>
-          <p:cNvSpPr/>
-          <p:nvPr/>
-        </p:nvSpPr>
-        <p:spPr>
-          <a:xfrm>
-            <a:off x="8111094" y="2468880"/>
-            <a:ext cx="1572768" cy="1371600"/>
+          <p:cNvPr id="22" name="Shape 20"/>
+          <p:cNvSpPr/>
+          <p:nvPr/>
+        </p:nvSpPr>
+        <p:spPr>
+          <a:xfrm>
+            <a:off x="8138160" y="2651760"/>
+            <a:ext cx="1463040" cy="1371600"/>
           </a:xfrm>
           <a:prstGeom prst="roundRect">
             <a:avLst>
-              <a:gd name="adj" fmla="val 6667"/>
+              <a:gd name="adj" fmla="val 5333"/>
             </a:avLst>
           </a:prstGeom>
           <a:solidFill>
-            <a:srgbClr val="EEF2F4"/>
+            <a:srgbClr val="FFFFFF"/>
           </a:solidFill>
-          <a:ln w="19050">
+          <a:ln w="15240">
             <a:solidFill>
               <a:srgbClr val="37474F"/>
             </a:solidFill>
@@ -2195,34 +2262,14 @@
       </p:sp>
       <p:sp>
         <p:nvSpPr>
-          <p:cNvPr id="24" name="Shape 22"/>
-          <p:cNvSpPr/>
-          <p:nvPr/>
-        </p:nvSpPr>
-        <p:spPr>
-          <a:xfrm>
-            <a:off x="8796894" y="2670048"/>
-            <a:ext cx="201168" cy="201168"/>
-          </a:xfrm>
-          <a:prstGeom prst="ellipse">
-            <a:avLst/>
-          </a:prstGeom>
-          <a:solidFill>
-            <a:srgbClr val="37474F"/>
-          </a:solidFill>
-          <a:ln/>
-        </p:spPr>
-      </p:sp>
-      <p:sp>
-        <p:nvSpPr>
-          <p:cNvPr id="25" name="Text 23"/>
-          <p:cNvSpPr/>
-          <p:nvPr/>
-        </p:nvSpPr>
-        <p:spPr>
-          <a:xfrm>
-            <a:off x="8065374" y="2926080"/>
-            <a:ext cx="1664208" cy="411480"/>
+          <p:cNvPr id="23" name="Text 21"/>
+          <p:cNvSpPr/>
+          <p:nvPr/>
+        </p:nvSpPr>
+        <p:spPr>
+          <a:xfrm>
+            <a:off x="8092440" y="2907792"/>
+            <a:ext cx="1554480" cy="457200"/>
           </a:xfrm>
           <a:prstGeom prst="rect">
             <a:avLst/>
@@ -2238,7 +2285,7 @@
               <a:buNone/>
             </a:pPr>
             <a:r>
-              <a:rPr lang="en-US" sz="1450" b="1" dirty="0">
+              <a:rPr lang="en-US" sz="1250" b="1" dirty="0">
                 <a:solidFill>
                   <a:srgbClr val="1E2A33"/>
                 </a:solidFill>
@@ -2248,36 +2295,36 @@
               </a:rPr>
               <a:t>DynamoDB</a:t>
             </a:r>
-            <a:endParaRPr lang="en-US" sz="1450" dirty="0"/>
-          </a:p>
-        </p:txBody>
-      </p:sp>
-      <p:sp>
-        <p:nvSpPr>
-          <p:cNvPr id="26" name="Text 24"/>
-          <p:cNvSpPr/>
-          <p:nvPr/>
-        </p:nvSpPr>
-        <p:spPr>
-          <a:xfrm>
-            <a:off x="8092806" y="3310128"/>
-            <a:ext cx="1609344" cy="457200"/>
-          </a:xfrm>
-          <a:prstGeom prst="rect">
-            <a:avLst/>
-          </a:prstGeom>
-          <a:noFill/>
-          <a:ln/>
-        </p:spPr>
-        <p:txBody>
-          <a:bodyPr wrap="square" lIns="0" tIns="0" rIns="0" bIns="0" rtlCol="0" anchor="t"/>
+            <a:endParaRPr lang="en-US" sz="1250" dirty="0"/>
+          </a:p>
+        </p:txBody>
+      </p:sp>
+      <p:sp>
+        <p:nvSpPr>
+          <p:cNvPr id="24" name="Text 22"/>
+          <p:cNvSpPr/>
+          <p:nvPr/>
+        </p:nvSpPr>
+        <p:spPr>
+          <a:xfrm>
+            <a:off x="8119872" y="3401568"/>
+            <a:ext cx="1499616" cy="457200"/>
+          </a:xfrm>
+          <a:prstGeom prst="rect">
+            <a:avLst/>
+          </a:prstGeom>
+          <a:noFill/>
+          <a:ln/>
+        </p:spPr>
+        <p:txBody>
+          <a:bodyPr wrap="square" lIns="0" tIns="0" rIns="0" bIns="0" rtlCol="0" anchor="ctr"/>
           <a:lstStyle/>
           <a:p>
             <a:pPr algn="ctr" indent="0" marL="0">
               <a:buNone/>
             </a:pPr>
             <a:r>
-              <a:rPr lang="en-US" sz="1050" dirty="0">
+              <a:rPr lang="en-US" sz="900" dirty="0">
                 <a:solidFill>
                   <a:srgbClr val="5F6E78"/>
                 </a:solidFill>
@@ -2287,26 +2334,26 @@
               </a:rPr>
               <a:t>keyed by signal · site</a:t>
             </a:r>
-            <a:endParaRPr lang="en-US" sz="1050" dirty="0"/>
-          </a:p>
-        </p:txBody>
-      </p:sp>
-      <p:sp>
-        <p:nvSpPr>
-          <p:cNvPr id="27" name="Shape 25"/>
-          <p:cNvSpPr/>
-          <p:nvPr/>
-        </p:nvSpPr>
-        <p:spPr>
-          <a:xfrm>
-            <a:off x="9702150" y="3154680"/>
-            <a:ext cx="258409" cy="0"/>
+            <a:endParaRPr lang="en-US" sz="900" dirty="0"/>
+          </a:p>
+        </p:txBody>
+      </p:sp>
+      <p:sp>
+        <p:nvSpPr>
+          <p:cNvPr id="25" name="Shape 23"/>
+          <p:cNvSpPr/>
+          <p:nvPr/>
+        </p:nvSpPr>
+        <p:spPr>
+          <a:xfrm>
+            <a:off x="9610344" y="3337560"/>
+            <a:ext cx="164592" cy="0"/>
           </a:xfrm>
           <a:prstGeom prst="line">
             <a:avLst/>
           </a:prstGeom>
           <a:noFill/>
-          <a:ln w="25400">
+          <a:ln w="20320">
             <a:solidFill>
               <a:srgbClr val="6C8A9A"/>
             </a:solidFill>
@@ -2317,24 +2364,24 @@
       </p:sp>
       <p:sp>
         <p:nvSpPr>
-          <p:cNvPr id="28" name="Shape 26"/>
-          <p:cNvSpPr/>
-          <p:nvPr/>
-        </p:nvSpPr>
-        <p:spPr>
-          <a:xfrm>
-            <a:off x="9978847" y="2468880"/>
-            <a:ext cx="1572768" cy="1371600"/>
+          <p:cNvPr id="26" name="Shape 24"/>
+          <p:cNvSpPr/>
+          <p:nvPr/>
+        </p:nvSpPr>
+        <p:spPr>
+          <a:xfrm>
+            <a:off x="9784080" y="2651760"/>
+            <a:ext cx="1463040" cy="1371600"/>
           </a:xfrm>
           <a:prstGeom prst="roundRect">
             <a:avLst>
-              <a:gd name="adj" fmla="val 6667"/>
+              <a:gd name="adj" fmla="val 5333"/>
             </a:avLst>
           </a:prstGeom>
           <a:solidFill>
-            <a:srgbClr val="EEF2F4"/>
+            <a:srgbClr val="FFFFFF"/>
           </a:solidFill>
-          <a:ln w="19050">
+          <a:ln w="15240">
             <a:solidFill>
               <a:srgbClr val="4E6A78"/>
             </a:solidFill>
@@ -2344,34 +2391,14 @@
       </p:sp>
       <p:sp>
         <p:nvSpPr>
-          <p:cNvPr id="29" name="Shape 27"/>
-          <p:cNvSpPr/>
-          <p:nvPr/>
-        </p:nvSpPr>
-        <p:spPr>
-          <a:xfrm>
-            <a:off x="10664647" y="2670048"/>
-            <a:ext cx="201168" cy="201168"/>
-          </a:xfrm>
-          <a:prstGeom prst="ellipse">
-            <a:avLst/>
-          </a:prstGeom>
-          <a:solidFill>
-            <a:srgbClr val="4E6A78"/>
-          </a:solidFill>
-          <a:ln/>
-        </p:spPr>
-      </p:sp>
-      <p:sp>
-        <p:nvSpPr>
-          <p:cNvPr id="30" name="Text 28"/>
-          <p:cNvSpPr/>
-          <p:nvPr/>
-        </p:nvSpPr>
-        <p:spPr>
-          <a:xfrm>
-            <a:off x="9933127" y="2926080"/>
-            <a:ext cx="1664208" cy="411480"/>
+          <p:cNvPr id="27" name="Text 25"/>
+          <p:cNvSpPr/>
+          <p:nvPr/>
+        </p:nvSpPr>
+        <p:spPr>
+          <a:xfrm>
+            <a:off x="9738360" y="2907792"/>
+            <a:ext cx="1554480" cy="457200"/>
           </a:xfrm>
           <a:prstGeom prst="rect">
             <a:avLst/>
@@ -2387,7 +2414,7 @@
               <a:buNone/>
             </a:pPr>
             <a:r>
-              <a:rPr lang="en-US" sz="1450" b="1" dirty="0">
+              <a:rPr lang="en-US" sz="1250" b="1" dirty="0">
                 <a:solidFill>
                   <a:srgbClr val="1E2A33"/>
                 </a:solidFill>
@@ -2397,36 +2424,36 @@
               </a:rPr>
               <a:t>API GW + S3</a:t>
             </a:r>
-            <a:endParaRPr lang="en-US" sz="1450" dirty="0"/>
-          </a:p>
-        </p:txBody>
-      </p:sp>
-      <p:sp>
-        <p:nvSpPr>
-          <p:cNvPr id="31" name="Text 29"/>
-          <p:cNvSpPr/>
-          <p:nvPr/>
-        </p:nvSpPr>
-        <p:spPr>
-          <a:xfrm>
-            <a:off x="9960559" y="3310128"/>
-            <a:ext cx="1609344" cy="457200"/>
-          </a:xfrm>
-          <a:prstGeom prst="rect">
-            <a:avLst/>
-          </a:prstGeom>
-          <a:noFill/>
-          <a:ln/>
-        </p:spPr>
-        <p:txBody>
-          <a:bodyPr wrap="square" lIns="0" tIns="0" rIns="0" bIns="0" rtlCol="0" anchor="t"/>
+            <a:endParaRPr lang="en-US" sz="1250" dirty="0"/>
+          </a:p>
+        </p:txBody>
+      </p:sp>
+      <p:sp>
+        <p:nvSpPr>
+          <p:cNvPr id="28" name="Text 26"/>
+          <p:cNvSpPr/>
+          <p:nvPr/>
+        </p:nvSpPr>
+        <p:spPr>
+          <a:xfrm>
+            <a:off x="9765792" y="3401568"/>
+            <a:ext cx="1499616" cy="457200"/>
+          </a:xfrm>
+          <a:prstGeom prst="rect">
+            <a:avLst/>
+          </a:prstGeom>
+          <a:noFill/>
+          <a:ln/>
+        </p:spPr>
+        <p:txBody>
+          <a:bodyPr wrap="square" lIns="0" tIns="0" rIns="0" bIns="0" rtlCol="0" anchor="ctr"/>
           <a:lstStyle/>
           <a:p>
             <a:pPr algn="ctr" indent="0" marL="0">
               <a:buNone/>
             </a:pPr>
             <a:r>
-              <a:rPr lang="en-US" sz="1050" dirty="0">
+              <a:rPr lang="en-US" sz="900" dirty="0">
                 <a:solidFill>
                   <a:srgbClr val="5F6E78"/>
                 </a:solidFill>
@@ -2436,98 +2463,20 @@
               </a:rPr>
               <a:t>live dashboard</a:t>
             </a:r>
-            <a:endParaRPr lang="en-US" sz="1050" dirty="0"/>
-          </a:p>
-        </p:txBody>
-      </p:sp>
-      <p:sp>
-        <p:nvSpPr>
-          <p:cNvPr id="32" name="Text 30"/>
-          <p:cNvSpPr/>
-          <p:nvPr/>
-        </p:nvSpPr>
-        <p:spPr>
-          <a:xfrm>
-            <a:off x="640080" y="3977640"/>
-            <a:ext cx="3440521" cy="274320"/>
-          </a:xfrm>
-          <a:prstGeom prst="rect">
-            <a:avLst/>
-          </a:prstGeom>
-          <a:noFill/>
-          <a:ln/>
-        </p:spPr>
-        <p:txBody>
-          <a:bodyPr wrap="square" rtlCol="0" anchor="ctr"/>
-          <a:lstStyle/>
-          <a:p>
-            <a:pPr algn="ctr" indent="0" marL="0">
-              <a:buNone/>
-            </a:pPr>
-            <a:r>
-              <a:rPr lang="en-US" sz="1100" b="1" spc="200" kern="0" dirty="0">
-                <a:solidFill>
-                  <a:srgbClr val="6C8A9A"/>
-                </a:solidFill>
-                <a:latin typeface="Calibri" pitchFamily="34" charset="0"/>
-                <a:ea typeface="Calibri" pitchFamily="34" charset="-122"/>
-                <a:cs typeface="Calibri" pitchFamily="34" charset="-120"/>
-              </a:rPr>
-              <a:t>EDGE</a:t>
-            </a:r>
-            <a:endParaRPr lang="en-US" sz="1100" dirty="0"/>
-          </a:p>
-        </p:txBody>
-      </p:sp>
-      <p:sp>
-        <p:nvSpPr>
-          <p:cNvPr id="33" name="Text 31"/>
-          <p:cNvSpPr/>
-          <p:nvPr/>
-        </p:nvSpPr>
-        <p:spPr>
-          <a:xfrm>
-            <a:off x="4375587" y="3977640"/>
-            <a:ext cx="7176028" cy="274320"/>
-          </a:xfrm>
-          <a:prstGeom prst="rect">
-            <a:avLst/>
-          </a:prstGeom>
-          <a:noFill/>
-          <a:ln/>
-        </p:spPr>
-        <p:txBody>
-          <a:bodyPr wrap="square" rtlCol="0" anchor="ctr"/>
-          <a:lstStyle/>
-          <a:p>
-            <a:pPr algn="ctr" indent="0" marL="0">
-              <a:buNone/>
-            </a:pPr>
-            <a:r>
-              <a:rPr lang="en-US" sz="1100" b="1" spc="200" kern="0" dirty="0">
-                <a:solidFill>
-                  <a:srgbClr val="37474F"/>
-                </a:solidFill>
-                <a:latin typeface="Calibri" pitchFamily="34" charset="0"/>
-                <a:ea typeface="Calibri" pitchFamily="34" charset="-122"/>
-                <a:cs typeface="Calibri" pitchFamily="34" charset="-120"/>
-              </a:rPr>
-              <a:t>CLOUD</a:t>
-            </a:r>
-            <a:endParaRPr lang="en-US" sz="1100" dirty="0"/>
-          </a:p>
-        </p:txBody>
-      </p:sp>
-      <p:sp>
-        <p:nvSpPr>
-          <p:cNvPr id="34" name="Text 32"/>
-          <p:cNvSpPr/>
-          <p:nvPr/>
-        </p:nvSpPr>
-        <p:spPr>
-          <a:xfrm>
-            <a:off x="640080" y="5212080"/>
-            <a:ext cx="10972800" cy="640080"/>
+            <a:endParaRPr lang="en-US" sz="900" dirty="0"/>
+          </a:p>
+        </p:txBody>
+      </p:sp>
+      <p:sp>
+        <p:nvSpPr>
+          <p:cNvPr id="29" name="Text 27"/>
+          <p:cNvSpPr/>
+          <p:nvPr/>
+        </p:nvSpPr>
+        <p:spPr>
+          <a:xfrm>
+            <a:off x="640080" y="5257800"/>
+            <a:ext cx="10972800" cy="731520"/>
           </a:xfrm>
           <a:prstGeom prst="rect">
             <a:avLst/>
@@ -2669,34 +2618,14 @@
       </p:sp>
       <p:sp>
         <p:nvSpPr>
-          <p:cNvPr id="4" name="Shape 2"/>
-          <p:cNvSpPr/>
-          <p:nvPr/>
-        </p:nvSpPr>
-        <p:spPr>
-          <a:xfrm>
-            <a:off x="731520" y="1965960"/>
-            <a:ext cx="685800" cy="685800"/>
-          </a:xfrm>
-          <a:prstGeom prst="ellipse">
-            <a:avLst/>
-          </a:prstGeom>
-          <a:solidFill>
-            <a:srgbClr val="37474F"/>
-          </a:solidFill>
-          <a:ln/>
-        </p:spPr>
-      </p:sp>
-      <p:sp>
-        <p:nvSpPr>
-          <p:cNvPr id="5" name="Text 3"/>
-          <p:cNvSpPr/>
-          <p:nvPr/>
-        </p:nvSpPr>
-        <p:spPr>
-          <a:xfrm>
-            <a:off x="731520" y="1965960"/>
-            <a:ext cx="685800" cy="685800"/>
+          <p:cNvPr id="4" name="Text 2"/>
+          <p:cNvSpPr/>
+          <p:nvPr/>
+        </p:nvSpPr>
+        <p:spPr>
+          <a:xfrm>
+            <a:off x="640080" y="1737360"/>
+            <a:ext cx="1097280" cy="1097280"/>
           </a:xfrm>
           <a:prstGeom prst="rect">
             <a:avLst/>
@@ -2708,13 +2637,13 @@
           <a:bodyPr wrap="square" lIns="0" tIns="0" rIns="0" bIns="0" rtlCol="0" anchor="ctr"/>
           <a:lstStyle/>
           <a:p>
-            <a:pPr algn="ctr" indent="0" marL="0">
-              <a:buNone/>
-            </a:pPr>
-            <a:r>
-              <a:rPr lang="en-US" sz="2600" b="1" dirty="0">
-                <a:solidFill>
-                  <a:srgbClr val="FFFFFF"/>
+            <a:pPr indent="0" marL="0">
+              <a:buNone/>
+            </a:pPr>
+            <a:r>
+              <a:rPr lang="en-US" sz="5400" b="1" dirty="0">
+                <a:solidFill>
+                  <a:srgbClr val="EEF2F4"/>
                 </a:solidFill>
                 <a:latin typeface="Bookman Old Style" pitchFamily="34" charset="0"/>
                 <a:ea typeface="Bookman Old Style" pitchFamily="34" charset="-122"/>
@@ -2722,9 +2651,32 @@
               </a:rPr>
               <a:t>1</a:t>
             </a:r>
-            <a:endParaRPr lang="en-US" sz="2600" dirty="0"/>
-          </a:p>
-        </p:txBody>
+            <a:endParaRPr lang="en-US" sz="5400" dirty="0"/>
+          </a:p>
+        </p:txBody>
+      </p:sp>
+      <p:sp>
+        <p:nvSpPr>
+          <p:cNvPr id="5" name="Shape 3"/>
+          <p:cNvSpPr/>
+          <p:nvPr/>
+        </p:nvSpPr>
+        <p:spPr>
+          <a:xfrm>
+            <a:off x="1828800" y="1920240"/>
+            <a:ext cx="0" cy="1051560"/>
+          </a:xfrm>
+          <a:prstGeom prst="line">
+            <a:avLst/>
+          </a:prstGeom>
+          <a:noFill/>
+          <a:ln w="25400">
+            <a:solidFill>
+              <a:srgbClr val="4E6A78"/>
+            </a:solidFill>
+            <a:prstDash val="solid"/>
+          </a:ln>
+        </p:spPr>
       </p:sp>
       <p:sp>
         <p:nvSpPr>
@@ -2734,8 +2686,8 @@
         </p:nvSpPr>
         <p:spPr>
           <a:xfrm>
-            <a:off x="1691640" y="1920240"/>
-            <a:ext cx="9875520" cy="411480"/>
+            <a:off x="2057400" y="1874520"/>
+            <a:ext cx="9509760" cy="411480"/>
           </a:xfrm>
           <a:prstGeom prst="rect">
             <a:avLst/>
@@ -2759,7 +2711,7 @@
                 <a:ea typeface="Calibri" pitchFamily="34" charset="-122"/>
                 <a:cs typeface="Calibri" pitchFamily="34" charset="-120"/>
               </a:rPr>
-              <a:t>Pipeline health, all green</a:t>
+              <a:t>A card per signal, per line</a:t>
             </a:r>
             <a:endParaRPr lang="en-US" sz="1800" dirty="0"/>
           </a:p>
@@ -2773,8 +2725,8 @@
         </p:nvSpPr>
         <p:spPr>
           <a:xfrm>
-            <a:off x="1691640" y="2340864"/>
-            <a:ext cx="9875520" cy="640080"/>
+            <a:off x="2057400" y="2313432"/>
+            <a:ext cx="9509760" cy="822960"/>
           </a:xfrm>
           <a:prstGeom prst="rect">
             <a:avLst/>
@@ -2798,7 +2750,7 @@
                 <a:ea typeface="Calibri" pitchFamily="34" charset="-122"/>
                 <a:cs typeface="Calibri" pitchFamily="34" charset="-120"/>
               </a:rPr>
-              <a:t>Fog gateway, queue, Lambda and data flow all report healthy, and every one of the five signal types lands in the datastore.</a:t>
+              <a:t>Vibration, motor temperature, bearing acoustic, rotation speed and power draw live on both production lines, each with its real alarm limit and a sparkline.</a:t>
             </a:r>
             <a:endParaRPr lang="en-US" sz="1350" dirty="0"/>
           </a:p>
@@ -2806,34 +2758,14 @@
       </p:sp>
       <p:sp>
         <p:nvSpPr>
-          <p:cNvPr id="8" name="Shape 6"/>
-          <p:cNvSpPr/>
-          <p:nvPr/>
-        </p:nvSpPr>
-        <p:spPr>
-          <a:xfrm>
-            <a:off x="731520" y="3383280"/>
-            <a:ext cx="685800" cy="685800"/>
-          </a:xfrm>
-          <a:prstGeom prst="ellipse">
-            <a:avLst/>
-          </a:prstGeom>
-          <a:solidFill>
-            <a:srgbClr val="37474F"/>
-          </a:solidFill>
-          <a:ln/>
-        </p:spPr>
-      </p:sp>
-      <p:sp>
-        <p:nvSpPr>
-          <p:cNvPr id="9" name="Text 7"/>
-          <p:cNvSpPr/>
-          <p:nvPr/>
-        </p:nvSpPr>
-        <p:spPr>
-          <a:xfrm>
-            <a:off x="731520" y="3383280"/>
-            <a:ext cx="685800" cy="685800"/>
+          <p:cNvPr id="8" name="Text 6"/>
+          <p:cNvSpPr/>
+          <p:nvPr/>
+        </p:nvSpPr>
+        <p:spPr>
+          <a:xfrm>
+            <a:off x="640080" y="3200400"/>
+            <a:ext cx="1097280" cy="1097280"/>
           </a:xfrm>
           <a:prstGeom prst="rect">
             <a:avLst/>
@@ -2845,13 +2777,13 @@
           <a:bodyPr wrap="square" lIns="0" tIns="0" rIns="0" bIns="0" rtlCol="0" anchor="ctr"/>
           <a:lstStyle/>
           <a:p>
-            <a:pPr algn="ctr" indent="0" marL="0">
-              <a:buNone/>
-            </a:pPr>
-            <a:r>
-              <a:rPr lang="en-US" sz="2600" b="1" dirty="0">
-                <a:solidFill>
-                  <a:srgbClr val="FFFFFF"/>
+            <a:pPr indent="0" marL="0">
+              <a:buNone/>
+            </a:pPr>
+            <a:r>
+              <a:rPr lang="en-US" sz="5400" b="1" dirty="0">
+                <a:solidFill>
+                  <a:srgbClr val="EEF2F4"/>
                 </a:solidFill>
                 <a:latin typeface="Bookman Old Style" pitchFamily="34" charset="0"/>
                 <a:ea typeface="Bookman Old Style" pitchFamily="34" charset="-122"/>
@@ -2859,9 +2791,32 @@
               </a:rPr>
               <a:t>2</a:t>
             </a:r>
-            <a:endParaRPr lang="en-US" sz="2600" dirty="0"/>
-          </a:p>
-        </p:txBody>
+            <a:endParaRPr lang="en-US" sz="5400" dirty="0"/>
+          </a:p>
+        </p:txBody>
+      </p:sp>
+      <p:sp>
+        <p:nvSpPr>
+          <p:cNvPr id="9" name="Shape 7"/>
+          <p:cNvSpPr/>
+          <p:nvPr/>
+        </p:nvSpPr>
+        <p:spPr>
+          <a:xfrm>
+            <a:off x="1828800" y="3383280"/>
+            <a:ext cx="0" cy="1051560"/>
+          </a:xfrm>
+          <a:prstGeom prst="line">
+            <a:avLst/>
+          </a:prstGeom>
+          <a:noFill/>
+          <a:ln w="25400">
+            <a:solidFill>
+              <a:srgbClr val="4E6A78"/>
+            </a:solidFill>
+            <a:prstDash val="solid"/>
+          </a:ln>
+        </p:spPr>
       </p:sp>
       <p:sp>
         <p:nvSpPr>
@@ -2871,8 +2826,8 @@
         </p:nvSpPr>
         <p:spPr>
           <a:xfrm>
-            <a:off x="1691640" y="3337560"/>
-            <a:ext cx="9875520" cy="411480"/>
+            <a:off x="2057400" y="3337560"/>
+            <a:ext cx="9509760" cy="411480"/>
           </a:xfrm>
           <a:prstGeom prst="rect">
             <a:avLst/>
@@ -2896,7 +2851,7 @@
                 <a:ea typeface="Calibri" pitchFamily="34" charset="-122"/>
                 <a:cs typeface="Calibri" pitchFamily="34" charset="-120"/>
               </a:rPr>
-              <a:t>Live plant-floor readings</a:t>
+              <a:t>The two-sided speed rule</a:t>
             </a:r>
             <a:endParaRPr lang="en-US" sz="1800" dirty="0"/>
           </a:p>
@@ -2910,8 +2865,8 @@
         </p:nvSpPr>
         <p:spPr>
           <a:xfrm>
-            <a:off x="1691640" y="3758184"/>
-            <a:ext cx="9875520" cy="640080"/>
+            <a:off x="2057400" y="3776472"/>
+            <a:ext cx="9509760" cy="822960"/>
           </a:xfrm>
           <a:prstGeom prst="rect">
             <a:avLst/>
@@ -2935,7 +2890,7 @@
                 <a:ea typeface="Calibri" pitchFamily="34" charset="-122"/>
                 <a:cs typeface="Calibri" pitchFamily="34" charset="-120"/>
               </a:rPr>
-              <a:t>A card per signal with its current reading, real alarm limit and trend across two production lines, plus the health footer.</a:t>
+              <a:t>Rotation speed is the one signal faulted at both ends — an underspeed alarm at 1,000 RPM and an overspeed at 3,400 — unlike the four single-limit signals.</a:t>
             </a:r>
             <a:endParaRPr lang="en-US" sz="1350" dirty="0"/>
           </a:p>
@@ -2943,34 +2898,14 @@
       </p:sp>
       <p:sp>
         <p:nvSpPr>
-          <p:cNvPr id="12" name="Shape 10"/>
-          <p:cNvSpPr/>
-          <p:nvPr/>
-        </p:nvSpPr>
-        <p:spPr>
-          <a:xfrm>
-            <a:off x="731520" y="4800600"/>
-            <a:ext cx="685800" cy="685800"/>
-          </a:xfrm>
-          <a:prstGeom prst="ellipse">
-            <a:avLst/>
-          </a:prstGeom>
-          <a:solidFill>
-            <a:srgbClr val="37474F"/>
-          </a:solidFill>
-          <a:ln/>
-        </p:spPr>
-      </p:sp>
-      <p:sp>
-        <p:nvSpPr>
-          <p:cNvPr id="13" name="Text 11"/>
-          <p:cNvSpPr/>
-          <p:nvPr/>
-        </p:nvSpPr>
-        <p:spPr>
-          <a:xfrm>
-            <a:off x="731520" y="4800600"/>
-            <a:ext cx="685800" cy="685800"/>
+          <p:cNvPr id="12" name="Text 10"/>
+          <p:cNvSpPr/>
+          <p:nvPr/>
+        </p:nvSpPr>
+        <p:spPr>
+          <a:xfrm>
+            <a:off x="640080" y="4663440"/>
+            <a:ext cx="1097280" cy="1097280"/>
           </a:xfrm>
           <a:prstGeom prst="rect">
             <a:avLst/>
@@ -2982,13 +2917,13 @@
           <a:bodyPr wrap="square" lIns="0" tIns="0" rIns="0" bIns="0" rtlCol="0" anchor="ctr"/>
           <a:lstStyle/>
           <a:p>
-            <a:pPr algn="ctr" indent="0" marL="0">
-              <a:buNone/>
-            </a:pPr>
-            <a:r>
-              <a:rPr lang="en-US" sz="2600" b="1" dirty="0">
-                <a:solidFill>
-                  <a:srgbClr val="FFFFFF"/>
+            <a:pPr indent="0" marL="0">
+              <a:buNone/>
+            </a:pPr>
+            <a:r>
+              <a:rPr lang="en-US" sz="5400" b="1" dirty="0">
+                <a:solidFill>
+                  <a:srgbClr val="EEF2F4"/>
                 </a:solidFill>
                 <a:latin typeface="Bookman Old Style" pitchFamily="34" charset="0"/>
                 <a:ea typeface="Bookman Old Style" pitchFamily="34" charset="-122"/>
@@ -2996,9 +2931,32 @@
               </a:rPr>
               <a:t>3</a:t>
             </a:r>
-            <a:endParaRPr lang="en-US" sz="2600" dirty="0"/>
-          </a:p>
-        </p:txBody>
+            <a:endParaRPr lang="en-US" sz="5400" dirty="0"/>
+          </a:p>
+        </p:txBody>
+      </p:sp>
+      <p:sp>
+        <p:nvSpPr>
+          <p:cNvPr id="13" name="Shape 11"/>
+          <p:cNvSpPr/>
+          <p:nvPr/>
+        </p:nvSpPr>
+        <p:spPr>
+          <a:xfrm>
+            <a:off x="1828800" y="4846320"/>
+            <a:ext cx="0" cy="1051560"/>
+          </a:xfrm>
+          <a:prstGeom prst="line">
+            <a:avLst/>
+          </a:prstGeom>
+          <a:noFill/>
+          <a:ln w="25400">
+            <a:solidFill>
+              <a:srgbClr val="4E6A78"/>
+            </a:solidFill>
+            <a:prstDash val="solid"/>
+          </a:ln>
+        </p:spPr>
       </p:sp>
       <p:sp>
         <p:nvSpPr>
@@ -3008,8 +2966,8 @@
         </p:nvSpPr>
         <p:spPr>
           <a:xfrm>
-            <a:off x="1691640" y="4754880"/>
-            <a:ext cx="9875520" cy="411480"/>
+            <a:off x="2057400" y="4800600"/>
+            <a:ext cx="9509760" cy="411480"/>
           </a:xfrm>
           <a:prstGeom prst="rect">
             <a:avLst/>
@@ -3033,7 +2991,7 @@
                 <a:ea typeface="Calibri" pitchFamily="34" charset="-122"/>
                 <a:cs typeface="Calibri" pitchFamily="34" charset="-120"/>
               </a:rPr>
-              <a:t>Tested and scales</a:t>
+              <a:t>An active alarm on the floor</a:t>
             </a:r>
             <a:endParaRPr lang="en-US" sz="1800" dirty="0"/>
           </a:p>
@@ -3047,8 +3005,8 @@
         </p:nvSpPr>
         <p:spPr>
           <a:xfrm>
-            <a:off x="1691640" y="5175504"/>
-            <a:ext cx="9875520" cy="640080"/>
+            <a:off x="2057400" y="5239512"/>
+            <a:ext cx="9509760" cy="822960"/>
           </a:xfrm>
           <a:prstGeom prst="rect">
             <a:avLst/>
@@ -3072,7 +3030,7 @@
                 <a:ea typeface="Calibri" pitchFamily="34" charset="-122"/>
                 <a:cs typeface="Calibri" pitchFamily="34" charset="-120"/>
               </a:rPr>
-              <a:t>94 automated tests pass across sensors, fog, processor and dashboard; a 2,000-message burst absorbed with 32 parallel senders.</a:t>
+              <a:t>Line-1 is firing a rotation-speed underspeed alarm right now, shown red on its card with the GATEWAY/QUEUE/LAMBDA/PIPELINE bar green below.</a:t>
             </a:r>
             <a:endParaRPr lang="en-US" sz="1350" dirty="0"/>
           </a:p>
@@ -3086,7 +3044,7 @@
         </p:nvSpPr>
         <p:spPr>
           <a:xfrm>
-            <a:off x="640080" y="6263640"/>
+            <a:off x="640080" y="6309360"/>
             <a:ext cx="10972800" cy="365760"/>
           </a:xfrm>
           <a:prstGeom prst="rect">
@@ -3157,24 +3115,24 @@
         </p:nvSpPr>
         <p:spPr>
           <a:xfrm>
-            <a:off x="640080" y="640080"/>
-            <a:ext cx="10972800" cy="640080"/>
-          </a:xfrm>
-          <a:prstGeom prst="rect">
-            <a:avLst/>
-          </a:prstGeom>
-          <a:noFill/>
-          <a:ln/>
-        </p:spPr>
-        <p:txBody>
-          <a:bodyPr wrap="square" rtlCol="0" anchor="ctr"/>
+            <a:off x="640080" y="594360"/>
+            <a:ext cx="10972800" cy="822960"/>
+          </a:xfrm>
+          <a:prstGeom prst="rect">
+            <a:avLst/>
+          </a:prstGeom>
+          <a:noFill/>
+          <a:ln/>
+        </p:spPr>
+        <p:txBody>
+          <a:bodyPr wrap="square" rtlCol="0" anchor="t"/>
           <a:lstStyle/>
           <a:p>
             <a:pPr indent="0" marL="0">
               <a:buNone/>
             </a:pPr>
             <a:r>
-              <a:rPr lang="en-US" sz="3000" b="1" dirty="0">
+              <a:rPr lang="en-US" sz="2800" b="1" dirty="0">
                 <a:solidFill>
                   <a:srgbClr val="FFFFFF"/>
                 </a:solidFill>
@@ -3184,7 +3142,7 @@
               </a:rPr>
               <a:t>Hardest Part — sealing a window under concurrent writes</a:t>
             </a:r>
-            <a:endParaRPr lang="en-US" sz="3000" dirty="0"/>
+            <a:endParaRPr lang="en-US" sz="2800" dirty="0"/>
           </a:p>
         </p:txBody>
       </p:sp>

--- a/ppt/VikasReddyAmanagantti_X25178849_industrial-equipment-monitoring.pptx
+++ b/ppt/VikasReddyAmanagantti_X25178849_industrial-equipment-monitoring.pptx
@@ -3089,7 +3089,7 @@
     <p:bg>
       <p:bgPr>
         <a:solidFill>
-          <a:srgbClr val="1E2A33"/>
+          <a:srgbClr val="FFFFFF"/>
         </a:solidFill>
       </p:bgPr>
     </p:bg>
@@ -3115,7 +3115,7 @@
         </p:nvSpPr>
         <p:spPr>
           <a:xfrm>
-            <a:off x="640080" y="594360"/>
+            <a:off x="640080" y="502920"/>
             <a:ext cx="10972800" cy="822960"/>
           </a:xfrm>
           <a:prstGeom prst="rect">
@@ -3134,7 +3134,7 @@
             <a:r>
               <a:rPr lang="en-US" sz="2800" b="1" dirty="0">
                 <a:solidFill>
-                  <a:srgbClr val="FFFFFF"/>
+                  <a:srgbClr val="1E2A33"/>
                 </a:solidFill>
                 <a:latin typeface="Bookman Old Style" pitchFamily="34" charset="0"/>
                 <a:ea typeface="Bookman Old Style" pitchFamily="34" charset="-122"/>
@@ -3163,9 +3163,9 @@
             </a:avLst>
           </a:prstGeom>
           <a:solidFill>
-            <a:srgbClr val="24333D"/>
+            <a:srgbClr val="EEF2F4"/>
           </a:solidFill>
-          <a:ln w="15875">
+          <a:ln w="19050">
             <a:solidFill>
               <a:srgbClr val="F0A500"/>
             </a:solidFill>
@@ -3242,7 +3242,7 @@
             <a:r>
               <a:rPr lang="en-US" sz="1300" dirty="0">
                 <a:solidFill>
-                  <a:srgbClr val="CDD9E0"/>
+                  <a:srgbClr val="1E2A33"/>
                 </a:solidFill>
                 <a:latin typeface="Calibri" pitchFamily="34" charset="0"/>
                 <a:ea typeface="Calibri" pitchFamily="34" charset="-122"/>
@@ -3271,11 +3271,11 @@
             </a:avLst>
           </a:prstGeom>
           <a:solidFill>
-            <a:srgbClr val="24333D"/>
+            <a:srgbClr val="EEF2F4"/>
           </a:solidFill>
-          <a:ln w="15875">
+          <a:ln w="19050">
             <a:solidFill>
-              <a:srgbClr val="6C8A9A"/>
+              <a:srgbClr val="4E6A78"/>
             </a:solidFill>
             <a:prstDash val="solid"/>
           </a:ln>
@@ -3308,7 +3308,7 @@
             <a:r>
               <a:rPr lang="en-US" sz="1900" b="1" dirty="0">
                 <a:solidFill>
-                  <a:srgbClr val="6C8A9A"/>
+                  <a:srgbClr val="4E6A78"/>
                 </a:solidFill>
                 <a:latin typeface="Bookman Old Style" pitchFamily="34" charset="0"/>
                 <a:ea typeface="Bookman Old Style" pitchFamily="34" charset="-122"/>
@@ -3350,7 +3350,7 @@
             <a:r>
               <a:rPr lang="en-US" sz="1300" dirty="0">
                 <a:solidFill>
-                  <a:srgbClr val="CDD9E0"/>
+                  <a:srgbClr val="1E2A33"/>
                 </a:solidFill>
                 <a:latin typeface="Calibri" pitchFamily="34" charset="0"/>
                 <a:ea typeface="Calibri" pitchFamily="34" charset="-122"/>

--- a/ppt/VikasReddyAmanagantti_X25178849_industrial-equipment-monitoring.pptx
+++ b/ppt/VikasReddyAmanagantti_X25178849_industrial-equipment-monitoring.pptx
@@ -1144,14 +1144,73 @@
       </p:grpSpPr>
       <p:sp>
         <p:nvSpPr>
-          <p:cNvPr id="2" name="Text 0"/>
-          <p:cNvSpPr/>
-          <p:nvPr/>
-        </p:nvSpPr>
-        <p:spPr>
-          <a:xfrm>
-            <a:off x="658368" y="640080"/>
-            <a:ext cx="10972800" cy="365760"/>
+          <p:cNvPr id="2" name="Shape 0"/>
+          <p:cNvSpPr/>
+          <p:nvPr/>
+        </p:nvSpPr>
+        <p:spPr>
+          <a:xfrm>
+            <a:off x="0" y="0"/>
+            <a:ext cx="12191695" cy="3931920"/>
+          </a:xfrm>
+          <a:prstGeom prst="rect">
+            <a:avLst/>
+          </a:prstGeom>
+          <a:solidFill>
+            <a:srgbClr val="37474F"/>
+          </a:solidFill>
+          <a:ln/>
+        </p:spPr>
+      </p:sp>
+      <p:sp>
+        <p:nvSpPr>
+          <p:cNvPr id="3" name="Text 1"/>
+          <p:cNvSpPr/>
+          <p:nvPr/>
+        </p:nvSpPr>
+        <p:spPr>
+          <a:xfrm>
+            <a:off x="640080" y="1005840"/>
+            <a:ext cx="10972800" cy="1554480"/>
+          </a:xfrm>
+          <a:prstGeom prst="rect">
+            <a:avLst/>
+          </a:prstGeom>
+          <a:noFill/>
+          <a:ln/>
+        </p:spPr>
+        <p:txBody>
+          <a:bodyPr wrap="square" rtlCol="0" anchor="t"/>
+          <a:lstStyle/>
+          <a:p>
+            <a:pPr indent="0" marL="0">
+              <a:buNone/>
+            </a:pPr>
+            <a:r>
+              <a:rPr lang="en-US" sz="3800" b="1" dirty="0">
+                <a:solidFill>
+                  <a:srgbClr val="FFFFFF"/>
+                </a:solidFill>
+                <a:latin typeface="Bookman Old Style" pitchFamily="34" charset="0"/>
+                <a:ea typeface="Bookman Old Style" pitchFamily="34" charset="-122"/>
+                <a:cs typeface="Bookman Old Style" pitchFamily="34" charset="-120"/>
+              </a:rPr>
+              <a:t>Industrial Equipment Predictive Monitoring</a:t>
+            </a:r>
+            <a:endParaRPr lang="en-US" sz="3800" dirty="0"/>
+          </a:p>
+        </p:txBody>
+      </p:sp>
+      <p:sp>
+        <p:nvSpPr>
+          <p:cNvPr id="4" name="Text 2"/>
+          <p:cNvSpPr/>
+          <p:nvPr/>
+        </p:nvSpPr>
+        <p:spPr>
+          <a:xfrm>
+            <a:off x="658368" y="2880360"/>
+            <a:ext cx="10972800" cy="457200"/>
           </a:xfrm>
           <a:prstGeom prst="rect">
             <a:avLst/>
@@ -1167,92 +1226,14 @@
               <a:buNone/>
             </a:pPr>
             <a:r>
-              <a:rPr lang="en-US" sz="1400" b="1" spc="300" kern="0" dirty="0">
-                <a:solidFill>
-                  <a:srgbClr val="F0A500"/>
+              <a:rPr lang="en-US" sz="1600" dirty="0">
+                <a:solidFill>
+                  <a:srgbClr val="CDD9E0"/>
                 </a:solidFill>
                 <a:latin typeface="Calibri" pitchFamily="34" charset="0"/>
                 <a:ea typeface="Calibri" pitchFamily="34" charset="-122"/>
                 <a:cs typeface="Calibri" pitchFamily="34" charset="-120"/>
               </a:rPr>
-              <a:t>INDUSTRIAL EQUIPMENT PREDICTIVE MONITORING</a:t>
-            </a:r>
-            <a:endParaRPr lang="en-US" sz="1400" dirty="0"/>
-          </a:p>
-        </p:txBody>
-      </p:sp>
-      <p:sp>
-        <p:nvSpPr>
-          <p:cNvPr id="3" name="Text 1"/>
-          <p:cNvSpPr/>
-          <p:nvPr/>
-        </p:nvSpPr>
-        <p:spPr>
-          <a:xfrm>
-            <a:off x="640080" y="2514600"/>
-            <a:ext cx="10972800" cy="1188720"/>
-          </a:xfrm>
-          <a:prstGeom prst="rect">
-            <a:avLst/>
-          </a:prstGeom>
-          <a:noFill/>
-          <a:ln/>
-        </p:spPr>
-        <p:txBody>
-          <a:bodyPr wrap="square" rtlCol="0" anchor="ctr"/>
-          <a:lstStyle/>
-          <a:p>
-            <a:pPr indent="0" marL="0">
-              <a:buNone/>
-            </a:pPr>
-            <a:r>
-              <a:rPr lang="en-US" sz="3800" b="1" dirty="0">
-                <a:solidFill>
-                  <a:srgbClr val="FFFFFF"/>
-                </a:solidFill>
-                <a:latin typeface="Bookman Old Style" pitchFamily="34" charset="0"/>
-                <a:ea typeface="Bookman Old Style" pitchFamily="34" charset="-122"/>
-                <a:cs typeface="Bookman Old Style" pitchFamily="34" charset="-120"/>
-              </a:rPr>
-              <a:t>Industrial Equipment Predictive Monitoring</a:t>
-            </a:r>
-            <a:endParaRPr lang="en-US" sz="3800" dirty="0"/>
-          </a:p>
-        </p:txBody>
-      </p:sp>
-      <p:sp>
-        <p:nvSpPr>
-          <p:cNvPr id="4" name="Text 2"/>
-          <p:cNvSpPr/>
-          <p:nvPr/>
-        </p:nvSpPr>
-        <p:spPr>
-          <a:xfrm>
-            <a:off x="658368" y="3703320"/>
-            <a:ext cx="10972800" cy="365760"/>
-          </a:xfrm>
-          <a:prstGeom prst="rect">
-            <a:avLst/>
-          </a:prstGeom>
-          <a:noFill/>
-          <a:ln/>
-        </p:spPr>
-        <p:txBody>
-          <a:bodyPr wrap="square" rtlCol="0" anchor="ctr"/>
-          <a:lstStyle/>
-          <a:p>
-            <a:pPr indent="0" marL="0">
-              <a:buNone/>
-            </a:pPr>
-            <a:r>
-              <a:rPr lang="en-US" sz="1600" dirty="0">
-                <a:solidFill>
-                  <a:srgbClr val="6C8A9A"/>
-                </a:solidFill>
-                <a:latin typeface="Calibri" pitchFamily="34" charset="0"/>
-                <a:ea typeface="Calibri" pitchFamily="34" charset="-122"/>
-                <a:cs typeface="Calibri" pitchFamily="34" charset="-120"/>
-              </a:rPr>
               <a:t>Vikas Reddy Amanagantti   ·   X25178849</a:t>
             </a:r>
             <a:endParaRPr lang="en-US" sz="1600" dirty="0"/>
@@ -1267,8 +1248,8 @@
         </p:nvSpPr>
         <p:spPr>
           <a:xfrm>
-            <a:off x="658368" y="4251960"/>
-            <a:ext cx="10424160" cy="1188720"/>
+            <a:off x="658368" y="4206240"/>
+            <a:ext cx="10424160" cy="1280160"/>
           </a:xfrm>
           <a:prstGeom prst="rect">
             <a:avLst/>
@@ -1309,7 +1290,7 @@
         </p:nvSpPr>
         <p:spPr>
           <a:xfrm>
-            <a:off x="658368" y="5623560"/>
+            <a:off x="658368" y="5577840"/>
             <a:ext cx="2651760" cy="566928"/>
           </a:xfrm>
           <a:prstGeom prst="roundRect">
@@ -1336,7 +1317,7 @@
         </p:nvSpPr>
         <p:spPr>
           <a:xfrm>
-            <a:off x="658368" y="5623560"/>
+            <a:off x="658368" y="5577840"/>
             <a:ext cx="2651760" cy="566928"/>
           </a:xfrm>
           <a:prstGeom prst="rect">
@@ -1375,7 +1356,7 @@
         </p:nvSpPr>
         <p:spPr>
           <a:xfrm>
-            <a:off x="3538728" y="5623560"/>
+            <a:off x="3538728" y="5577840"/>
             <a:ext cx="2651760" cy="566928"/>
           </a:xfrm>
           <a:prstGeom prst="roundRect">
@@ -1402,7 +1383,7 @@
         </p:nvSpPr>
         <p:spPr>
           <a:xfrm>
-            <a:off x="3538728" y="5623560"/>
+            <a:off x="3538728" y="5577840"/>
             <a:ext cx="2651760" cy="566928"/>
           </a:xfrm>
           <a:prstGeom prst="rect">
@@ -1441,7 +1422,7 @@
         </p:nvSpPr>
         <p:spPr>
           <a:xfrm>
-            <a:off x="6419088" y="5623560"/>
+            <a:off x="6419088" y="5577840"/>
             <a:ext cx="2651760" cy="566928"/>
           </a:xfrm>
           <a:prstGeom prst="roundRect">
@@ -1468,7 +1449,7 @@
         </p:nvSpPr>
         <p:spPr>
           <a:xfrm>
-            <a:off x="6419088" y="5623560"/>
+            <a:off x="6419088" y="5577840"/>
             <a:ext cx="2651760" cy="566928"/>
           </a:xfrm>
           <a:prstGeom prst="rect">
@@ -3154,12 +3135,12 @@
         </p:nvSpPr>
         <p:spPr>
           <a:xfrm>
-            <a:off x="731520" y="1920240"/>
-            <a:ext cx="10698480" cy="1965960"/>
+            <a:off x="640080" y="1874520"/>
+            <a:ext cx="4937760" cy="4160520"/>
           </a:xfrm>
           <a:prstGeom prst="roundRect">
             <a:avLst>
-              <a:gd name="adj" fmla="val 4651"/>
+              <a:gd name="adj" fmla="val 2198"/>
             </a:avLst>
           </a:prstGeom>
           <a:solidFill>
@@ -3181,7 +3162,7 @@
         </p:nvSpPr>
         <p:spPr>
           <a:xfrm>
-            <a:off x="1005840" y="2103120"/>
+            <a:off x="960120" y="2103120"/>
             <a:ext cx="3657600" cy="457200"/>
           </a:xfrm>
           <a:prstGeom prst="rect">
@@ -3220,8 +3201,8 @@
         </p:nvSpPr>
         <p:spPr>
           <a:xfrm>
-            <a:off x="1005840" y="2578608"/>
-            <a:ext cx="9966960" cy="1188720"/>
+            <a:off x="960120" y="2651760"/>
+            <a:ext cx="4343400" cy="3200400"/>
           </a:xfrm>
           <a:prstGeom prst="rect">
             <a:avLst/>
@@ -3235,12 +3216,12 @@
           <a:p>
             <a:pPr indent="0" marL="0">
               <a:lnSpc>
-                <a:spcPct val="105000"/>
+                <a:spcPct val="112000"/>
               </a:lnSpc>
               <a:buNone/>
             </a:pPr>
             <a:r>
-              <a:rPr lang="en-US" sz="1300" dirty="0">
+              <a:rPr lang="en-US" sz="1350" dirty="0">
                 <a:solidFill>
                   <a:srgbClr val="1E2A33"/>
                 </a:solidFill>
@@ -3250,7 +3231,7 @@
               </a:rPr>
               <a:t>Sensor posts arrive on several web-server threads while a timer seals the ten-second window on its own thread — and both touch the same buffer. Hold a lock across the whole close and every arriving reading stalls; drop it and a reading landing on the boundary is lost or double-counted.</a:t>
             </a:r>
-            <a:endParaRPr lang="en-US" sz="1300" dirty="0"/>
+            <a:endParaRPr lang="en-US" sz="1350" dirty="0"/>
           </a:p>
         </p:txBody>
       </p:sp>
@@ -3262,12 +3243,12 @@
         </p:nvSpPr>
         <p:spPr>
           <a:xfrm>
-            <a:off x="731520" y="4041648"/>
-            <a:ext cx="10698480" cy="1965960"/>
+            <a:off x="6611112" y="1874520"/>
+            <a:ext cx="4937760" cy="4160520"/>
           </a:xfrm>
           <a:prstGeom prst="roundRect">
             <a:avLst>
-              <a:gd name="adj" fmla="val 4651"/>
+              <a:gd name="adj" fmla="val 2198"/>
             </a:avLst>
           </a:prstGeom>
           <a:solidFill>
@@ -3289,7 +3270,7 @@
         </p:nvSpPr>
         <p:spPr>
           <a:xfrm>
-            <a:off x="1005840" y="4224528"/>
+            <a:off x="6931152" y="2103120"/>
             <a:ext cx="3657600" cy="457200"/>
           </a:xfrm>
           <a:prstGeom prst="rect">
@@ -3328,8 +3309,8 @@
         </p:nvSpPr>
         <p:spPr>
           <a:xfrm>
-            <a:off x="1005840" y="4700016"/>
-            <a:ext cx="9966960" cy="1188720"/>
+            <a:off x="6931152" y="2651760"/>
+            <a:ext cx="4343400" cy="3200400"/>
           </a:xfrm>
           <a:prstGeom prst="rect">
             <a:avLst/>
@@ -3343,12 +3324,12 @@
           <a:p>
             <a:pPr indent="0" marL="0">
               <a:lnSpc>
-                <a:spcPct val="105000"/>
+                <a:spcPct val="112000"/>
               </a:lnSpc>
               <a:buNone/>
             </a:pPr>
             <a:r>
-              <a:rPr lang="en-US" sz="1300" dirty="0">
+              <a:rPr lang="en-US" sz="1350" dirty="0">
                 <a:solidFill>
                   <a:srgbClr val="1E2A33"/>
                 </a:solidFill>
@@ -3358,9 +3339,29 @@
               </a:rPr>
               <a:t>Take the lock only long enough to swap the filled buffer aside and install an empty one, then run all aggregation and alarm evaluation on the swapped-out copy outside the lock. The hot ingest path never waits, and every reading still lands in exactly one window.</a:t>
             </a:r>
-            <a:endParaRPr lang="en-US" sz="1300" dirty="0"/>
-          </a:p>
-        </p:txBody>
+            <a:endParaRPr lang="en-US" sz="1350" dirty="0"/>
+          </a:p>
+        </p:txBody>
+      </p:sp>
+      <p:sp>
+        <p:nvSpPr>
+          <p:cNvPr id="9" name="Shape 7"/>
+          <p:cNvSpPr/>
+          <p:nvPr/>
+        </p:nvSpPr>
+        <p:spPr>
+          <a:xfrm>
+            <a:off x="5669280" y="3703320"/>
+            <a:ext cx="841248" cy="512064"/>
+          </a:xfrm>
+          <a:prstGeom prst="rightArrow">
+            <a:avLst/>
+          </a:prstGeom>
+          <a:solidFill>
+            <a:srgbClr val="37474F"/>
+          </a:solidFill>
+          <a:ln/>
+        </p:spPr>
       </p:sp>
     </p:spTree>
   </p:cSld>

--- a/ppt/VikasReddyAmanagantti_X25178849_industrial-equipment-monitoring.pptx
+++ b/ppt/VikasReddyAmanagantti_X25178849_industrial-equipment-monitoring.pptx
@@ -2599,59 +2599,24 @@
       </p:sp>
       <p:sp>
         <p:nvSpPr>
-          <p:cNvPr id="4" name="Text 2"/>
-          <p:cNvSpPr/>
-          <p:nvPr/>
-        </p:nvSpPr>
-        <p:spPr>
-          <a:xfrm>
-            <a:off x="640080" y="1737360"/>
-            <a:ext cx="1097280" cy="1097280"/>
-          </a:xfrm>
-          <a:prstGeom prst="rect">
-            <a:avLst/>
-          </a:prstGeom>
-          <a:noFill/>
-          <a:ln/>
-        </p:spPr>
-        <p:txBody>
-          <a:bodyPr wrap="square" lIns="0" tIns="0" rIns="0" bIns="0" rtlCol="0" anchor="ctr"/>
-          <a:lstStyle/>
-          <a:p>
-            <a:pPr indent="0" marL="0">
-              <a:buNone/>
-            </a:pPr>
-            <a:r>
-              <a:rPr lang="en-US" sz="5400" b="1" dirty="0">
-                <a:solidFill>
-                  <a:srgbClr val="EEF2F4"/>
-                </a:solidFill>
-                <a:latin typeface="Bookman Old Style" pitchFamily="34" charset="0"/>
-                <a:ea typeface="Bookman Old Style" pitchFamily="34" charset="-122"/>
-                <a:cs typeface="Bookman Old Style" pitchFamily="34" charset="-120"/>
-              </a:rPr>
-              <a:t>1</a:t>
-            </a:r>
-            <a:endParaRPr lang="en-US" sz="5400" dirty="0"/>
-          </a:p>
-        </p:txBody>
-      </p:sp>
-      <p:sp>
-        <p:nvSpPr>
-          <p:cNvPr id="5" name="Shape 3"/>
-          <p:cNvSpPr/>
-          <p:nvPr/>
-        </p:nvSpPr>
-        <p:spPr>
-          <a:xfrm>
-            <a:off x="1828800" y="1920240"/>
-            <a:ext cx="0" cy="1051560"/>
-          </a:xfrm>
-          <a:prstGeom prst="line">
-            <a:avLst/>
-          </a:prstGeom>
-          <a:noFill/>
-          <a:ln w="25400">
+          <p:cNvPr id="4" name="Shape 2"/>
+          <p:cNvSpPr/>
+          <p:nvPr/>
+        </p:nvSpPr>
+        <p:spPr>
+          <a:xfrm>
+            <a:off x="640080" y="1828800"/>
+            <a:ext cx="10881360" cy="1371600"/>
+          </a:xfrm>
+          <a:prstGeom prst="roundRect">
+            <a:avLst>
+              <a:gd name="adj" fmla="val 6667"/>
+            </a:avLst>
+          </a:prstGeom>
+          <a:solidFill>
+            <a:srgbClr val="EEF2F4"/>
+          </a:solidFill>
+          <a:ln w="15240">
             <a:solidFill>
               <a:srgbClr val="4E6A78"/>
             </a:solidFill>
@@ -2661,14 +2626,34 @@
       </p:sp>
       <p:sp>
         <p:nvSpPr>
+          <p:cNvPr id="5" name="Shape 3"/>
+          <p:cNvSpPr/>
+          <p:nvPr/>
+        </p:nvSpPr>
+        <p:spPr>
+          <a:xfrm>
+            <a:off x="960120" y="2203704"/>
+            <a:ext cx="621792" cy="621792"/>
+          </a:xfrm>
+          <a:prstGeom prst="ellipse">
+            <a:avLst/>
+          </a:prstGeom>
+          <a:solidFill>
+            <a:srgbClr val="37474F"/>
+          </a:solidFill>
+          <a:ln/>
+        </p:spPr>
+      </p:sp>
+      <p:sp>
+        <p:nvSpPr>
           <p:cNvPr id="6" name="Text 4"/>
           <p:cNvSpPr/>
           <p:nvPr/>
         </p:nvSpPr>
         <p:spPr>
           <a:xfrm>
-            <a:off x="2057400" y="1874520"/>
-            <a:ext cx="9509760" cy="411480"/>
+            <a:off x="960120" y="2203704"/>
+            <a:ext cx="621792" cy="621792"/>
           </a:xfrm>
           <a:prstGeom prst="rect">
             <a:avLst/>
@@ -2680,11 +2665,50 @@
           <a:bodyPr wrap="square" lIns="0" tIns="0" rIns="0" bIns="0" rtlCol="0" anchor="ctr"/>
           <a:lstStyle/>
           <a:p>
+            <a:pPr algn="ctr" indent="0" marL="0">
+              <a:buNone/>
+            </a:pPr>
+            <a:r>
+              <a:rPr lang="en-US" sz="2200" b="1" dirty="0">
+                <a:solidFill>
+                  <a:srgbClr val="FFFFFF"/>
+                </a:solidFill>
+                <a:latin typeface="Bookman Old Style" pitchFamily="34" charset="0"/>
+                <a:ea typeface="Bookman Old Style" pitchFamily="34" charset="-122"/>
+                <a:cs typeface="Bookman Old Style" pitchFamily="34" charset="-120"/>
+              </a:rPr>
+              <a:t>1</a:t>
+            </a:r>
+            <a:endParaRPr lang="en-US" sz="2200" dirty="0"/>
+          </a:p>
+        </p:txBody>
+      </p:sp>
+      <p:sp>
+        <p:nvSpPr>
+          <p:cNvPr id="7" name="Text 5"/>
+          <p:cNvSpPr/>
+          <p:nvPr/>
+        </p:nvSpPr>
+        <p:spPr>
+          <a:xfrm>
+            <a:off x="1828800" y="2029968"/>
+            <a:ext cx="9418320" cy="411480"/>
+          </a:xfrm>
+          <a:prstGeom prst="rect">
+            <a:avLst/>
+          </a:prstGeom>
+          <a:noFill/>
+          <a:ln/>
+        </p:spPr>
+        <p:txBody>
+          <a:bodyPr wrap="square" lIns="0" tIns="0" rIns="0" bIns="0" rtlCol="0" anchor="ctr"/>
+          <a:lstStyle/>
+          <a:p>
             <a:pPr indent="0" marL="0">
               <a:buNone/>
             </a:pPr>
             <a:r>
-              <a:rPr lang="en-US" sz="1800" b="1" dirty="0">
+              <a:rPr lang="en-US" sz="1700" b="1" dirty="0">
                 <a:solidFill>
                   <a:srgbClr val="1E2A33"/>
                 </a:solidFill>
@@ -2694,20 +2718,20 @@
               </a:rPr>
               <a:t>A card per signal, per line</a:t>
             </a:r>
-            <a:endParaRPr lang="en-US" sz="1800" dirty="0"/>
-          </a:p>
-        </p:txBody>
-      </p:sp>
-      <p:sp>
-        <p:nvSpPr>
-          <p:cNvPr id="7" name="Text 5"/>
-          <p:cNvSpPr/>
-          <p:nvPr/>
-        </p:nvSpPr>
-        <p:spPr>
-          <a:xfrm>
-            <a:off x="2057400" y="2313432"/>
-            <a:ext cx="9509760" cy="822960"/>
+            <a:endParaRPr lang="en-US" sz="1700" dirty="0"/>
+          </a:p>
+        </p:txBody>
+      </p:sp>
+      <p:sp>
+        <p:nvSpPr>
+          <p:cNvPr id="8" name="Text 6"/>
+          <p:cNvSpPr/>
+          <p:nvPr/>
+        </p:nvSpPr>
+        <p:spPr>
+          <a:xfrm>
+            <a:off x="1828800" y="2450592"/>
+            <a:ext cx="9418320" cy="594360"/>
           </a:xfrm>
           <a:prstGeom prst="rect">
             <a:avLst/>
@@ -2720,10 +2744,13 @@
           <a:lstStyle/>
           <a:p>
             <a:pPr indent="0" marL="0">
-              <a:buNone/>
-            </a:pPr>
-            <a:r>
-              <a:rPr lang="en-US" sz="1350" dirty="0">
+              <a:lnSpc>
+                <a:spcPct val="105000"/>
+              </a:lnSpc>
+              <a:buNone/>
+            </a:pPr>
+            <a:r>
+              <a:rPr lang="en-US" sz="1300" dirty="0">
                 <a:solidFill>
                   <a:srgbClr val="5F6E78"/>
                 </a:solidFill>
@@ -2733,46 +2760,7 @@
               </a:rPr>
               <a:t>Vibration, motor temperature, bearing acoustic, rotation speed and power draw live on both production lines, each with its real alarm limit and a sparkline.</a:t>
             </a:r>
-            <a:endParaRPr lang="en-US" sz="1350" dirty="0"/>
-          </a:p>
-        </p:txBody>
-      </p:sp>
-      <p:sp>
-        <p:nvSpPr>
-          <p:cNvPr id="8" name="Text 6"/>
-          <p:cNvSpPr/>
-          <p:nvPr/>
-        </p:nvSpPr>
-        <p:spPr>
-          <a:xfrm>
-            <a:off x="640080" y="3200400"/>
-            <a:ext cx="1097280" cy="1097280"/>
-          </a:xfrm>
-          <a:prstGeom prst="rect">
-            <a:avLst/>
-          </a:prstGeom>
-          <a:noFill/>
-          <a:ln/>
-        </p:spPr>
-        <p:txBody>
-          <a:bodyPr wrap="square" lIns="0" tIns="0" rIns="0" bIns="0" rtlCol="0" anchor="ctr"/>
-          <a:lstStyle/>
-          <a:p>
-            <a:pPr indent="0" marL="0">
-              <a:buNone/>
-            </a:pPr>
-            <a:r>
-              <a:rPr lang="en-US" sz="5400" b="1" dirty="0">
-                <a:solidFill>
-                  <a:srgbClr val="EEF2F4"/>
-                </a:solidFill>
-                <a:latin typeface="Bookman Old Style" pitchFamily="34" charset="0"/>
-                <a:ea typeface="Bookman Old Style" pitchFamily="34" charset="-122"/>
-                <a:cs typeface="Bookman Old Style" pitchFamily="34" charset="-120"/>
-              </a:rPr>
-              <a:t>2</a:t>
-            </a:r>
-            <a:endParaRPr lang="en-US" sz="5400" dirty="0"/>
+            <a:endParaRPr lang="en-US" sz="1300" dirty="0"/>
           </a:p>
         </p:txBody>
       </p:sp>
@@ -2784,14 +2772,18 @@
         </p:nvSpPr>
         <p:spPr>
           <a:xfrm>
-            <a:off x="1828800" y="3383280"/>
-            <a:ext cx="0" cy="1051560"/>
-          </a:xfrm>
-          <a:prstGeom prst="line">
-            <a:avLst/>
-          </a:prstGeom>
-          <a:noFill/>
-          <a:ln w="25400">
+            <a:off x="640080" y="3401568"/>
+            <a:ext cx="5303520" cy="2606040"/>
+          </a:xfrm>
+          <a:prstGeom prst="roundRect">
+            <a:avLst>
+              <a:gd name="adj" fmla="val 3509"/>
+            </a:avLst>
+          </a:prstGeom>
+          <a:solidFill>
+            <a:srgbClr val="EEF2F4"/>
+          </a:solidFill>
+          <a:ln w="15240">
             <a:solidFill>
               <a:srgbClr val="4E6A78"/>
             </a:solidFill>
@@ -2801,14 +2793,34 @@
       </p:sp>
       <p:sp>
         <p:nvSpPr>
-          <p:cNvPr id="10" name="Text 8"/>
-          <p:cNvSpPr/>
-          <p:nvPr/>
-        </p:nvSpPr>
-        <p:spPr>
-          <a:xfrm>
-            <a:off x="2057400" y="3337560"/>
-            <a:ext cx="9509760" cy="411480"/>
+          <p:cNvPr id="10" name="Shape 8"/>
+          <p:cNvSpPr/>
+          <p:nvPr/>
+        </p:nvSpPr>
+        <p:spPr>
+          <a:xfrm>
+            <a:off x="914400" y="3675888"/>
+            <a:ext cx="603504" cy="603504"/>
+          </a:xfrm>
+          <a:prstGeom prst="ellipse">
+            <a:avLst/>
+          </a:prstGeom>
+          <a:solidFill>
+            <a:srgbClr val="37474F"/>
+          </a:solidFill>
+          <a:ln/>
+        </p:spPr>
+      </p:sp>
+      <p:sp>
+        <p:nvSpPr>
+          <p:cNvPr id="11" name="Text 9"/>
+          <p:cNvSpPr/>
+          <p:nvPr/>
+        </p:nvSpPr>
+        <p:spPr>
+          <a:xfrm>
+            <a:off x="914400" y="3675888"/>
+            <a:ext cx="603504" cy="603504"/>
           </a:xfrm>
           <a:prstGeom prst="rect">
             <a:avLst/>
@@ -2820,11 +2832,50 @@
           <a:bodyPr wrap="square" lIns="0" tIns="0" rIns="0" bIns="0" rtlCol="0" anchor="ctr"/>
           <a:lstStyle/>
           <a:p>
+            <a:pPr algn="ctr" indent="0" marL="0">
+              <a:buNone/>
+            </a:pPr>
+            <a:r>
+              <a:rPr lang="en-US" sz="2200" b="1" dirty="0">
+                <a:solidFill>
+                  <a:srgbClr val="FFFFFF"/>
+                </a:solidFill>
+                <a:latin typeface="Bookman Old Style" pitchFamily="34" charset="0"/>
+                <a:ea typeface="Bookman Old Style" pitchFamily="34" charset="-122"/>
+                <a:cs typeface="Bookman Old Style" pitchFamily="34" charset="-120"/>
+              </a:rPr>
+              <a:t>2</a:t>
+            </a:r>
+            <a:endParaRPr lang="en-US" sz="2200" dirty="0"/>
+          </a:p>
+        </p:txBody>
+      </p:sp>
+      <p:sp>
+        <p:nvSpPr>
+          <p:cNvPr id="12" name="Text 10"/>
+          <p:cNvSpPr/>
+          <p:nvPr/>
+        </p:nvSpPr>
+        <p:spPr>
+          <a:xfrm>
+            <a:off x="914400" y="4425696"/>
+            <a:ext cx="4754880" cy="777240"/>
+          </a:xfrm>
+          <a:prstGeom prst="rect">
+            <a:avLst/>
+          </a:prstGeom>
+          <a:noFill/>
+          <a:ln/>
+        </p:spPr>
+        <p:txBody>
+          <a:bodyPr wrap="square" lIns="0" tIns="0" rIns="0" bIns="0" rtlCol="0" anchor="ctr"/>
+          <a:lstStyle/>
+          <a:p>
             <a:pPr indent="0" marL="0">
               <a:buNone/>
             </a:pPr>
             <a:r>
-              <a:rPr lang="en-US" sz="1800" b="1" dirty="0">
+              <a:rPr lang="en-US" sz="1600" b="1" dirty="0">
                 <a:solidFill>
                   <a:srgbClr val="1E2A33"/>
                 </a:solidFill>
@@ -2834,20 +2885,20 @@
               </a:rPr>
               <a:t>The two-sided speed rule</a:t>
             </a:r>
-            <a:endParaRPr lang="en-US" sz="1800" dirty="0"/>
-          </a:p>
-        </p:txBody>
-      </p:sp>
-      <p:sp>
-        <p:nvSpPr>
-          <p:cNvPr id="11" name="Text 9"/>
-          <p:cNvSpPr/>
-          <p:nvPr/>
-        </p:nvSpPr>
-        <p:spPr>
-          <a:xfrm>
-            <a:off x="2057400" y="3776472"/>
-            <a:ext cx="9509760" cy="822960"/>
+            <a:endParaRPr lang="en-US" sz="1600" dirty="0"/>
+          </a:p>
+        </p:txBody>
+      </p:sp>
+      <p:sp>
+        <p:nvSpPr>
+          <p:cNvPr id="13" name="Text 11"/>
+          <p:cNvSpPr/>
+          <p:nvPr/>
+        </p:nvSpPr>
+        <p:spPr>
+          <a:xfrm>
+            <a:off x="914400" y="5184648"/>
+            <a:ext cx="4754880" cy="640080"/>
           </a:xfrm>
           <a:prstGeom prst="rect">
             <a:avLst/>
@@ -2860,10 +2911,13 @@
           <a:lstStyle/>
           <a:p>
             <a:pPr indent="0" marL="0">
-              <a:buNone/>
-            </a:pPr>
-            <a:r>
-              <a:rPr lang="en-US" sz="1350" dirty="0">
+              <a:lnSpc>
+                <a:spcPct val="106000"/>
+              </a:lnSpc>
+              <a:buNone/>
+            </a:pPr>
+            <a:r>
+              <a:rPr lang="en-US" sz="1250" dirty="0">
                 <a:solidFill>
                   <a:srgbClr val="5F6E78"/>
                 </a:solidFill>
@@ -2873,65 +2927,30 @@
               </a:rPr>
               <a:t>Rotation speed is the one signal faulted at both ends — an underspeed alarm at 1,000 RPM and an overspeed at 3,400 — unlike the four single-limit signals.</a:t>
             </a:r>
-            <a:endParaRPr lang="en-US" sz="1350" dirty="0"/>
-          </a:p>
-        </p:txBody>
-      </p:sp>
-      <p:sp>
-        <p:nvSpPr>
-          <p:cNvPr id="12" name="Text 10"/>
-          <p:cNvSpPr/>
-          <p:nvPr/>
-        </p:nvSpPr>
-        <p:spPr>
-          <a:xfrm>
-            <a:off x="640080" y="4663440"/>
-            <a:ext cx="1097280" cy="1097280"/>
-          </a:xfrm>
-          <a:prstGeom prst="rect">
-            <a:avLst/>
-          </a:prstGeom>
-          <a:noFill/>
-          <a:ln/>
-        </p:spPr>
-        <p:txBody>
-          <a:bodyPr wrap="square" lIns="0" tIns="0" rIns="0" bIns="0" rtlCol="0" anchor="ctr"/>
-          <a:lstStyle/>
-          <a:p>
-            <a:pPr indent="0" marL="0">
-              <a:buNone/>
-            </a:pPr>
-            <a:r>
-              <a:rPr lang="en-US" sz="5400" b="1" dirty="0">
-                <a:solidFill>
-                  <a:srgbClr val="EEF2F4"/>
-                </a:solidFill>
-                <a:latin typeface="Bookman Old Style" pitchFamily="34" charset="0"/>
-                <a:ea typeface="Bookman Old Style" pitchFamily="34" charset="-122"/>
-                <a:cs typeface="Bookman Old Style" pitchFamily="34" charset="-120"/>
-              </a:rPr>
-              <a:t>3</a:t>
-            </a:r>
-            <a:endParaRPr lang="en-US" sz="5400" dirty="0"/>
-          </a:p>
-        </p:txBody>
-      </p:sp>
-      <p:sp>
-        <p:nvSpPr>
-          <p:cNvPr id="13" name="Shape 11"/>
-          <p:cNvSpPr/>
-          <p:nvPr/>
-        </p:nvSpPr>
-        <p:spPr>
-          <a:xfrm>
-            <a:off x="1828800" y="4846320"/>
-            <a:ext cx="0" cy="1051560"/>
-          </a:xfrm>
-          <a:prstGeom prst="line">
-            <a:avLst/>
-          </a:prstGeom>
-          <a:noFill/>
-          <a:ln w="25400">
+            <a:endParaRPr lang="en-US" sz="1250" dirty="0"/>
+          </a:p>
+        </p:txBody>
+      </p:sp>
+      <p:sp>
+        <p:nvSpPr>
+          <p:cNvPr id="14" name="Shape 12"/>
+          <p:cNvSpPr/>
+          <p:nvPr/>
+        </p:nvSpPr>
+        <p:spPr>
+          <a:xfrm>
+            <a:off x="6217920" y="3401568"/>
+            <a:ext cx="5303520" cy="2606040"/>
+          </a:xfrm>
+          <a:prstGeom prst="roundRect">
+            <a:avLst>
+              <a:gd name="adj" fmla="val 3509"/>
+            </a:avLst>
+          </a:prstGeom>
+          <a:solidFill>
+            <a:srgbClr val="EEF2F4"/>
+          </a:solidFill>
+          <a:ln w="15240">
             <a:solidFill>
               <a:srgbClr val="4E6A78"/>
             </a:solidFill>
@@ -2941,14 +2960,34 @@
       </p:sp>
       <p:sp>
         <p:nvSpPr>
-          <p:cNvPr id="14" name="Text 12"/>
-          <p:cNvSpPr/>
-          <p:nvPr/>
-        </p:nvSpPr>
-        <p:spPr>
-          <a:xfrm>
-            <a:off x="2057400" y="4800600"/>
-            <a:ext cx="9509760" cy="411480"/>
+          <p:cNvPr id="15" name="Shape 13"/>
+          <p:cNvSpPr/>
+          <p:nvPr/>
+        </p:nvSpPr>
+        <p:spPr>
+          <a:xfrm>
+            <a:off x="6492240" y="3675888"/>
+            <a:ext cx="603504" cy="603504"/>
+          </a:xfrm>
+          <a:prstGeom prst="ellipse">
+            <a:avLst/>
+          </a:prstGeom>
+          <a:solidFill>
+            <a:srgbClr val="37474F"/>
+          </a:solidFill>
+          <a:ln/>
+        </p:spPr>
+      </p:sp>
+      <p:sp>
+        <p:nvSpPr>
+          <p:cNvPr id="16" name="Text 14"/>
+          <p:cNvSpPr/>
+          <p:nvPr/>
+        </p:nvSpPr>
+        <p:spPr>
+          <a:xfrm>
+            <a:off x="6492240" y="3675888"/>
+            <a:ext cx="603504" cy="603504"/>
           </a:xfrm>
           <a:prstGeom prst="rect">
             <a:avLst/>
@@ -2960,11 +2999,50 @@
           <a:bodyPr wrap="square" lIns="0" tIns="0" rIns="0" bIns="0" rtlCol="0" anchor="ctr"/>
           <a:lstStyle/>
           <a:p>
+            <a:pPr algn="ctr" indent="0" marL="0">
+              <a:buNone/>
+            </a:pPr>
+            <a:r>
+              <a:rPr lang="en-US" sz="2200" b="1" dirty="0">
+                <a:solidFill>
+                  <a:srgbClr val="FFFFFF"/>
+                </a:solidFill>
+                <a:latin typeface="Bookman Old Style" pitchFamily="34" charset="0"/>
+                <a:ea typeface="Bookman Old Style" pitchFamily="34" charset="-122"/>
+                <a:cs typeface="Bookman Old Style" pitchFamily="34" charset="-120"/>
+              </a:rPr>
+              <a:t>3</a:t>
+            </a:r>
+            <a:endParaRPr lang="en-US" sz="2200" dirty="0"/>
+          </a:p>
+        </p:txBody>
+      </p:sp>
+      <p:sp>
+        <p:nvSpPr>
+          <p:cNvPr id="17" name="Text 15"/>
+          <p:cNvSpPr/>
+          <p:nvPr/>
+        </p:nvSpPr>
+        <p:spPr>
+          <a:xfrm>
+            <a:off x="6492240" y="4425696"/>
+            <a:ext cx="4754880" cy="777240"/>
+          </a:xfrm>
+          <a:prstGeom prst="rect">
+            <a:avLst/>
+          </a:prstGeom>
+          <a:noFill/>
+          <a:ln/>
+        </p:spPr>
+        <p:txBody>
+          <a:bodyPr wrap="square" lIns="0" tIns="0" rIns="0" bIns="0" rtlCol="0" anchor="ctr"/>
+          <a:lstStyle/>
+          <a:p>
             <a:pPr indent="0" marL="0">
               <a:buNone/>
             </a:pPr>
             <a:r>
-              <a:rPr lang="en-US" sz="1800" b="1" dirty="0">
+              <a:rPr lang="en-US" sz="1600" b="1" dirty="0">
                 <a:solidFill>
                   <a:srgbClr val="1E2A33"/>
                 </a:solidFill>
@@ -2974,20 +3052,20 @@
               </a:rPr>
               <a:t>An active alarm on the floor</a:t>
             </a:r>
-            <a:endParaRPr lang="en-US" sz="1800" dirty="0"/>
-          </a:p>
-        </p:txBody>
-      </p:sp>
-      <p:sp>
-        <p:nvSpPr>
-          <p:cNvPr id="15" name="Text 13"/>
-          <p:cNvSpPr/>
-          <p:nvPr/>
-        </p:nvSpPr>
-        <p:spPr>
-          <a:xfrm>
-            <a:off x="2057400" y="5239512"/>
-            <a:ext cx="9509760" cy="822960"/>
+            <a:endParaRPr lang="en-US" sz="1600" dirty="0"/>
+          </a:p>
+        </p:txBody>
+      </p:sp>
+      <p:sp>
+        <p:nvSpPr>
+          <p:cNvPr id="18" name="Text 16"/>
+          <p:cNvSpPr/>
+          <p:nvPr/>
+        </p:nvSpPr>
+        <p:spPr>
+          <a:xfrm>
+            <a:off x="6492240" y="5184648"/>
+            <a:ext cx="4754880" cy="640080"/>
           </a:xfrm>
           <a:prstGeom prst="rect">
             <a:avLst/>
@@ -3000,10 +3078,13 @@
           <a:lstStyle/>
           <a:p>
             <a:pPr indent="0" marL="0">
-              <a:buNone/>
-            </a:pPr>
-            <a:r>
-              <a:rPr lang="en-US" sz="1350" dirty="0">
+              <a:lnSpc>
+                <a:spcPct val="106000"/>
+              </a:lnSpc>
+              <a:buNone/>
+            </a:pPr>
+            <a:r>
+              <a:rPr lang="en-US" sz="1250" dirty="0">
                 <a:solidFill>
                   <a:srgbClr val="5F6E78"/>
                 </a:solidFill>
@@ -3013,46 +3094,7 @@
               </a:rPr>
               <a:t>Line-1 is firing a rotation-speed underspeed alarm right now, shown red on its card with the GATEWAY/QUEUE/LAMBDA/PIPELINE bar green below.</a:t>
             </a:r>
-            <a:endParaRPr lang="en-US" sz="1350" dirty="0"/>
-          </a:p>
-        </p:txBody>
-      </p:sp>
-      <p:sp>
-        <p:nvSpPr>
-          <p:cNvPr id="16" name="Text 14"/>
-          <p:cNvSpPr/>
-          <p:nvPr/>
-        </p:nvSpPr>
-        <p:spPr>
-          <a:xfrm>
-            <a:off x="640080" y="6309360"/>
-            <a:ext cx="10972800" cy="365760"/>
-          </a:xfrm>
-          <a:prstGeom prst="rect">
-            <a:avLst/>
-          </a:prstGeom>
-          <a:noFill/>
-          <a:ln/>
-        </p:spPr>
-        <p:txBody>
-          <a:bodyPr wrap="square" rtlCol="0" anchor="ctr"/>
-          <a:lstStyle/>
-          <a:p>
-            <a:pPr indent="0" marL="0">
-              <a:buNone/>
-            </a:pPr>
-            <a:r>
-              <a:rPr lang="en-US" sz="1300" i="1" dirty="0">
-                <a:solidFill>
-                  <a:srgbClr val="6C8A9A"/>
-                </a:solidFill>
-                <a:latin typeface="Calibri" pitchFamily="34" charset="0"/>
-                <a:ea typeface="Calibri" pitchFamily="34" charset="-122"/>
-                <a:cs typeface="Calibri" pitchFamily="34" charset="-120"/>
-              </a:rPr>
-              <a:t>Switch to the live dashboard here — backup video ready.</a:t>
-            </a:r>
-            <a:endParaRPr lang="en-US" sz="1300" dirty="0"/>
+            <a:endParaRPr lang="en-US" sz="1250" dirty="0"/>
           </a:p>
         </p:txBody>
       </p:sp>

--- a/ppt/VikasReddyAmanagantti_X25178849_industrial-equipment-monitoring.pptx
+++ b/ppt/VikasReddyAmanagantti_X25178849_industrial-equipment-monitoring.pptx
@@ -1124,7 +1124,7 @@
     <p:bg>
       <p:bgPr>
         <a:solidFill>
-          <a:srgbClr val="1E2A33"/>
+          <a:srgbClr val="FFFFFF"/>
         </a:solidFill>
       </p:bgPr>
     </p:bg>
@@ -1270,7 +1270,7 @@
             <a:r>
               <a:rPr lang="en-US" sz="1800" dirty="0">
                 <a:solidFill>
-                  <a:srgbClr val="CDD9E0"/>
+                  <a:srgbClr val="1E2A33"/>
                 </a:solidFill>
                 <a:latin typeface="Calibri" pitchFamily="34" charset="0"/>
                 <a:ea typeface="Calibri" pitchFamily="34" charset="-122"/>
@@ -1290,23 +1290,16 @@
         </p:nvSpPr>
         <p:spPr>
           <a:xfrm>
-            <a:off x="658368" y="5577840"/>
-            <a:ext cx="2651760" cy="566928"/>
-          </a:xfrm>
-          <a:prstGeom prst="roundRect">
-            <a:avLst>
-              <a:gd name="adj" fmla="val 50000"/>
-            </a:avLst>
-          </a:prstGeom>
-          <a:solidFill>
-            <a:srgbClr val="26333D"/>
-          </a:solidFill>
-          <a:ln w="12700">
-            <a:solidFill>
-              <a:srgbClr val="F0A500"/>
-            </a:solidFill>
-            <a:prstDash val="solid"/>
-          </a:ln>
+            <a:off x="658368" y="5724144"/>
+            <a:ext cx="146304" cy="146304"/>
+          </a:xfrm>
+          <a:prstGeom prst="rect">
+            <a:avLst/>
+          </a:prstGeom>
+          <a:solidFill>
+            <a:srgbClr val="6C8A9A"/>
+          </a:solidFill>
+          <a:ln/>
         </p:spPr>
       </p:sp>
       <p:sp>
@@ -1317,8 +1310,8 @@
         </p:nvSpPr>
         <p:spPr>
           <a:xfrm>
-            <a:off x="658368" y="5577840"/>
-            <a:ext cx="2651760" cy="566928"/>
+            <a:off x="932688" y="5577840"/>
+            <a:ext cx="2560320" cy="457200"/>
           </a:xfrm>
           <a:prstGeom prst="rect">
             <a:avLst/>
@@ -1330,13 +1323,13 @@
           <a:bodyPr wrap="square" lIns="0" tIns="0" rIns="0" bIns="0" rtlCol="0" anchor="ctr"/>
           <a:lstStyle/>
           <a:p>
-            <a:pPr algn="ctr" indent="0" marL="0">
-              <a:buNone/>
-            </a:pPr>
-            <a:r>
-              <a:rPr lang="en-US" sz="1350" b="1" dirty="0">
-                <a:solidFill>
-                  <a:srgbClr val="F0A500"/>
+            <a:pPr indent="0" marL="0">
+              <a:buNone/>
+            </a:pPr>
+            <a:r>
+              <a:rPr lang="en-US" sz="1400" b="1" dirty="0">
+                <a:solidFill>
+                  <a:srgbClr val="1E2A33"/>
                 </a:solidFill>
                 <a:latin typeface="Calibri" pitchFamily="34" charset="0"/>
                 <a:ea typeface="Calibri" pitchFamily="34" charset="-122"/>
@@ -1344,7 +1337,7 @@
               </a:rPr>
               <a:t>Motor temp &gt; 95 °C</a:t>
             </a:r>
-            <a:endParaRPr lang="en-US" sz="1350" dirty="0"/>
+            <a:endParaRPr lang="en-US" sz="1400" dirty="0"/>
           </a:p>
         </p:txBody>
       </p:sp>
@@ -1356,23 +1349,16 @@
         </p:nvSpPr>
         <p:spPr>
           <a:xfrm>
-            <a:off x="3538728" y="5577840"/>
-            <a:ext cx="2651760" cy="566928"/>
-          </a:xfrm>
-          <a:prstGeom prst="roundRect">
-            <a:avLst>
-              <a:gd name="adj" fmla="val 50000"/>
-            </a:avLst>
-          </a:prstGeom>
-          <a:solidFill>
-            <a:srgbClr val="26333D"/>
-          </a:solidFill>
-          <a:ln w="12700">
-            <a:solidFill>
-              <a:srgbClr val="F0A500"/>
-            </a:solidFill>
-            <a:prstDash val="solid"/>
-          </a:ln>
+            <a:off x="3538728" y="5724144"/>
+            <a:ext cx="146304" cy="146304"/>
+          </a:xfrm>
+          <a:prstGeom prst="rect">
+            <a:avLst/>
+          </a:prstGeom>
+          <a:solidFill>
+            <a:srgbClr val="6C8A9A"/>
+          </a:solidFill>
+          <a:ln/>
         </p:spPr>
       </p:sp>
       <p:sp>
@@ -1383,8 +1369,8 @@
         </p:nvSpPr>
         <p:spPr>
           <a:xfrm>
-            <a:off x="3538728" y="5577840"/>
-            <a:ext cx="2651760" cy="566928"/>
+            <a:off x="3813048" y="5577840"/>
+            <a:ext cx="2560320" cy="457200"/>
           </a:xfrm>
           <a:prstGeom prst="rect">
             <a:avLst/>
@@ -1396,13 +1382,13 @@
           <a:bodyPr wrap="square" lIns="0" tIns="0" rIns="0" bIns="0" rtlCol="0" anchor="ctr"/>
           <a:lstStyle/>
           <a:p>
-            <a:pPr algn="ctr" indent="0" marL="0">
-              <a:buNone/>
-            </a:pPr>
-            <a:r>
-              <a:rPr lang="en-US" sz="1350" b="1" dirty="0">
-                <a:solidFill>
-                  <a:srgbClr val="F0A500"/>
+            <a:pPr indent="0" marL="0">
+              <a:buNone/>
+            </a:pPr>
+            <a:r>
+              <a:rPr lang="en-US" sz="1400" b="1" dirty="0">
+                <a:solidFill>
+                  <a:srgbClr val="1E2A33"/>
                 </a:solidFill>
                 <a:latin typeface="Calibri" pitchFamily="34" charset="0"/>
                 <a:ea typeface="Calibri" pitchFamily="34" charset="-122"/>
@@ -1410,7 +1396,7 @@
               </a:rPr>
               <a:t>Vibration &gt; 7 mm/s</a:t>
             </a:r>
-            <a:endParaRPr lang="en-US" sz="1350" dirty="0"/>
+            <a:endParaRPr lang="en-US" sz="1400" dirty="0"/>
           </a:p>
         </p:txBody>
       </p:sp>
@@ -1422,23 +1408,16 @@
         </p:nvSpPr>
         <p:spPr>
           <a:xfrm>
-            <a:off x="6419088" y="5577840"/>
-            <a:ext cx="2651760" cy="566928"/>
-          </a:xfrm>
-          <a:prstGeom prst="roundRect">
-            <a:avLst>
-              <a:gd name="adj" fmla="val 50000"/>
-            </a:avLst>
-          </a:prstGeom>
-          <a:solidFill>
-            <a:srgbClr val="26333D"/>
-          </a:solidFill>
-          <a:ln w="12700">
-            <a:solidFill>
-              <a:srgbClr val="F0A500"/>
-            </a:solidFill>
-            <a:prstDash val="solid"/>
-          </a:ln>
+            <a:off x="6419088" y="5724144"/>
+            <a:ext cx="146304" cy="146304"/>
+          </a:xfrm>
+          <a:prstGeom prst="rect">
+            <a:avLst/>
+          </a:prstGeom>
+          <a:solidFill>
+            <a:srgbClr val="6C8A9A"/>
+          </a:solidFill>
+          <a:ln/>
         </p:spPr>
       </p:sp>
       <p:sp>
@@ -1449,8 +1428,8 @@
         </p:nvSpPr>
         <p:spPr>
           <a:xfrm>
-            <a:off x="6419088" y="5577840"/>
-            <a:ext cx="2651760" cy="566928"/>
+            <a:off x="6693408" y="5577840"/>
+            <a:ext cx="2560320" cy="457200"/>
           </a:xfrm>
           <a:prstGeom prst="rect">
             <a:avLst/>
@@ -1462,13 +1441,13 @@
           <a:bodyPr wrap="square" lIns="0" tIns="0" rIns="0" bIns="0" rtlCol="0" anchor="ctr"/>
           <a:lstStyle/>
           <a:p>
-            <a:pPr algn="ctr" indent="0" marL="0">
-              <a:buNone/>
-            </a:pPr>
-            <a:r>
-              <a:rPr lang="en-US" sz="1350" b="1" dirty="0">
-                <a:solidFill>
-                  <a:srgbClr val="F0A500"/>
+            <a:pPr indent="0" marL="0">
+              <a:buNone/>
+            </a:pPr>
+            <a:r>
+              <a:rPr lang="en-US" sz="1400" b="1" dirty="0">
+                <a:solidFill>
+                  <a:srgbClr val="1E2A33"/>
                 </a:solidFill>
                 <a:latin typeface="Calibri" pitchFamily="34" charset="0"/>
                 <a:ea typeface="Calibri" pitchFamily="34" charset="-122"/>
@@ -1476,7 +1455,7 @@
               </a:rPr>
               <a:t>Speed 1,000–3,400 RPM</a:t>
             </a:r>
-            <a:endParaRPr lang="en-US" sz="1350" dirty="0"/>
+            <a:endParaRPr lang="en-US" sz="1400" dirty="0"/>
           </a:p>
         </p:txBody>
       </p:sp>
@@ -1504,17 +1483,6 @@
             <a:pPr indent="0" marL="0">
               <a:buNone/>
             </a:pPr>
-            <a:r>
-              <a:rPr lang="en-US" sz="1250" dirty="0">
-                <a:solidFill>
-                  <a:srgbClr val="5F6E78"/>
-                </a:solidFill>
-                <a:latin typeface="Calibri" pitchFamily="34" charset="0"/>
-                <a:ea typeface="Calibri" pitchFamily="34" charset="-122"/>
-                <a:cs typeface="Calibri" pitchFamily="34" charset="-120"/>
-              </a:rPr>
-              <a:t>Fog &amp; Edge Computing (H9FECC)   ·   deployed live on AWS</a:t>
-            </a:r>
             <a:endParaRPr lang="en-US" sz="1250" dirty="0"/>
           </a:p>
         </p:txBody>

--- a/ppt/VikasReddyAmanagantti_X25178849_industrial-equipment-monitoring.pptx
+++ b/ppt/VikasReddyAmanagantti_X25178849_industrial-equipment-monitoring.pptx
@@ -1124,7 +1124,7 @@
     <p:bg>
       <p:bgPr>
         <a:solidFill>
-          <a:srgbClr val="FFFFFF"/>
+          <a:srgbClr val="3A1512"/>
         </a:solidFill>
       </p:bgPr>
     </p:bg>
@@ -1149,29 +1149,529 @@
           <p:nvPr/>
         </p:nvSpPr>
         <p:spPr>
-          <a:xfrm>
-            <a:off x="0" y="0"/>
-            <a:ext cx="12191695" cy="3931920"/>
-          </a:xfrm>
-          <a:prstGeom prst="rect">
-            <a:avLst/>
-          </a:prstGeom>
-          <a:solidFill>
-            <a:srgbClr val="37474F"/>
-          </a:solidFill>
-          <a:ln/>
-        </p:spPr>
-      </p:sp>
-      <p:sp>
-        <p:nvSpPr>
-          <p:cNvPr id="3" name="Text 1"/>
-          <p:cNvSpPr/>
-          <p:nvPr/>
-        </p:nvSpPr>
-        <p:spPr>
-          <a:xfrm>
-            <a:off x="640080" y="1005840"/>
-            <a:ext cx="10972800" cy="1554480"/>
+          <a:xfrm flipV="1">
+            <a:off x="0" y="6217920"/>
+            <a:ext cx="468911" cy="640080"/>
+          </a:xfrm>
+          <a:prstGeom prst="triangle">
+            <a:avLst/>
+          </a:prstGeom>
+          <a:solidFill>
+            <a:srgbClr val="482320"/>
+          </a:solidFill>
+          <a:ln/>
+        </p:spPr>
+      </p:sp>
+      <p:sp>
+        <p:nvSpPr>
+          <p:cNvPr id="3" name="Shape 1"/>
+          <p:cNvSpPr/>
+          <p:nvPr/>
+        </p:nvSpPr>
+        <p:spPr>
+          <a:xfrm>
+            <a:off x="468911" y="6217920"/>
+            <a:ext cx="468911" cy="640080"/>
+          </a:xfrm>
+          <a:prstGeom prst="triangle">
+            <a:avLst/>
+          </a:prstGeom>
+          <a:solidFill>
+            <a:srgbClr val="F2B705"/>
+          </a:solidFill>
+          <a:ln/>
+        </p:spPr>
+      </p:sp>
+      <p:sp>
+        <p:nvSpPr>
+          <p:cNvPr id="4" name="Shape 2"/>
+          <p:cNvSpPr/>
+          <p:nvPr/>
+        </p:nvSpPr>
+        <p:spPr>
+          <a:xfrm flipV="1">
+            <a:off x="937823" y="6217920"/>
+            <a:ext cx="468911" cy="640080"/>
+          </a:xfrm>
+          <a:prstGeom prst="triangle">
+            <a:avLst/>
+          </a:prstGeom>
+          <a:solidFill>
+            <a:srgbClr val="482320"/>
+          </a:solidFill>
+          <a:ln/>
+        </p:spPr>
+      </p:sp>
+      <p:sp>
+        <p:nvSpPr>
+          <p:cNvPr id="5" name="Shape 3"/>
+          <p:cNvSpPr/>
+          <p:nvPr/>
+        </p:nvSpPr>
+        <p:spPr>
+          <a:xfrm>
+            <a:off x="1406734" y="6217920"/>
+            <a:ext cx="468911" cy="640080"/>
+          </a:xfrm>
+          <a:prstGeom prst="triangle">
+            <a:avLst/>
+          </a:prstGeom>
+          <a:solidFill>
+            <a:srgbClr val="F2B705"/>
+          </a:solidFill>
+          <a:ln/>
+        </p:spPr>
+      </p:sp>
+      <p:sp>
+        <p:nvSpPr>
+          <p:cNvPr id="6" name="Shape 4"/>
+          <p:cNvSpPr/>
+          <p:nvPr/>
+        </p:nvSpPr>
+        <p:spPr>
+          <a:xfrm flipV="1">
+            <a:off x="1875645" y="6217920"/>
+            <a:ext cx="468911" cy="640080"/>
+          </a:xfrm>
+          <a:prstGeom prst="triangle">
+            <a:avLst/>
+          </a:prstGeom>
+          <a:solidFill>
+            <a:srgbClr val="482320"/>
+          </a:solidFill>
+          <a:ln/>
+        </p:spPr>
+      </p:sp>
+      <p:sp>
+        <p:nvSpPr>
+          <p:cNvPr id="7" name="Shape 5"/>
+          <p:cNvSpPr/>
+          <p:nvPr/>
+        </p:nvSpPr>
+        <p:spPr>
+          <a:xfrm>
+            <a:off x="2344557" y="6217920"/>
+            <a:ext cx="468911" cy="640080"/>
+          </a:xfrm>
+          <a:prstGeom prst="triangle">
+            <a:avLst/>
+          </a:prstGeom>
+          <a:solidFill>
+            <a:srgbClr val="F2B705"/>
+          </a:solidFill>
+          <a:ln/>
+        </p:spPr>
+      </p:sp>
+      <p:sp>
+        <p:nvSpPr>
+          <p:cNvPr id="8" name="Shape 6"/>
+          <p:cNvSpPr/>
+          <p:nvPr/>
+        </p:nvSpPr>
+        <p:spPr>
+          <a:xfrm flipV="1">
+            <a:off x="2813468" y="6217920"/>
+            <a:ext cx="468911" cy="640080"/>
+          </a:xfrm>
+          <a:prstGeom prst="triangle">
+            <a:avLst/>
+          </a:prstGeom>
+          <a:solidFill>
+            <a:srgbClr val="482320"/>
+          </a:solidFill>
+          <a:ln/>
+        </p:spPr>
+      </p:sp>
+      <p:sp>
+        <p:nvSpPr>
+          <p:cNvPr id="9" name="Shape 7"/>
+          <p:cNvSpPr/>
+          <p:nvPr/>
+        </p:nvSpPr>
+        <p:spPr>
+          <a:xfrm>
+            <a:off x="3282379" y="6217920"/>
+            <a:ext cx="468911" cy="640080"/>
+          </a:xfrm>
+          <a:prstGeom prst="triangle">
+            <a:avLst/>
+          </a:prstGeom>
+          <a:solidFill>
+            <a:srgbClr val="F2B705"/>
+          </a:solidFill>
+          <a:ln/>
+        </p:spPr>
+      </p:sp>
+      <p:sp>
+        <p:nvSpPr>
+          <p:cNvPr id="10" name="Shape 8"/>
+          <p:cNvSpPr/>
+          <p:nvPr/>
+        </p:nvSpPr>
+        <p:spPr>
+          <a:xfrm flipV="1">
+            <a:off x="3751291" y="6217920"/>
+            <a:ext cx="468911" cy="640080"/>
+          </a:xfrm>
+          <a:prstGeom prst="triangle">
+            <a:avLst/>
+          </a:prstGeom>
+          <a:solidFill>
+            <a:srgbClr val="482320"/>
+          </a:solidFill>
+          <a:ln/>
+        </p:spPr>
+      </p:sp>
+      <p:sp>
+        <p:nvSpPr>
+          <p:cNvPr id="11" name="Shape 9"/>
+          <p:cNvSpPr/>
+          <p:nvPr/>
+        </p:nvSpPr>
+        <p:spPr>
+          <a:xfrm>
+            <a:off x="4220202" y="6217920"/>
+            <a:ext cx="468911" cy="640080"/>
+          </a:xfrm>
+          <a:prstGeom prst="triangle">
+            <a:avLst/>
+          </a:prstGeom>
+          <a:solidFill>
+            <a:srgbClr val="F2B705"/>
+          </a:solidFill>
+          <a:ln/>
+        </p:spPr>
+      </p:sp>
+      <p:sp>
+        <p:nvSpPr>
+          <p:cNvPr id="12" name="Shape 10"/>
+          <p:cNvSpPr/>
+          <p:nvPr/>
+        </p:nvSpPr>
+        <p:spPr>
+          <a:xfrm flipV="1">
+            <a:off x="4689114" y="6217920"/>
+            <a:ext cx="468911" cy="640080"/>
+          </a:xfrm>
+          <a:prstGeom prst="triangle">
+            <a:avLst/>
+          </a:prstGeom>
+          <a:solidFill>
+            <a:srgbClr val="482320"/>
+          </a:solidFill>
+          <a:ln/>
+        </p:spPr>
+      </p:sp>
+      <p:sp>
+        <p:nvSpPr>
+          <p:cNvPr id="13" name="Shape 11"/>
+          <p:cNvSpPr/>
+          <p:nvPr/>
+        </p:nvSpPr>
+        <p:spPr>
+          <a:xfrm>
+            <a:off x="5158025" y="6217920"/>
+            <a:ext cx="468911" cy="640080"/>
+          </a:xfrm>
+          <a:prstGeom prst="triangle">
+            <a:avLst/>
+          </a:prstGeom>
+          <a:solidFill>
+            <a:srgbClr val="F2B705"/>
+          </a:solidFill>
+          <a:ln/>
+        </p:spPr>
+      </p:sp>
+      <p:sp>
+        <p:nvSpPr>
+          <p:cNvPr id="14" name="Shape 12"/>
+          <p:cNvSpPr/>
+          <p:nvPr/>
+        </p:nvSpPr>
+        <p:spPr>
+          <a:xfrm flipV="1">
+            <a:off x="5626936" y="6217920"/>
+            <a:ext cx="468911" cy="640080"/>
+          </a:xfrm>
+          <a:prstGeom prst="triangle">
+            <a:avLst/>
+          </a:prstGeom>
+          <a:solidFill>
+            <a:srgbClr val="482320"/>
+          </a:solidFill>
+          <a:ln/>
+        </p:spPr>
+      </p:sp>
+      <p:sp>
+        <p:nvSpPr>
+          <p:cNvPr id="15" name="Shape 13"/>
+          <p:cNvSpPr/>
+          <p:nvPr/>
+        </p:nvSpPr>
+        <p:spPr>
+          <a:xfrm>
+            <a:off x="6095848" y="6217920"/>
+            <a:ext cx="468911" cy="640080"/>
+          </a:xfrm>
+          <a:prstGeom prst="triangle">
+            <a:avLst/>
+          </a:prstGeom>
+          <a:solidFill>
+            <a:srgbClr val="F2B705"/>
+          </a:solidFill>
+          <a:ln/>
+        </p:spPr>
+      </p:sp>
+      <p:sp>
+        <p:nvSpPr>
+          <p:cNvPr id="16" name="Shape 14"/>
+          <p:cNvSpPr/>
+          <p:nvPr/>
+        </p:nvSpPr>
+        <p:spPr>
+          <a:xfrm flipV="1">
+            <a:off x="6564759" y="6217920"/>
+            <a:ext cx="468911" cy="640080"/>
+          </a:xfrm>
+          <a:prstGeom prst="triangle">
+            <a:avLst/>
+          </a:prstGeom>
+          <a:solidFill>
+            <a:srgbClr val="482320"/>
+          </a:solidFill>
+          <a:ln/>
+        </p:spPr>
+      </p:sp>
+      <p:sp>
+        <p:nvSpPr>
+          <p:cNvPr id="17" name="Shape 15"/>
+          <p:cNvSpPr/>
+          <p:nvPr/>
+        </p:nvSpPr>
+        <p:spPr>
+          <a:xfrm>
+            <a:off x="7033670" y="6217920"/>
+            <a:ext cx="468911" cy="640080"/>
+          </a:xfrm>
+          <a:prstGeom prst="triangle">
+            <a:avLst/>
+          </a:prstGeom>
+          <a:solidFill>
+            <a:srgbClr val="F2B705"/>
+          </a:solidFill>
+          <a:ln/>
+        </p:spPr>
+      </p:sp>
+      <p:sp>
+        <p:nvSpPr>
+          <p:cNvPr id="18" name="Shape 16"/>
+          <p:cNvSpPr/>
+          <p:nvPr/>
+        </p:nvSpPr>
+        <p:spPr>
+          <a:xfrm flipV="1">
+            <a:off x="7502582" y="6217920"/>
+            <a:ext cx="468911" cy="640080"/>
+          </a:xfrm>
+          <a:prstGeom prst="triangle">
+            <a:avLst/>
+          </a:prstGeom>
+          <a:solidFill>
+            <a:srgbClr val="482320"/>
+          </a:solidFill>
+          <a:ln/>
+        </p:spPr>
+      </p:sp>
+      <p:sp>
+        <p:nvSpPr>
+          <p:cNvPr id="19" name="Shape 17"/>
+          <p:cNvSpPr/>
+          <p:nvPr/>
+        </p:nvSpPr>
+        <p:spPr>
+          <a:xfrm>
+            <a:off x="7971493" y="6217920"/>
+            <a:ext cx="468911" cy="640080"/>
+          </a:xfrm>
+          <a:prstGeom prst="triangle">
+            <a:avLst/>
+          </a:prstGeom>
+          <a:solidFill>
+            <a:srgbClr val="F2B705"/>
+          </a:solidFill>
+          <a:ln/>
+        </p:spPr>
+      </p:sp>
+      <p:sp>
+        <p:nvSpPr>
+          <p:cNvPr id="20" name="Shape 18"/>
+          <p:cNvSpPr/>
+          <p:nvPr/>
+        </p:nvSpPr>
+        <p:spPr>
+          <a:xfrm flipV="1">
+            <a:off x="8440404" y="6217920"/>
+            <a:ext cx="468911" cy="640080"/>
+          </a:xfrm>
+          <a:prstGeom prst="triangle">
+            <a:avLst/>
+          </a:prstGeom>
+          <a:solidFill>
+            <a:srgbClr val="482320"/>
+          </a:solidFill>
+          <a:ln/>
+        </p:spPr>
+      </p:sp>
+      <p:sp>
+        <p:nvSpPr>
+          <p:cNvPr id="21" name="Shape 19"/>
+          <p:cNvSpPr/>
+          <p:nvPr/>
+        </p:nvSpPr>
+        <p:spPr>
+          <a:xfrm>
+            <a:off x="8909316" y="6217920"/>
+            <a:ext cx="468911" cy="640080"/>
+          </a:xfrm>
+          <a:prstGeom prst="triangle">
+            <a:avLst/>
+          </a:prstGeom>
+          <a:solidFill>
+            <a:srgbClr val="F2B705"/>
+          </a:solidFill>
+          <a:ln/>
+        </p:spPr>
+      </p:sp>
+      <p:sp>
+        <p:nvSpPr>
+          <p:cNvPr id="22" name="Shape 20"/>
+          <p:cNvSpPr/>
+          <p:nvPr/>
+        </p:nvSpPr>
+        <p:spPr>
+          <a:xfrm flipV="1">
+            <a:off x="9378227" y="6217920"/>
+            <a:ext cx="468911" cy="640080"/>
+          </a:xfrm>
+          <a:prstGeom prst="triangle">
+            <a:avLst/>
+          </a:prstGeom>
+          <a:solidFill>
+            <a:srgbClr val="482320"/>
+          </a:solidFill>
+          <a:ln/>
+        </p:spPr>
+      </p:sp>
+      <p:sp>
+        <p:nvSpPr>
+          <p:cNvPr id="23" name="Shape 21"/>
+          <p:cNvSpPr/>
+          <p:nvPr/>
+        </p:nvSpPr>
+        <p:spPr>
+          <a:xfrm>
+            <a:off x="9847138" y="6217920"/>
+            <a:ext cx="468911" cy="640080"/>
+          </a:xfrm>
+          <a:prstGeom prst="triangle">
+            <a:avLst/>
+          </a:prstGeom>
+          <a:solidFill>
+            <a:srgbClr val="F2B705"/>
+          </a:solidFill>
+          <a:ln/>
+        </p:spPr>
+      </p:sp>
+      <p:sp>
+        <p:nvSpPr>
+          <p:cNvPr id="24" name="Shape 22"/>
+          <p:cNvSpPr/>
+          <p:nvPr/>
+        </p:nvSpPr>
+        <p:spPr>
+          <a:xfrm flipV="1">
+            <a:off x="10316050" y="6217920"/>
+            <a:ext cx="468911" cy="640080"/>
+          </a:xfrm>
+          <a:prstGeom prst="triangle">
+            <a:avLst/>
+          </a:prstGeom>
+          <a:solidFill>
+            <a:srgbClr val="482320"/>
+          </a:solidFill>
+          <a:ln/>
+        </p:spPr>
+      </p:sp>
+      <p:sp>
+        <p:nvSpPr>
+          <p:cNvPr id="25" name="Shape 23"/>
+          <p:cNvSpPr/>
+          <p:nvPr/>
+        </p:nvSpPr>
+        <p:spPr>
+          <a:xfrm>
+            <a:off x="10784961" y="6217920"/>
+            <a:ext cx="468911" cy="640080"/>
+          </a:xfrm>
+          <a:prstGeom prst="triangle">
+            <a:avLst/>
+          </a:prstGeom>
+          <a:solidFill>
+            <a:srgbClr val="F2B705"/>
+          </a:solidFill>
+          <a:ln/>
+        </p:spPr>
+      </p:sp>
+      <p:sp>
+        <p:nvSpPr>
+          <p:cNvPr id="26" name="Shape 24"/>
+          <p:cNvSpPr/>
+          <p:nvPr/>
+        </p:nvSpPr>
+        <p:spPr>
+          <a:xfrm flipV="1">
+            <a:off x="11253872" y="6217920"/>
+            <a:ext cx="468911" cy="640080"/>
+          </a:xfrm>
+          <a:prstGeom prst="triangle">
+            <a:avLst/>
+          </a:prstGeom>
+          <a:solidFill>
+            <a:srgbClr val="482320"/>
+          </a:solidFill>
+          <a:ln/>
+        </p:spPr>
+      </p:sp>
+      <p:sp>
+        <p:nvSpPr>
+          <p:cNvPr id="27" name="Shape 25"/>
+          <p:cNvSpPr/>
+          <p:nvPr/>
+        </p:nvSpPr>
+        <p:spPr>
+          <a:xfrm>
+            <a:off x="11722784" y="6217920"/>
+            <a:ext cx="468911" cy="640080"/>
+          </a:xfrm>
+          <a:prstGeom prst="triangle">
+            <a:avLst/>
+          </a:prstGeom>
+          <a:solidFill>
+            <a:srgbClr val="F2B705"/>
+          </a:solidFill>
+          <a:ln/>
+        </p:spPr>
+      </p:sp>
+      <p:sp>
+        <p:nvSpPr>
+          <p:cNvPr id="28" name="Text 26"/>
+          <p:cNvSpPr/>
+          <p:nvPr/>
+        </p:nvSpPr>
+        <p:spPr>
+          <a:xfrm>
+            <a:off x="758952" y="1645920"/>
+            <a:ext cx="10637215" cy="1645920"/>
           </a:xfrm>
           <a:prstGeom prst="rect">
             <a:avLst/>
@@ -1184,16 +1684,19 @@
           <a:lstStyle/>
           <a:p>
             <a:pPr indent="0" marL="0">
+              <a:lnSpc>
+                <a:spcPct val="98000"/>
+              </a:lnSpc>
               <a:buNone/>
             </a:pPr>
             <a:r>
               <a:rPr lang="en-US" sz="3800" b="1" dirty="0">
                 <a:solidFill>
-                  <a:srgbClr val="FFFFFF"/>
+                  <a:srgbClr val="ECE9E2"/>
                 </a:solidFill>
-                <a:latin typeface="Bookman Old Style" pitchFamily="34" charset="0"/>
-                <a:ea typeface="Bookman Old Style" pitchFamily="34" charset="-122"/>
-                <a:cs typeface="Bookman Old Style" pitchFamily="34" charset="-120"/>
+                <a:latin typeface="Arial" pitchFamily="34" charset="0"/>
+                <a:ea typeface="Arial" pitchFamily="34" charset="-122"/>
+                <a:cs typeface="Arial" pitchFamily="34" charset="-120"/>
               </a:rPr>
               <a:t>Industrial Equipment Predictive Monitoring</a:t>
             </a:r>
@@ -1203,14 +1706,14 @@
       </p:sp>
       <p:sp>
         <p:nvSpPr>
-          <p:cNvPr id="4" name="Text 2"/>
-          <p:cNvSpPr/>
-          <p:nvPr/>
-        </p:nvSpPr>
-        <p:spPr>
-          <a:xfrm>
-            <a:off x="658368" y="2880360"/>
-            <a:ext cx="10972800" cy="457200"/>
+          <p:cNvPr id="29" name="Text 27"/>
+          <p:cNvSpPr/>
+          <p:nvPr/>
+        </p:nvSpPr>
+        <p:spPr>
+          <a:xfrm>
+            <a:off x="777240" y="3337560"/>
+            <a:ext cx="10637215" cy="365760"/>
           </a:xfrm>
           <a:prstGeom prst="rect">
             <a:avLst/>
@@ -1226,9 +1729,9 @@
               <a:buNone/>
             </a:pPr>
             <a:r>
-              <a:rPr lang="en-US" sz="1600" dirty="0">
+              <a:rPr lang="en-US" sz="1450" dirty="0">
                 <a:solidFill>
-                  <a:srgbClr val="CDD9E0"/>
+                  <a:srgbClr val="8B98A6"/>
                 </a:solidFill>
                 <a:latin typeface="Calibri" pitchFamily="34" charset="0"/>
                 <a:ea typeface="Calibri" pitchFamily="34" charset="-122"/>
@@ -1236,20 +1739,20 @@
               </a:rPr>
               <a:t>Vikas Reddy Amanagantti   ·   X25178849</a:t>
             </a:r>
-            <a:endParaRPr lang="en-US" sz="1600" dirty="0"/>
+            <a:endParaRPr lang="en-US" sz="1450" dirty="0"/>
           </a:p>
         </p:txBody>
       </p:sp>
       <p:sp>
         <p:nvSpPr>
-          <p:cNvPr id="5" name="Text 3"/>
-          <p:cNvSpPr/>
-          <p:nvPr/>
-        </p:nvSpPr>
-        <p:spPr>
-          <a:xfrm>
-            <a:off x="658368" y="4206240"/>
-            <a:ext cx="10424160" cy="1280160"/>
+          <p:cNvPr id="30" name="Text 28"/>
+          <p:cNvSpPr/>
+          <p:nvPr/>
+        </p:nvSpPr>
+        <p:spPr>
+          <a:xfrm>
+            <a:off x="777240" y="3931920"/>
+            <a:ext cx="8138160" cy="1325880"/>
           </a:xfrm>
           <a:prstGeom prst="rect">
             <a:avLst/>
@@ -1258,19 +1761,19 @@
           <a:ln/>
         </p:spPr>
         <p:txBody>
-          <a:bodyPr wrap="square" rtlCol="0" anchor="ctr"/>
+          <a:bodyPr wrap="square" rtlCol="0" anchor="t"/>
           <a:lstStyle/>
           <a:p>
             <a:pPr indent="0" marL="0">
               <a:lnSpc>
-                <a:spcPct val="108000"/>
+                <a:spcPct val="130000"/>
               </a:lnSpc>
               <a:buNone/>
             </a:pPr>
             <a:r>
-              <a:rPr lang="en-US" sz="1800" dirty="0">
+              <a:rPr lang="en-US" sz="1400" dirty="0">
                 <a:solidFill>
-                  <a:srgbClr val="1E2A33"/>
+                  <a:srgbClr val="ECE9E2"/>
                 </a:solidFill>
                 <a:latin typeface="Calibri" pitchFamily="34" charset="0"/>
                 <a:ea typeface="Calibri" pitchFamily="34" charset="-122"/>
@@ -1278,212 +1781,7 @@
               </a:rPr>
               <a:t>A walk-round reads each gauge once — but a machine fails across heat, vibration, bearing noise, speed and power at the same time, in the minutes between rounds.</a:t>
             </a:r>
-            <a:endParaRPr lang="en-US" sz="1800" dirty="0"/>
-          </a:p>
-        </p:txBody>
-      </p:sp>
-      <p:sp>
-        <p:nvSpPr>
-          <p:cNvPr id="6" name="Shape 4"/>
-          <p:cNvSpPr/>
-          <p:nvPr/>
-        </p:nvSpPr>
-        <p:spPr>
-          <a:xfrm>
-            <a:off x="658368" y="5724144"/>
-            <a:ext cx="146304" cy="146304"/>
-          </a:xfrm>
-          <a:prstGeom prst="rect">
-            <a:avLst/>
-          </a:prstGeom>
-          <a:solidFill>
-            <a:srgbClr val="6C8A9A"/>
-          </a:solidFill>
-          <a:ln/>
-        </p:spPr>
-      </p:sp>
-      <p:sp>
-        <p:nvSpPr>
-          <p:cNvPr id="7" name="Text 5"/>
-          <p:cNvSpPr/>
-          <p:nvPr/>
-        </p:nvSpPr>
-        <p:spPr>
-          <a:xfrm>
-            <a:off x="932688" y="5577840"/>
-            <a:ext cx="2560320" cy="457200"/>
-          </a:xfrm>
-          <a:prstGeom prst="rect">
-            <a:avLst/>
-          </a:prstGeom>
-          <a:noFill/>
-          <a:ln/>
-        </p:spPr>
-        <p:txBody>
-          <a:bodyPr wrap="square" lIns="0" tIns="0" rIns="0" bIns="0" rtlCol="0" anchor="ctr"/>
-          <a:lstStyle/>
-          <a:p>
-            <a:pPr indent="0" marL="0">
-              <a:buNone/>
-            </a:pPr>
-            <a:r>
-              <a:rPr lang="en-US" sz="1400" b="1" dirty="0">
-                <a:solidFill>
-                  <a:srgbClr val="1E2A33"/>
-                </a:solidFill>
-                <a:latin typeface="Calibri" pitchFamily="34" charset="0"/>
-                <a:ea typeface="Calibri" pitchFamily="34" charset="-122"/>
-                <a:cs typeface="Calibri" pitchFamily="34" charset="-120"/>
-              </a:rPr>
-              <a:t>Motor temp &gt; 95 °C</a:t>
-            </a:r>
             <a:endParaRPr lang="en-US" sz="1400" dirty="0"/>
-          </a:p>
-        </p:txBody>
-      </p:sp>
-      <p:sp>
-        <p:nvSpPr>
-          <p:cNvPr id="8" name="Shape 6"/>
-          <p:cNvSpPr/>
-          <p:nvPr/>
-        </p:nvSpPr>
-        <p:spPr>
-          <a:xfrm>
-            <a:off x="3538728" y="5724144"/>
-            <a:ext cx="146304" cy="146304"/>
-          </a:xfrm>
-          <a:prstGeom prst="rect">
-            <a:avLst/>
-          </a:prstGeom>
-          <a:solidFill>
-            <a:srgbClr val="6C8A9A"/>
-          </a:solidFill>
-          <a:ln/>
-        </p:spPr>
-      </p:sp>
-      <p:sp>
-        <p:nvSpPr>
-          <p:cNvPr id="9" name="Text 7"/>
-          <p:cNvSpPr/>
-          <p:nvPr/>
-        </p:nvSpPr>
-        <p:spPr>
-          <a:xfrm>
-            <a:off x="3813048" y="5577840"/>
-            <a:ext cx="2560320" cy="457200"/>
-          </a:xfrm>
-          <a:prstGeom prst="rect">
-            <a:avLst/>
-          </a:prstGeom>
-          <a:noFill/>
-          <a:ln/>
-        </p:spPr>
-        <p:txBody>
-          <a:bodyPr wrap="square" lIns="0" tIns="0" rIns="0" bIns="0" rtlCol="0" anchor="ctr"/>
-          <a:lstStyle/>
-          <a:p>
-            <a:pPr indent="0" marL="0">
-              <a:buNone/>
-            </a:pPr>
-            <a:r>
-              <a:rPr lang="en-US" sz="1400" b="1" dirty="0">
-                <a:solidFill>
-                  <a:srgbClr val="1E2A33"/>
-                </a:solidFill>
-                <a:latin typeface="Calibri" pitchFamily="34" charset="0"/>
-                <a:ea typeface="Calibri" pitchFamily="34" charset="-122"/>
-                <a:cs typeface="Calibri" pitchFamily="34" charset="-120"/>
-              </a:rPr>
-              <a:t>Vibration &gt; 7 mm/s</a:t>
-            </a:r>
-            <a:endParaRPr lang="en-US" sz="1400" dirty="0"/>
-          </a:p>
-        </p:txBody>
-      </p:sp>
-      <p:sp>
-        <p:nvSpPr>
-          <p:cNvPr id="10" name="Shape 8"/>
-          <p:cNvSpPr/>
-          <p:nvPr/>
-        </p:nvSpPr>
-        <p:spPr>
-          <a:xfrm>
-            <a:off x="6419088" y="5724144"/>
-            <a:ext cx="146304" cy="146304"/>
-          </a:xfrm>
-          <a:prstGeom prst="rect">
-            <a:avLst/>
-          </a:prstGeom>
-          <a:solidFill>
-            <a:srgbClr val="6C8A9A"/>
-          </a:solidFill>
-          <a:ln/>
-        </p:spPr>
-      </p:sp>
-      <p:sp>
-        <p:nvSpPr>
-          <p:cNvPr id="11" name="Text 9"/>
-          <p:cNvSpPr/>
-          <p:nvPr/>
-        </p:nvSpPr>
-        <p:spPr>
-          <a:xfrm>
-            <a:off x="6693408" y="5577840"/>
-            <a:ext cx="2560320" cy="457200"/>
-          </a:xfrm>
-          <a:prstGeom prst="rect">
-            <a:avLst/>
-          </a:prstGeom>
-          <a:noFill/>
-          <a:ln/>
-        </p:spPr>
-        <p:txBody>
-          <a:bodyPr wrap="square" lIns="0" tIns="0" rIns="0" bIns="0" rtlCol="0" anchor="ctr"/>
-          <a:lstStyle/>
-          <a:p>
-            <a:pPr indent="0" marL="0">
-              <a:buNone/>
-            </a:pPr>
-            <a:r>
-              <a:rPr lang="en-US" sz="1400" b="1" dirty="0">
-                <a:solidFill>
-                  <a:srgbClr val="1E2A33"/>
-                </a:solidFill>
-                <a:latin typeface="Calibri" pitchFamily="34" charset="0"/>
-                <a:ea typeface="Calibri" pitchFamily="34" charset="-122"/>
-                <a:cs typeface="Calibri" pitchFamily="34" charset="-120"/>
-              </a:rPr>
-              <a:t>Speed 1,000–3,400 RPM</a:t>
-            </a:r>
-            <a:endParaRPr lang="en-US" sz="1400" dirty="0"/>
-          </a:p>
-        </p:txBody>
-      </p:sp>
-      <p:sp>
-        <p:nvSpPr>
-          <p:cNvPr id="12" name="Text 10"/>
-          <p:cNvSpPr/>
-          <p:nvPr/>
-        </p:nvSpPr>
-        <p:spPr>
-          <a:xfrm>
-            <a:off x="658368" y="6400800"/>
-            <a:ext cx="10972800" cy="320040"/>
-          </a:xfrm>
-          <a:prstGeom prst="rect">
-            <a:avLst/>
-          </a:prstGeom>
-          <a:noFill/>
-          <a:ln/>
-        </p:spPr>
-        <p:txBody>
-          <a:bodyPr wrap="square" rtlCol="0" anchor="ctr"/>
-          <a:lstStyle/>
-          <a:p>
-            <a:pPr indent="0" marL="0">
-              <a:buNone/>
-            </a:pPr>
-            <a:endParaRPr lang="en-US" sz="1250" dirty="0"/>
           </a:p>
         </p:txBody>
       </p:sp>
@@ -1501,7 +1799,7 @@
     <p:bg>
       <p:bgPr>
         <a:solidFill>
-          <a:srgbClr val="FFFFFF"/>
+          <a:srgbClr val="3A1512"/>
         </a:solidFill>
       </p:bgPr>
     </p:bg>
@@ -1521,14 +1819,534 @@
       </p:grpSpPr>
       <p:sp>
         <p:nvSpPr>
-          <p:cNvPr id="2" name="Text 0"/>
-          <p:cNvSpPr/>
-          <p:nvPr/>
-        </p:nvSpPr>
-        <p:spPr>
-          <a:xfrm>
-            <a:off x="640080" y="457200"/>
-            <a:ext cx="10972800" cy="640080"/>
+          <p:cNvPr id="2" name="Shape 0"/>
+          <p:cNvSpPr/>
+          <p:nvPr/>
+        </p:nvSpPr>
+        <p:spPr>
+          <a:xfrm flipV="1">
+            <a:off x="0" y="6217920"/>
+            <a:ext cx="468911" cy="640080"/>
+          </a:xfrm>
+          <a:prstGeom prst="triangle">
+            <a:avLst/>
+          </a:prstGeom>
+          <a:solidFill>
+            <a:srgbClr val="482320"/>
+          </a:solidFill>
+          <a:ln/>
+        </p:spPr>
+      </p:sp>
+      <p:sp>
+        <p:nvSpPr>
+          <p:cNvPr id="3" name="Shape 1"/>
+          <p:cNvSpPr/>
+          <p:nvPr/>
+        </p:nvSpPr>
+        <p:spPr>
+          <a:xfrm>
+            <a:off x="468911" y="6217920"/>
+            <a:ext cx="468911" cy="640080"/>
+          </a:xfrm>
+          <a:prstGeom prst="triangle">
+            <a:avLst/>
+          </a:prstGeom>
+          <a:solidFill>
+            <a:srgbClr val="F2B705"/>
+          </a:solidFill>
+          <a:ln/>
+        </p:spPr>
+      </p:sp>
+      <p:sp>
+        <p:nvSpPr>
+          <p:cNvPr id="4" name="Shape 2"/>
+          <p:cNvSpPr/>
+          <p:nvPr/>
+        </p:nvSpPr>
+        <p:spPr>
+          <a:xfrm flipV="1">
+            <a:off x="937823" y="6217920"/>
+            <a:ext cx="468911" cy="640080"/>
+          </a:xfrm>
+          <a:prstGeom prst="triangle">
+            <a:avLst/>
+          </a:prstGeom>
+          <a:solidFill>
+            <a:srgbClr val="482320"/>
+          </a:solidFill>
+          <a:ln/>
+        </p:spPr>
+      </p:sp>
+      <p:sp>
+        <p:nvSpPr>
+          <p:cNvPr id="5" name="Shape 3"/>
+          <p:cNvSpPr/>
+          <p:nvPr/>
+        </p:nvSpPr>
+        <p:spPr>
+          <a:xfrm>
+            <a:off x="1406734" y="6217920"/>
+            <a:ext cx="468911" cy="640080"/>
+          </a:xfrm>
+          <a:prstGeom prst="triangle">
+            <a:avLst/>
+          </a:prstGeom>
+          <a:solidFill>
+            <a:srgbClr val="F2B705"/>
+          </a:solidFill>
+          <a:ln/>
+        </p:spPr>
+      </p:sp>
+      <p:sp>
+        <p:nvSpPr>
+          <p:cNvPr id="6" name="Shape 4"/>
+          <p:cNvSpPr/>
+          <p:nvPr/>
+        </p:nvSpPr>
+        <p:spPr>
+          <a:xfrm flipV="1">
+            <a:off x="1875645" y="6217920"/>
+            <a:ext cx="468911" cy="640080"/>
+          </a:xfrm>
+          <a:prstGeom prst="triangle">
+            <a:avLst/>
+          </a:prstGeom>
+          <a:solidFill>
+            <a:srgbClr val="482320"/>
+          </a:solidFill>
+          <a:ln/>
+        </p:spPr>
+      </p:sp>
+      <p:sp>
+        <p:nvSpPr>
+          <p:cNvPr id="7" name="Shape 5"/>
+          <p:cNvSpPr/>
+          <p:nvPr/>
+        </p:nvSpPr>
+        <p:spPr>
+          <a:xfrm>
+            <a:off x="2344557" y="6217920"/>
+            <a:ext cx="468911" cy="640080"/>
+          </a:xfrm>
+          <a:prstGeom prst="triangle">
+            <a:avLst/>
+          </a:prstGeom>
+          <a:solidFill>
+            <a:srgbClr val="F2B705"/>
+          </a:solidFill>
+          <a:ln/>
+        </p:spPr>
+      </p:sp>
+      <p:sp>
+        <p:nvSpPr>
+          <p:cNvPr id="8" name="Shape 6"/>
+          <p:cNvSpPr/>
+          <p:nvPr/>
+        </p:nvSpPr>
+        <p:spPr>
+          <a:xfrm flipV="1">
+            <a:off x="2813468" y="6217920"/>
+            <a:ext cx="468911" cy="640080"/>
+          </a:xfrm>
+          <a:prstGeom prst="triangle">
+            <a:avLst/>
+          </a:prstGeom>
+          <a:solidFill>
+            <a:srgbClr val="482320"/>
+          </a:solidFill>
+          <a:ln/>
+        </p:spPr>
+      </p:sp>
+      <p:sp>
+        <p:nvSpPr>
+          <p:cNvPr id="9" name="Shape 7"/>
+          <p:cNvSpPr/>
+          <p:nvPr/>
+        </p:nvSpPr>
+        <p:spPr>
+          <a:xfrm>
+            <a:off x="3282379" y="6217920"/>
+            <a:ext cx="468911" cy="640080"/>
+          </a:xfrm>
+          <a:prstGeom prst="triangle">
+            <a:avLst/>
+          </a:prstGeom>
+          <a:solidFill>
+            <a:srgbClr val="F2B705"/>
+          </a:solidFill>
+          <a:ln/>
+        </p:spPr>
+      </p:sp>
+      <p:sp>
+        <p:nvSpPr>
+          <p:cNvPr id="10" name="Shape 8"/>
+          <p:cNvSpPr/>
+          <p:nvPr/>
+        </p:nvSpPr>
+        <p:spPr>
+          <a:xfrm flipV="1">
+            <a:off x="3751291" y="6217920"/>
+            <a:ext cx="468911" cy="640080"/>
+          </a:xfrm>
+          <a:prstGeom prst="triangle">
+            <a:avLst/>
+          </a:prstGeom>
+          <a:solidFill>
+            <a:srgbClr val="482320"/>
+          </a:solidFill>
+          <a:ln/>
+        </p:spPr>
+      </p:sp>
+      <p:sp>
+        <p:nvSpPr>
+          <p:cNvPr id="11" name="Shape 9"/>
+          <p:cNvSpPr/>
+          <p:nvPr/>
+        </p:nvSpPr>
+        <p:spPr>
+          <a:xfrm>
+            <a:off x="4220202" y="6217920"/>
+            <a:ext cx="468911" cy="640080"/>
+          </a:xfrm>
+          <a:prstGeom prst="triangle">
+            <a:avLst/>
+          </a:prstGeom>
+          <a:solidFill>
+            <a:srgbClr val="F2B705"/>
+          </a:solidFill>
+          <a:ln/>
+        </p:spPr>
+      </p:sp>
+      <p:sp>
+        <p:nvSpPr>
+          <p:cNvPr id="12" name="Shape 10"/>
+          <p:cNvSpPr/>
+          <p:nvPr/>
+        </p:nvSpPr>
+        <p:spPr>
+          <a:xfrm flipV="1">
+            <a:off x="4689114" y="6217920"/>
+            <a:ext cx="468911" cy="640080"/>
+          </a:xfrm>
+          <a:prstGeom prst="triangle">
+            <a:avLst/>
+          </a:prstGeom>
+          <a:solidFill>
+            <a:srgbClr val="482320"/>
+          </a:solidFill>
+          <a:ln/>
+        </p:spPr>
+      </p:sp>
+      <p:sp>
+        <p:nvSpPr>
+          <p:cNvPr id="13" name="Shape 11"/>
+          <p:cNvSpPr/>
+          <p:nvPr/>
+        </p:nvSpPr>
+        <p:spPr>
+          <a:xfrm>
+            <a:off x="5158025" y="6217920"/>
+            <a:ext cx="468911" cy="640080"/>
+          </a:xfrm>
+          <a:prstGeom prst="triangle">
+            <a:avLst/>
+          </a:prstGeom>
+          <a:solidFill>
+            <a:srgbClr val="F2B705"/>
+          </a:solidFill>
+          <a:ln/>
+        </p:spPr>
+      </p:sp>
+      <p:sp>
+        <p:nvSpPr>
+          <p:cNvPr id="14" name="Shape 12"/>
+          <p:cNvSpPr/>
+          <p:nvPr/>
+        </p:nvSpPr>
+        <p:spPr>
+          <a:xfrm flipV="1">
+            <a:off x="5626936" y="6217920"/>
+            <a:ext cx="468911" cy="640080"/>
+          </a:xfrm>
+          <a:prstGeom prst="triangle">
+            <a:avLst/>
+          </a:prstGeom>
+          <a:solidFill>
+            <a:srgbClr val="482320"/>
+          </a:solidFill>
+          <a:ln/>
+        </p:spPr>
+      </p:sp>
+      <p:sp>
+        <p:nvSpPr>
+          <p:cNvPr id="15" name="Shape 13"/>
+          <p:cNvSpPr/>
+          <p:nvPr/>
+        </p:nvSpPr>
+        <p:spPr>
+          <a:xfrm>
+            <a:off x="6095848" y="6217920"/>
+            <a:ext cx="468911" cy="640080"/>
+          </a:xfrm>
+          <a:prstGeom prst="triangle">
+            <a:avLst/>
+          </a:prstGeom>
+          <a:solidFill>
+            <a:srgbClr val="F2B705"/>
+          </a:solidFill>
+          <a:ln/>
+        </p:spPr>
+      </p:sp>
+      <p:sp>
+        <p:nvSpPr>
+          <p:cNvPr id="16" name="Shape 14"/>
+          <p:cNvSpPr/>
+          <p:nvPr/>
+        </p:nvSpPr>
+        <p:spPr>
+          <a:xfrm flipV="1">
+            <a:off x="6564759" y="6217920"/>
+            <a:ext cx="468911" cy="640080"/>
+          </a:xfrm>
+          <a:prstGeom prst="triangle">
+            <a:avLst/>
+          </a:prstGeom>
+          <a:solidFill>
+            <a:srgbClr val="482320"/>
+          </a:solidFill>
+          <a:ln/>
+        </p:spPr>
+      </p:sp>
+      <p:sp>
+        <p:nvSpPr>
+          <p:cNvPr id="17" name="Shape 15"/>
+          <p:cNvSpPr/>
+          <p:nvPr/>
+        </p:nvSpPr>
+        <p:spPr>
+          <a:xfrm>
+            <a:off x="7033670" y="6217920"/>
+            <a:ext cx="468911" cy="640080"/>
+          </a:xfrm>
+          <a:prstGeom prst="triangle">
+            <a:avLst/>
+          </a:prstGeom>
+          <a:solidFill>
+            <a:srgbClr val="F2B705"/>
+          </a:solidFill>
+          <a:ln/>
+        </p:spPr>
+      </p:sp>
+      <p:sp>
+        <p:nvSpPr>
+          <p:cNvPr id="18" name="Shape 16"/>
+          <p:cNvSpPr/>
+          <p:nvPr/>
+        </p:nvSpPr>
+        <p:spPr>
+          <a:xfrm flipV="1">
+            <a:off x="7502582" y="6217920"/>
+            <a:ext cx="468911" cy="640080"/>
+          </a:xfrm>
+          <a:prstGeom prst="triangle">
+            <a:avLst/>
+          </a:prstGeom>
+          <a:solidFill>
+            <a:srgbClr val="482320"/>
+          </a:solidFill>
+          <a:ln/>
+        </p:spPr>
+      </p:sp>
+      <p:sp>
+        <p:nvSpPr>
+          <p:cNvPr id="19" name="Shape 17"/>
+          <p:cNvSpPr/>
+          <p:nvPr/>
+        </p:nvSpPr>
+        <p:spPr>
+          <a:xfrm>
+            <a:off x="7971493" y="6217920"/>
+            <a:ext cx="468911" cy="640080"/>
+          </a:xfrm>
+          <a:prstGeom prst="triangle">
+            <a:avLst/>
+          </a:prstGeom>
+          <a:solidFill>
+            <a:srgbClr val="F2B705"/>
+          </a:solidFill>
+          <a:ln/>
+        </p:spPr>
+      </p:sp>
+      <p:sp>
+        <p:nvSpPr>
+          <p:cNvPr id="20" name="Shape 18"/>
+          <p:cNvSpPr/>
+          <p:nvPr/>
+        </p:nvSpPr>
+        <p:spPr>
+          <a:xfrm flipV="1">
+            <a:off x="8440404" y="6217920"/>
+            <a:ext cx="468911" cy="640080"/>
+          </a:xfrm>
+          <a:prstGeom prst="triangle">
+            <a:avLst/>
+          </a:prstGeom>
+          <a:solidFill>
+            <a:srgbClr val="482320"/>
+          </a:solidFill>
+          <a:ln/>
+        </p:spPr>
+      </p:sp>
+      <p:sp>
+        <p:nvSpPr>
+          <p:cNvPr id="21" name="Shape 19"/>
+          <p:cNvSpPr/>
+          <p:nvPr/>
+        </p:nvSpPr>
+        <p:spPr>
+          <a:xfrm>
+            <a:off x="8909316" y="6217920"/>
+            <a:ext cx="468911" cy="640080"/>
+          </a:xfrm>
+          <a:prstGeom prst="triangle">
+            <a:avLst/>
+          </a:prstGeom>
+          <a:solidFill>
+            <a:srgbClr val="F2B705"/>
+          </a:solidFill>
+          <a:ln/>
+        </p:spPr>
+      </p:sp>
+      <p:sp>
+        <p:nvSpPr>
+          <p:cNvPr id="22" name="Shape 20"/>
+          <p:cNvSpPr/>
+          <p:nvPr/>
+        </p:nvSpPr>
+        <p:spPr>
+          <a:xfrm flipV="1">
+            <a:off x="9378227" y="6217920"/>
+            <a:ext cx="468911" cy="640080"/>
+          </a:xfrm>
+          <a:prstGeom prst="triangle">
+            <a:avLst/>
+          </a:prstGeom>
+          <a:solidFill>
+            <a:srgbClr val="482320"/>
+          </a:solidFill>
+          <a:ln/>
+        </p:spPr>
+      </p:sp>
+      <p:sp>
+        <p:nvSpPr>
+          <p:cNvPr id="23" name="Shape 21"/>
+          <p:cNvSpPr/>
+          <p:nvPr/>
+        </p:nvSpPr>
+        <p:spPr>
+          <a:xfrm>
+            <a:off x="9847138" y="6217920"/>
+            <a:ext cx="468911" cy="640080"/>
+          </a:xfrm>
+          <a:prstGeom prst="triangle">
+            <a:avLst/>
+          </a:prstGeom>
+          <a:solidFill>
+            <a:srgbClr val="F2B705"/>
+          </a:solidFill>
+          <a:ln/>
+        </p:spPr>
+      </p:sp>
+      <p:sp>
+        <p:nvSpPr>
+          <p:cNvPr id="24" name="Shape 22"/>
+          <p:cNvSpPr/>
+          <p:nvPr/>
+        </p:nvSpPr>
+        <p:spPr>
+          <a:xfrm flipV="1">
+            <a:off x="10316050" y="6217920"/>
+            <a:ext cx="468911" cy="640080"/>
+          </a:xfrm>
+          <a:prstGeom prst="triangle">
+            <a:avLst/>
+          </a:prstGeom>
+          <a:solidFill>
+            <a:srgbClr val="482320"/>
+          </a:solidFill>
+          <a:ln/>
+        </p:spPr>
+      </p:sp>
+      <p:sp>
+        <p:nvSpPr>
+          <p:cNvPr id="25" name="Shape 23"/>
+          <p:cNvSpPr/>
+          <p:nvPr/>
+        </p:nvSpPr>
+        <p:spPr>
+          <a:xfrm>
+            <a:off x="10784961" y="6217920"/>
+            <a:ext cx="468911" cy="640080"/>
+          </a:xfrm>
+          <a:prstGeom prst="triangle">
+            <a:avLst/>
+          </a:prstGeom>
+          <a:solidFill>
+            <a:srgbClr val="F2B705"/>
+          </a:solidFill>
+          <a:ln/>
+        </p:spPr>
+      </p:sp>
+      <p:sp>
+        <p:nvSpPr>
+          <p:cNvPr id="26" name="Shape 24"/>
+          <p:cNvSpPr/>
+          <p:nvPr/>
+        </p:nvSpPr>
+        <p:spPr>
+          <a:xfrm flipV="1">
+            <a:off x="11253872" y="6217920"/>
+            <a:ext cx="468911" cy="640080"/>
+          </a:xfrm>
+          <a:prstGeom prst="triangle">
+            <a:avLst/>
+          </a:prstGeom>
+          <a:solidFill>
+            <a:srgbClr val="482320"/>
+          </a:solidFill>
+          <a:ln/>
+        </p:spPr>
+      </p:sp>
+      <p:sp>
+        <p:nvSpPr>
+          <p:cNvPr id="27" name="Shape 25"/>
+          <p:cNvSpPr/>
+          <p:nvPr/>
+        </p:nvSpPr>
+        <p:spPr>
+          <a:xfrm>
+            <a:off x="11722784" y="6217920"/>
+            <a:ext cx="468911" cy="640080"/>
+          </a:xfrm>
+          <a:prstGeom prst="triangle">
+            <a:avLst/>
+          </a:prstGeom>
+          <a:solidFill>
+            <a:srgbClr val="F2B705"/>
+          </a:solidFill>
+          <a:ln/>
+        </p:spPr>
+      </p:sp>
+      <p:sp>
+        <p:nvSpPr>
+          <p:cNvPr id="28" name="Text 26"/>
+          <p:cNvSpPr/>
+          <p:nvPr/>
+        </p:nvSpPr>
+        <p:spPr>
+          <a:xfrm>
+            <a:off x="777240" y="685800"/>
+            <a:ext cx="914400" cy="640080"/>
           </a:xfrm>
           <a:prstGeom prst="rect">
             <a:avLst/>
@@ -1537,7 +2355,7 @@
           <a:ln/>
         </p:spPr>
         <p:txBody>
-          <a:bodyPr wrap="square" rtlCol="0" anchor="ctr"/>
+          <a:bodyPr wrap="square" lIns="0" tIns="0" rIns="0" bIns="0" rtlCol="0" anchor="ctr"/>
           <a:lstStyle/>
           <a:p>
             <a:pPr indent="0" marL="0">
@@ -1546,13 +2364,13 @@
             <a:r>
               <a:rPr lang="en-US" sz="3000" b="1" dirty="0">
                 <a:solidFill>
-                  <a:srgbClr val="1E2A33"/>
+                  <a:srgbClr val="F2B705"/>
                 </a:solidFill>
-                <a:latin typeface="Bookman Old Style" pitchFamily="34" charset="0"/>
-                <a:ea typeface="Bookman Old Style" pitchFamily="34" charset="-122"/>
-                <a:cs typeface="Bookman Old Style" pitchFamily="34" charset="-120"/>
+                <a:latin typeface="Arial" pitchFamily="34" charset="0"/>
+                <a:ea typeface="Arial" pitchFamily="34" charset="-122"/>
+                <a:cs typeface="Arial" pitchFamily="34" charset="-120"/>
               </a:rPr>
-              <a:t>What I Built — Edge to Cloud</a:t>
+              <a:t>01</a:t>
             </a:r>
             <a:endParaRPr lang="en-US" sz="3000" dirty="0"/>
           </a:p>
@@ -1560,41 +2378,14 @@
       </p:sp>
       <p:sp>
         <p:nvSpPr>
-          <p:cNvPr id="3" name="Shape 1"/>
-          <p:cNvSpPr/>
-          <p:nvPr/>
-        </p:nvSpPr>
-        <p:spPr>
-          <a:xfrm>
-            <a:off x="640080" y="1554480"/>
-            <a:ext cx="3200400" cy="3383280"/>
-          </a:xfrm>
-          <a:prstGeom prst="roundRect">
-            <a:avLst>
-              <a:gd name="adj" fmla="val 2857"/>
-            </a:avLst>
-          </a:prstGeom>
-          <a:solidFill>
-            <a:srgbClr val="EEF2F4"/>
-          </a:solidFill>
-          <a:ln w="19050">
-            <a:solidFill>
-              <a:srgbClr val="6C8A9A"/>
-            </a:solidFill>
-            <a:prstDash val="solid"/>
-          </a:ln>
-        </p:spPr>
-      </p:sp>
-      <p:sp>
-        <p:nvSpPr>
-          <p:cNvPr id="4" name="Text 2"/>
-          <p:cNvSpPr/>
-          <p:nvPr/>
-        </p:nvSpPr>
-        <p:spPr>
-          <a:xfrm>
-            <a:off x="640080" y="1691640"/>
-            <a:ext cx="3200400" cy="365760"/>
+          <p:cNvPr id="29" name="Text 27"/>
+          <p:cNvSpPr/>
+          <p:nvPr/>
+        </p:nvSpPr>
+        <p:spPr>
+          <a:xfrm>
+            <a:off x="1645920" y="859536"/>
+            <a:ext cx="9768535" cy="274320"/>
           </a:xfrm>
           <a:prstGeom prst="rect">
             <a:avLst/>
@@ -1603,49 +2394,86 @@
           <a:ln/>
         </p:spPr>
         <p:txBody>
-          <a:bodyPr wrap="square" rtlCol="0" anchor="ctr"/>
+          <a:bodyPr wrap="square" lIns="0" tIns="0" rIns="0" bIns="0" rtlCol="0" anchor="ctr"/>
           <a:lstStyle/>
           <a:p>
-            <a:pPr algn="ctr" indent="0" marL="0">
+            <a:pPr indent="0" marL="0">
               <a:buNone/>
             </a:pPr>
             <a:r>
-              <a:rPr lang="en-US" sz="1200" b="1" spc="300" kern="0" dirty="0">
+              <a:rPr lang="en-US" sz="1100" b="1" spc="200" kern="0" dirty="0">
                 <a:solidFill>
-                  <a:srgbClr val="6C8A9A"/>
+                  <a:srgbClr val="8B98A6"/>
                 </a:solidFill>
                 <a:latin typeface="Calibri" pitchFamily="34" charset="0"/>
                 <a:ea typeface="Calibri" pitchFamily="34" charset="-122"/>
                 <a:cs typeface="Calibri" pitchFamily="34" charset="-120"/>
               </a:rPr>
-              <a:t>EDGE</a:t>
+              <a:t>ARCHITECTURE</a:t>
             </a:r>
-            <a:endParaRPr lang="en-US" sz="1200" dirty="0"/>
+            <a:endParaRPr lang="en-US" sz="1100" dirty="0"/>
           </a:p>
         </p:txBody>
       </p:sp>
       <p:sp>
         <p:nvSpPr>
-          <p:cNvPr id="5" name="Shape 3"/>
-          <p:cNvSpPr/>
-          <p:nvPr/>
-        </p:nvSpPr>
-        <p:spPr>
-          <a:xfrm>
-            <a:off x="914400" y="2286000"/>
-            <a:ext cx="2651760" cy="1005840"/>
+          <p:cNvPr id="30" name="Text 28"/>
+          <p:cNvSpPr/>
+          <p:nvPr/>
+        </p:nvSpPr>
+        <p:spPr>
+          <a:xfrm>
+            <a:off x="777240" y="1335024"/>
+            <a:ext cx="10637215" cy="640080"/>
+          </a:xfrm>
+          <a:prstGeom prst="rect">
+            <a:avLst/>
+          </a:prstGeom>
+          <a:noFill/>
+          <a:ln/>
+        </p:spPr>
+        <p:txBody>
+          <a:bodyPr wrap="square" lIns="0" tIns="0" rIns="0" bIns="0" rtlCol="0" anchor="ctr"/>
+          <a:lstStyle/>
+          <a:p>
+            <a:pPr indent="0" marL="0">
+              <a:buNone/>
+            </a:pPr>
+            <a:r>
+              <a:rPr lang="en-US" sz="2300" b="1" dirty="0">
+                <a:solidFill>
+                  <a:srgbClr val="ECE9E2"/>
+                </a:solidFill>
+                <a:latin typeface="Arial" pitchFamily="34" charset="0"/>
+                <a:ea typeface="Arial" pitchFamily="34" charset="-122"/>
+                <a:cs typeface="Arial" pitchFamily="34" charset="-120"/>
+              </a:rPr>
+              <a:t>What I Built — Edge to Cloud</a:t>
+            </a:r>
+            <a:endParaRPr lang="en-US" sz="2300" dirty="0"/>
+          </a:p>
+        </p:txBody>
+      </p:sp>
+      <p:sp>
+        <p:nvSpPr>
+          <p:cNvPr id="31" name="Shape 29"/>
+          <p:cNvSpPr/>
+          <p:nvPr/>
+        </p:nvSpPr>
+        <p:spPr>
+          <a:xfrm>
+            <a:off x="777240" y="2926080"/>
+            <a:ext cx="1391869" cy="1965960"/>
           </a:xfrm>
           <a:prstGeom prst="roundRect">
-            <a:avLst>
-              <a:gd name="adj" fmla="val 7273"/>
-            </a:avLst>
-          </a:prstGeom>
-          <a:solidFill>
-            <a:srgbClr val="FFFFFF"/>
-          </a:solidFill>
-          <a:ln w="15240">
+            <a:avLst/>
+          </a:prstGeom>
+          <a:solidFill>
+            <a:srgbClr val="F2B705"/>
+          </a:solidFill>
+          <a:ln w="12700">
             <a:solidFill>
-              <a:srgbClr val="6C8A9A"/>
+              <a:srgbClr val="F2B705"/>
             </a:solidFill>
             <a:prstDash val="solid"/>
           </a:ln>
@@ -1653,14 +2481,14 @@
       </p:sp>
       <p:sp>
         <p:nvSpPr>
-          <p:cNvPr id="6" name="Text 4"/>
-          <p:cNvSpPr/>
-          <p:nvPr/>
-        </p:nvSpPr>
-        <p:spPr>
-          <a:xfrm>
-            <a:off x="914400" y="2432304"/>
-            <a:ext cx="2651760" cy="365760"/>
+          <p:cNvPr id="32" name="Text 30"/>
+          <p:cNvSpPr/>
+          <p:nvPr/>
+        </p:nvSpPr>
+        <p:spPr>
+          <a:xfrm>
+            <a:off x="923544" y="3108960"/>
+            <a:ext cx="1099261" cy="320040"/>
           </a:xfrm>
           <a:prstGeom prst="rect">
             <a:avLst/>
@@ -1672,34 +2500,76 @@
           <a:bodyPr wrap="square" lIns="0" tIns="0" rIns="0" bIns="0" rtlCol="0" anchor="ctr"/>
           <a:lstStyle/>
           <a:p>
-            <a:pPr algn="ctr" indent="0" marL="0">
+            <a:pPr indent="0" marL="0">
               <a:buNone/>
             </a:pPr>
             <a:r>
-              <a:rPr lang="en-US" sz="1400" b="1" dirty="0">
+              <a:rPr lang="en-US" sz="1100" dirty="0">
                 <a:solidFill>
-                  <a:srgbClr val="1E2A33"/>
+                  <a:srgbClr val="111111"/>
                 </a:solidFill>
-                <a:latin typeface="Calibri" pitchFamily="34" charset="0"/>
-                <a:ea typeface="Calibri" pitchFamily="34" charset="-122"/>
-                <a:cs typeface="Calibri" pitchFamily="34" charset="-120"/>
+                <a:latin typeface="Consolas" pitchFamily="34" charset="0"/>
+                <a:ea typeface="Consolas" pitchFamily="34" charset="-122"/>
+                <a:cs typeface="Consolas" pitchFamily="34" charset="-120"/>
+              </a:rPr>
+              <a:t>01</a:t>
+            </a:r>
+            <a:endParaRPr lang="en-US" sz="1100" dirty="0"/>
+          </a:p>
+        </p:txBody>
+      </p:sp>
+      <p:sp>
+        <p:nvSpPr>
+          <p:cNvPr id="33" name="Text 31"/>
+          <p:cNvSpPr/>
+          <p:nvPr/>
+        </p:nvSpPr>
+        <p:spPr>
+          <a:xfrm>
+            <a:off x="923544" y="3547872"/>
+            <a:ext cx="1099261" cy="868680"/>
+          </a:xfrm>
+          <a:prstGeom prst="rect">
+            <a:avLst/>
+          </a:prstGeom>
+          <a:noFill/>
+          <a:ln/>
+        </p:spPr>
+        <p:txBody>
+          <a:bodyPr wrap="square" lIns="0" tIns="0" rIns="0" bIns="0" rtlCol="0" anchor="t"/>
+          <a:lstStyle/>
+          <a:p>
+            <a:pPr indent="0" marL="0">
+              <a:lnSpc>
+                <a:spcPct val="96000"/>
+              </a:lnSpc>
+              <a:buNone/>
+            </a:pPr>
+            <a:r>
+              <a:rPr lang="en-US" sz="1300" b="1" dirty="0">
+                <a:solidFill>
+                  <a:srgbClr val="111111"/>
+                </a:solidFill>
+                <a:latin typeface="Arial" pitchFamily="34" charset="0"/>
+                <a:ea typeface="Arial" pitchFamily="34" charset="-122"/>
+                <a:cs typeface="Arial" pitchFamily="34" charset="-120"/>
               </a:rPr>
               <a:t>Machine sensors</a:t>
             </a:r>
-            <a:endParaRPr lang="en-US" sz="1400" dirty="0"/>
+            <a:endParaRPr lang="en-US" sz="1300" dirty="0"/>
           </a:p>
         </p:txBody>
       </p:sp>
       <p:sp>
         <p:nvSpPr>
-          <p:cNvPr id="7" name="Text 5"/>
-          <p:cNvSpPr/>
-          <p:nvPr/>
-        </p:nvSpPr>
-        <p:spPr>
-          <a:xfrm>
-            <a:off x="914400" y="2816352"/>
-            <a:ext cx="2651760" cy="365760"/>
+          <p:cNvPr id="34" name="Text 32"/>
+          <p:cNvSpPr/>
+          <p:nvPr/>
+        </p:nvSpPr>
+        <p:spPr>
+          <a:xfrm>
+            <a:off x="923544" y="4407408"/>
+            <a:ext cx="1099261" cy="365760"/>
           </a:xfrm>
           <a:prstGeom prst="rect">
             <a:avLst/>
@@ -1711,13 +2581,13 @@
           <a:bodyPr wrap="square" lIns="0" tIns="0" rIns="0" bIns="0" rtlCol="0" anchor="ctr"/>
           <a:lstStyle/>
           <a:p>
-            <a:pPr algn="ctr" indent="0" marL="0">
+            <a:pPr indent="0" marL="0">
               <a:buNone/>
             </a:pPr>
             <a:r>
-              <a:rPr lang="en-US" sz="1000" dirty="0">
+              <a:rPr lang="en-US" sz="900" dirty="0">
                 <a:solidFill>
-                  <a:srgbClr val="5F6E78"/>
+                  <a:srgbClr val="111111"/>
                 </a:solidFill>
                 <a:latin typeface="Calibri" pitchFamily="34" charset="0"/>
                 <a:ea typeface="Calibri" pitchFamily="34" charset="-122"/>
@@ -1725,32 +2595,50 @@
               </a:rPr>
               <a:t>10 units · 2 lines</a:t>
             </a:r>
-            <a:endParaRPr lang="en-US" sz="1000" dirty="0"/>
+            <a:endParaRPr lang="en-US" sz="900" dirty="0"/>
           </a:p>
         </p:txBody>
       </p:sp>
       <p:sp>
         <p:nvSpPr>
-          <p:cNvPr id="8" name="Shape 6"/>
-          <p:cNvSpPr/>
-          <p:nvPr/>
-        </p:nvSpPr>
-        <p:spPr>
-          <a:xfrm>
-            <a:off x="914400" y="3520440"/>
-            <a:ext cx="2651760" cy="1005840"/>
+          <p:cNvPr id="35" name="Shape 33"/>
+          <p:cNvSpPr/>
+          <p:nvPr/>
+        </p:nvSpPr>
+        <p:spPr>
+          <a:xfrm>
+            <a:off x="2242261" y="3799332"/>
+            <a:ext cx="310896" cy="219456"/>
+          </a:xfrm>
+          <a:prstGeom prst="rightArrow">
+            <a:avLst/>
+          </a:prstGeom>
+          <a:solidFill>
+            <a:srgbClr val="8B98A6"/>
+          </a:solidFill>
+          <a:ln/>
+        </p:spPr>
+      </p:sp>
+      <p:sp>
+        <p:nvSpPr>
+          <p:cNvPr id="36" name="Shape 34"/>
+          <p:cNvSpPr/>
+          <p:nvPr/>
+        </p:nvSpPr>
+        <p:spPr>
+          <a:xfrm>
+            <a:off x="2626309" y="2926080"/>
+            <a:ext cx="1391869" cy="1965960"/>
           </a:xfrm>
           <a:prstGeom prst="roundRect">
-            <a:avLst>
-              <a:gd name="adj" fmla="val 7273"/>
-            </a:avLst>
-          </a:prstGeom>
-          <a:solidFill>
-            <a:srgbClr val="FFFFFF"/>
-          </a:solidFill>
-          <a:ln w="15240">
+            <a:avLst/>
+          </a:prstGeom>
+          <a:solidFill>
+            <a:srgbClr val="F2B705"/>
+          </a:solidFill>
+          <a:ln w="12700">
             <a:solidFill>
-              <a:srgbClr val="6C8A9A"/>
+              <a:srgbClr val="F2B705"/>
             </a:solidFill>
             <a:prstDash val="solid"/>
           </a:ln>
@@ -1758,14 +2646,14 @@
       </p:sp>
       <p:sp>
         <p:nvSpPr>
-          <p:cNvPr id="9" name="Text 7"/>
-          <p:cNvSpPr/>
-          <p:nvPr/>
-        </p:nvSpPr>
-        <p:spPr>
-          <a:xfrm>
-            <a:off x="914400" y="3666744"/>
-            <a:ext cx="2651760" cy="365760"/>
+          <p:cNvPr id="37" name="Text 35"/>
+          <p:cNvSpPr/>
+          <p:nvPr/>
+        </p:nvSpPr>
+        <p:spPr>
+          <a:xfrm>
+            <a:off x="2772613" y="3108960"/>
+            <a:ext cx="1099261" cy="320040"/>
           </a:xfrm>
           <a:prstGeom prst="rect">
             <a:avLst/>
@@ -1777,34 +2665,76 @@
           <a:bodyPr wrap="square" lIns="0" tIns="0" rIns="0" bIns="0" rtlCol="0" anchor="ctr"/>
           <a:lstStyle/>
           <a:p>
-            <a:pPr algn="ctr" indent="0" marL="0">
+            <a:pPr indent="0" marL="0">
               <a:buNone/>
             </a:pPr>
             <a:r>
-              <a:rPr lang="en-US" sz="1400" b="1" dirty="0">
+              <a:rPr lang="en-US" sz="1100" dirty="0">
                 <a:solidFill>
-                  <a:srgbClr val="1E2A33"/>
+                  <a:srgbClr val="111111"/>
                 </a:solidFill>
-                <a:latin typeface="Calibri" pitchFamily="34" charset="0"/>
-                <a:ea typeface="Calibri" pitchFamily="34" charset="-122"/>
-                <a:cs typeface="Calibri" pitchFamily="34" charset="-120"/>
+                <a:latin typeface="Consolas" pitchFamily="34" charset="0"/>
+                <a:ea typeface="Consolas" pitchFamily="34" charset="-122"/>
+                <a:cs typeface="Consolas" pitchFamily="34" charset="-120"/>
+              </a:rPr>
+              <a:t>02</a:t>
+            </a:r>
+            <a:endParaRPr lang="en-US" sz="1100" dirty="0"/>
+          </a:p>
+        </p:txBody>
+      </p:sp>
+      <p:sp>
+        <p:nvSpPr>
+          <p:cNvPr id="38" name="Text 36"/>
+          <p:cNvSpPr/>
+          <p:nvPr/>
+        </p:nvSpPr>
+        <p:spPr>
+          <a:xfrm>
+            <a:off x="2772613" y="3547872"/>
+            <a:ext cx="1099261" cy="868680"/>
+          </a:xfrm>
+          <a:prstGeom prst="rect">
+            <a:avLst/>
+          </a:prstGeom>
+          <a:noFill/>
+          <a:ln/>
+        </p:spPr>
+        <p:txBody>
+          <a:bodyPr wrap="square" lIns="0" tIns="0" rIns="0" bIns="0" rtlCol="0" anchor="t"/>
+          <a:lstStyle/>
+          <a:p>
+            <a:pPr indent="0" marL="0">
+              <a:lnSpc>
+                <a:spcPct val="96000"/>
+              </a:lnSpc>
+              <a:buNone/>
+            </a:pPr>
+            <a:r>
+              <a:rPr lang="en-US" sz="1300" b="1" dirty="0">
+                <a:solidFill>
+                  <a:srgbClr val="111111"/>
+                </a:solidFill>
+                <a:latin typeface="Arial" pitchFamily="34" charset="0"/>
+                <a:ea typeface="Arial" pitchFamily="34" charset="-122"/>
+                <a:cs typeface="Arial" pitchFamily="34" charset="-120"/>
               </a:rPr>
               <a:t>Fog node</a:t>
             </a:r>
-            <a:endParaRPr lang="en-US" sz="1400" dirty="0"/>
+            <a:endParaRPr lang="en-US" sz="1300" dirty="0"/>
           </a:p>
         </p:txBody>
       </p:sp>
       <p:sp>
         <p:nvSpPr>
-          <p:cNvPr id="10" name="Text 8"/>
-          <p:cNvSpPr/>
-          <p:nvPr/>
-        </p:nvSpPr>
-        <p:spPr>
-          <a:xfrm>
-            <a:off x="914400" y="4050792"/>
-            <a:ext cx="2651760" cy="365760"/>
+          <p:cNvPr id="39" name="Text 37"/>
+          <p:cNvSpPr/>
+          <p:nvPr/>
+        </p:nvSpPr>
+        <p:spPr>
+          <a:xfrm>
+            <a:off x="2772613" y="4407408"/>
+            <a:ext cx="1099261" cy="365760"/>
           </a:xfrm>
           <a:prstGeom prst="rect">
             <a:avLst/>
@@ -1816,13 +2746,13 @@
           <a:bodyPr wrap="square" lIns="0" tIns="0" rIns="0" bIns="0" rtlCol="0" anchor="ctr"/>
           <a:lstStyle/>
           <a:p>
-            <a:pPr algn="ctr" indent="0" marL="0">
+            <a:pPr indent="0" marL="0">
               <a:buNone/>
             </a:pPr>
             <a:r>
-              <a:rPr lang="en-US" sz="1000" dirty="0">
+              <a:rPr lang="en-US" sz="900" dirty="0">
                 <a:solidFill>
-                  <a:srgbClr val="5F6E78"/>
+                  <a:srgbClr val="111111"/>
                 </a:solidFill>
                 <a:latin typeface="Calibri" pitchFamily="34" charset="0"/>
                 <a:ea typeface="Calibri" pitchFamily="34" charset="-122"/>
@@ -1830,56 +2760,50 @@
               </a:rPr>
               <a:t>10 s windows · edge alarms</a:t>
             </a:r>
-            <a:endParaRPr lang="en-US" sz="1000" dirty="0"/>
+            <a:endParaRPr lang="en-US" sz="900" dirty="0"/>
           </a:p>
         </p:txBody>
       </p:sp>
       <p:sp>
         <p:nvSpPr>
-          <p:cNvPr id="11" name="Shape 9"/>
-          <p:cNvSpPr/>
-          <p:nvPr/>
-        </p:nvSpPr>
-        <p:spPr>
-          <a:xfrm>
-            <a:off x="3886200" y="3246120"/>
-            <a:ext cx="502920" cy="0"/>
-          </a:xfrm>
-          <a:prstGeom prst="line">
-            <a:avLst/>
-          </a:prstGeom>
-          <a:noFill/>
-          <a:ln w="31750">
+          <p:cNvPr id="40" name="Shape 38"/>
+          <p:cNvSpPr/>
+          <p:nvPr/>
+        </p:nvSpPr>
+        <p:spPr>
+          <a:xfrm>
+            <a:off x="4091330" y="3799332"/>
+            <a:ext cx="310896" cy="219456"/>
+          </a:xfrm>
+          <a:prstGeom prst="rightArrow">
+            <a:avLst/>
+          </a:prstGeom>
+          <a:solidFill>
+            <a:srgbClr val="8B98A6"/>
+          </a:solidFill>
+          <a:ln/>
+        </p:spPr>
+      </p:sp>
+      <p:sp>
+        <p:nvSpPr>
+          <p:cNvPr id="41" name="Shape 39"/>
+          <p:cNvSpPr/>
+          <p:nvPr/>
+        </p:nvSpPr>
+        <p:spPr>
+          <a:xfrm>
+            <a:off x="4475378" y="2926080"/>
+            <a:ext cx="1391869" cy="1965960"/>
+          </a:xfrm>
+          <a:prstGeom prst="roundRect">
+            <a:avLst/>
+          </a:prstGeom>
+          <a:solidFill>
+            <a:srgbClr val="24262B"/>
+          </a:solidFill>
+          <a:ln w="12700">
             <a:solidFill>
-              <a:srgbClr val="37474F"/>
-            </a:solidFill>
-            <a:prstDash val="solid"/>
-            <a:tailEnd type="triangle"/>
-          </a:ln>
-        </p:spPr>
-      </p:sp>
-      <p:sp>
-        <p:nvSpPr>
-          <p:cNvPr id="12" name="Shape 10"/>
-          <p:cNvSpPr/>
-          <p:nvPr/>
-        </p:nvSpPr>
-        <p:spPr>
-          <a:xfrm>
-            <a:off x="4572000" y="1554480"/>
-            <a:ext cx="6949440" cy="3383280"/>
-          </a:xfrm>
-          <a:prstGeom prst="roundRect">
-            <a:avLst>
-              <a:gd name="adj" fmla="val 2703"/>
-            </a:avLst>
-          </a:prstGeom>
-          <a:solidFill>
-            <a:srgbClr val="EEF2F4"/>
-          </a:solidFill>
-          <a:ln w="19050">
-            <a:solidFill>
-              <a:srgbClr val="37474F"/>
+              <a:srgbClr val="383A3F"/>
             </a:solidFill>
             <a:prstDash val="solid"/>
           </a:ln>
@@ -1887,14 +2811,14 @@
       </p:sp>
       <p:sp>
         <p:nvSpPr>
-          <p:cNvPr id="13" name="Text 11"/>
-          <p:cNvSpPr/>
-          <p:nvPr/>
-        </p:nvSpPr>
-        <p:spPr>
-          <a:xfrm>
-            <a:off x="4572000" y="1691640"/>
-            <a:ext cx="6949440" cy="365760"/>
+          <p:cNvPr id="42" name="Text 40"/>
+          <p:cNvSpPr/>
+          <p:nvPr/>
+        </p:nvSpPr>
+        <p:spPr>
+          <a:xfrm>
+            <a:off x="4621682" y="3108960"/>
+            <a:ext cx="1099261" cy="320040"/>
           </a:xfrm>
           <a:prstGeom prst="rect">
             <a:avLst/>
@@ -1903,64 +2827,79 @@
           <a:ln/>
         </p:spPr>
         <p:txBody>
-          <a:bodyPr wrap="square" rtlCol="0" anchor="ctr"/>
+          <a:bodyPr wrap="square" lIns="0" tIns="0" rIns="0" bIns="0" rtlCol="0" anchor="ctr"/>
           <a:lstStyle/>
           <a:p>
-            <a:pPr algn="ctr" indent="0" marL="0">
+            <a:pPr indent="0" marL="0">
               <a:buNone/>
             </a:pPr>
             <a:r>
-              <a:rPr lang="en-US" sz="1200" b="1" spc="200" kern="0" dirty="0">
+              <a:rPr lang="en-US" sz="1100" dirty="0">
                 <a:solidFill>
-                  <a:srgbClr val="37474F"/>
+                  <a:srgbClr val="F2B705"/>
                 </a:solidFill>
-                <a:latin typeface="Calibri" pitchFamily="34" charset="0"/>
-                <a:ea typeface="Calibri" pitchFamily="34" charset="-122"/>
-                <a:cs typeface="Calibri" pitchFamily="34" charset="-120"/>
+                <a:latin typeface="Consolas" pitchFamily="34" charset="0"/>
+                <a:ea typeface="Consolas" pitchFamily="34" charset="-122"/>
+                <a:cs typeface="Consolas" pitchFamily="34" charset="-120"/>
               </a:rPr>
-              <a:t>CLOUD (serverless)</a:t>
+              <a:t>03</a:t>
             </a:r>
-            <a:endParaRPr lang="en-US" sz="1200" dirty="0"/>
+            <a:endParaRPr lang="en-US" sz="1100" dirty="0"/>
           </a:p>
         </p:txBody>
       </p:sp>
       <p:sp>
         <p:nvSpPr>
-          <p:cNvPr id="14" name="Shape 12"/>
-          <p:cNvSpPr/>
-          <p:nvPr/>
-        </p:nvSpPr>
-        <p:spPr>
-          <a:xfrm>
-            <a:off x="4846320" y="2651760"/>
-            <a:ext cx="1463040" cy="1371600"/>
-          </a:xfrm>
-          <a:prstGeom prst="roundRect">
-            <a:avLst>
-              <a:gd name="adj" fmla="val 5333"/>
-            </a:avLst>
-          </a:prstGeom>
-          <a:solidFill>
-            <a:srgbClr val="FFFFFF"/>
-          </a:solidFill>
-          <a:ln w="15240">
-            <a:solidFill>
-              <a:srgbClr val="37474F"/>
-            </a:solidFill>
-            <a:prstDash val="solid"/>
-          </a:ln>
-        </p:spPr>
-      </p:sp>
-      <p:sp>
-        <p:nvSpPr>
-          <p:cNvPr id="15" name="Text 13"/>
-          <p:cNvSpPr/>
-          <p:nvPr/>
-        </p:nvSpPr>
-        <p:spPr>
-          <a:xfrm>
-            <a:off x="4800600" y="2907792"/>
-            <a:ext cx="1554480" cy="457200"/>
+          <p:cNvPr id="43" name="Text 41"/>
+          <p:cNvSpPr/>
+          <p:nvPr/>
+        </p:nvSpPr>
+        <p:spPr>
+          <a:xfrm>
+            <a:off x="4621682" y="3547872"/>
+            <a:ext cx="1099261" cy="868680"/>
+          </a:xfrm>
+          <a:prstGeom prst="rect">
+            <a:avLst/>
+          </a:prstGeom>
+          <a:noFill/>
+          <a:ln/>
+        </p:spPr>
+        <p:txBody>
+          <a:bodyPr wrap="square" lIns="0" tIns="0" rIns="0" bIns="0" rtlCol="0" anchor="t"/>
+          <a:lstStyle/>
+          <a:p>
+            <a:pPr indent="0" marL="0">
+              <a:lnSpc>
+                <a:spcPct val="96000"/>
+              </a:lnSpc>
+              <a:buNone/>
+            </a:pPr>
+            <a:r>
+              <a:rPr lang="en-US" sz="1300" b="1" dirty="0">
+                <a:solidFill>
+                  <a:srgbClr val="ECE9E2"/>
+                </a:solidFill>
+                <a:latin typeface="Arial" pitchFamily="34" charset="0"/>
+                <a:ea typeface="Arial" pitchFamily="34" charset="-122"/>
+                <a:cs typeface="Arial" pitchFamily="34" charset="-120"/>
+              </a:rPr>
+              <a:t>Amazon SQS</a:t>
+            </a:r>
+            <a:endParaRPr lang="en-US" sz="1300" dirty="0"/>
+          </a:p>
+        </p:txBody>
+      </p:sp>
+      <p:sp>
+        <p:nvSpPr>
+          <p:cNvPr id="44" name="Text 42"/>
+          <p:cNvSpPr/>
+          <p:nvPr/>
+        </p:nvSpPr>
+        <p:spPr>
+          <a:xfrm>
+            <a:off x="4621682" y="4407408"/>
+            <a:ext cx="1099261" cy="365760"/>
           </a:xfrm>
           <a:prstGeom prst="rect">
             <a:avLst/>
@@ -1972,52 +2911,13 @@
           <a:bodyPr wrap="square" lIns="0" tIns="0" rIns="0" bIns="0" rtlCol="0" anchor="ctr"/>
           <a:lstStyle/>
           <a:p>
-            <a:pPr algn="ctr" indent="0" marL="0">
-              <a:buNone/>
-            </a:pPr>
-            <a:r>
-              <a:rPr lang="en-US" sz="1250" b="1" dirty="0">
-                <a:solidFill>
-                  <a:srgbClr val="1E2A33"/>
-                </a:solidFill>
-                <a:latin typeface="Calibri" pitchFamily="34" charset="0"/>
-                <a:ea typeface="Calibri" pitchFamily="34" charset="-122"/>
-                <a:cs typeface="Calibri" pitchFamily="34" charset="-120"/>
-              </a:rPr>
-              <a:t>Amazon SQS</a:t>
-            </a:r>
-            <a:endParaRPr lang="en-US" sz="1250" dirty="0"/>
-          </a:p>
-        </p:txBody>
-      </p:sp>
-      <p:sp>
-        <p:nvSpPr>
-          <p:cNvPr id="16" name="Text 14"/>
-          <p:cNvSpPr/>
-          <p:nvPr/>
-        </p:nvSpPr>
-        <p:spPr>
-          <a:xfrm>
-            <a:off x="4828032" y="3401568"/>
-            <a:ext cx="1499616" cy="457200"/>
-          </a:xfrm>
-          <a:prstGeom prst="rect">
-            <a:avLst/>
-          </a:prstGeom>
-          <a:noFill/>
-          <a:ln/>
-        </p:spPr>
-        <p:txBody>
-          <a:bodyPr wrap="square" lIns="0" tIns="0" rIns="0" bIns="0" rtlCol="0" anchor="ctr"/>
-          <a:lstStyle/>
-          <a:p>
-            <a:pPr algn="ctr" indent="0" marL="0">
+            <a:pPr indent="0" marL="0">
               <a:buNone/>
             </a:pPr>
             <a:r>
               <a:rPr lang="en-US" sz="900" dirty="0">
                 <a:solidFill>
-                  <a:srgbClr val="5F6E78"/>
+                  <a:srgbClr val="8B98A6"/>
                 </a:solidFill>
                 <a:latin typeface="Calibri" pitchFamily="34" charset="0"/>
                 <a:ea typeface="Calibri" pitchFamily="34" charset="-122"/>
@@ -2031,50 +2931,44 @@
       </p:sp>
       <p:sp>
         <p:nvSpPr>
-          <p:cNvPr id="17" name="Shape 15"/>
-          <p:cNvSpPr/>
-          <p:nvPr/>
-        </p:nvSpPr>
-        <p:spPr>
-          <a:xfrm>
-            <a:off x="6318504" y="3337560"/>
-            <a:ext cx="164592" cy="0"/>
-          </a:xfrm>
-          <a:prstGeom prst="line">
-            <a:avLst/>
-          </a:prstGeom>
-          <a:noFill/>
-          <a:ln w="20320">
+          <p:cNvPr id="45" name="Shape 43"/>
+          <p:cNvSpPr/>
+          <p:nvPr/>
+        </p:nvSpPr>
+        <p:spPr>
+          <a:xfrm>
+            <a:off x="5940400" y="3799332"/>
+            <a:ext cx="310896" cy="219456"/>
+          </a:xfrm>
+          <a:prstGeom prst="rightArrow">
+            <a:avLst/>
+          </a:prstGeom>
+          <a:solidFill>
+            <a:srgbClr val="8B98A6"/>
+          </a:solidFill>
+          <a:ln/>
+        </p:spPr>
+      </p:sp>
+      <p:sp>
+        <p:nvSpPr>
+          <p:cNvPr id="46" name="Shape 44"/>
+          <p:cNvSpPr/>
+          <p:nvPr/>
+        </p:nvSpPr>
+        <p:spPr>
+          <a:xfrm>
+            <a:off x="6324448" y="2926080"/>
+            <a:ext cx="1391869" cy="1965960"/>
+          </a:xfrm>
+          <a:prstGeom prst="roundRect">
+            <a:avLst/>
+          </a:prstGeom>
+          <a:solidFill>
+            <a:srgbClr val="24262B"/>
+          </a:solidFill>
+          <a:ln w="12700">
             <a:solidFill>
-              <a:srgbClr val="6C8A9A"/>
-            </a:solidFill>
-            <a:prstDash val="solid"/>
-            <a:tailEnd type="triangle"/>
-          </a:ln>
-        </p:spPr>
-      </p:sp>
-      <p:sp>
-        <p:nvSpPr>
-          <p:cNvPr id="18" name="Shape 16"/>
-          <p:cNvSpPr/>
-          <p:nvPr/>
-        </p:nvSpPr>
-        <p:spPr>
-          <a:xfrm>
-            <a:off x="6492240" y="2651760"/>
-            <a:ext cx="1463040" cy="1371600"/>
-          </a:xfrm>
-          <a:prstGeom prst="roundRect">
-            <a:avLst>
-              <a:gd name="adj" fmla="val 5333"/>
-            </a:avLst>
-          </a:prstGeom>
-          <a:solidFill>
-            <a:srgbClr val="FFFFFF"/>
-          </a:solidFill>
-          <a:ln w="15240">
-            <a:solidFill>
-              <a:srgbClr val="37474F"/>
+              <a:srgbClr val="383A3F"/>
             </a:solidFill>
             <a:prstDash val="solid"/>
           </a:ln>
@@ -2082,14 +2976,14 @@
       </p:sp>
       <p:sp>
         <p:nvSpPr>
-          <p:cNvPr id="19" name="Text 17"/>
-          <p:cNvSpPr/>
-          <p:nvPr/>
-        </p:nvSpPr>
-        <p:spPr>
-          <a:xfrm>
-            <a:off x="6446520" y="2907792"/>
-            <a:ext cx="1554480" cy="457200"/>
+          <p:cNvPr id="47" name="Text 45"/>
+          <p:cNvSpPr/>
+          <p:nvPr/>
+        </p:nvSpPr>
+        <p:spPr>
+          <a:xfrm>
+            <a:off x="6470752" y="3108960"/>
+            <a:ext cx="1099261" cy="320040"/>
           </a:xfrm>
           <a:prstGeom prst="rect">
             <a:avLst/>
@@ -2101,34 +2995,76 @@
           <a:bodyPr wrap="square" lIns="0" tIns="0" rIns="0" bIns="0" rtlCol="0" anchor="ctr"/>
           <a:lstStyle/>
           <a:p>
-            <a:pPr algn="ctr" indent="0" marL="0">
+            <a:pPr indent="0" marL="0">
               <a:buNone/>
             </a:pPr>
             <a:r>
-              <a:rPr lang="en-US" sz="1250" b="1" dirty="0">
+              <a:rPr lang="en-US" sz="1100" dirty="0">
                 <a:solidFill>
-                  <a:srgbClr val="1E2A33"/>
+                  <a:srgbClr val="F2B705"/>
                 </a:solidFill>
-                <a:latin typeface="Calibri" pitchFamily="34" charset="0"/>
-                <a:ea typeface="Calibri" pitchFamily="34" charset="-122"/>
-                <a:cs typeface="Calibri" pitchFamily="34" charset="-120"/>
+                <a:latin typeface="Consolas" pitchFamily="34" charset="0"/>
+                <a:ea typeface="Consolas" pitchFamily="34" charset="-122"/>
+                <a:cs typeface="Consolas" pitchFamily="34" charset="-120"/>
+              </a:rPr>
+              <a:t>04</a:t>
+            </a:r>
+            <a:endParaRPr lang="en-US" sz="1100" dirty="0"/>
+          </a:p>
+        </p:txBody>
+      </p:sp>
+      <p:sp>
+        <p:nvSpPr>
+          <p:cNvPr id="48" name="Text 46"/>
+          <p:cNvSpPr/>
+          <p:nvPr/>
+        </p:nvSpPr>
+        <p:spPr>
+          <a:xfrm>
+            <a:off x="6470752" y="3547872"/>
+            <a:ext cx="1099261" cy="868680"/>
+          </a:xfrm>
+          <a:prstGeom prst="rect">
+            <a:avLst/>
+          </a:prstGeom>
+          <a:noFill/>
+          <a:ln/>
+        </p:spPr>
+        <p:txBody>
+          <a:bodyPr wrap="square" lIns="0" tIns="0" rIns="0" bIns="0" rtlCol="0" anchor="t"/>
+          <a:lstStyle/>
+          <a:p>
+            <a:pPr indent="0" marL="0">
+              <a:lnSpc>
+                <a:spcPct val="96000"/>
+              </a:lnSpc>
+              <a:buNone/>
+            </a:pPr>
+            <a:r>
+              <a:rPr lang="en-US" sz="1300" b="1" dirty="0">
+                <a:solidFill>
+                  <a:srgbClr val="ECE9E2"/>
+                </a:solidFill>
+                <a:latin typeface="Arial" pitchFamily="34" charset="0"/>
+                <a:ea typeface="Arial" pitchFamily="34" charset="-122"/>
+                <a:cs typeface="Arial" pitchFamily="34" charset="-120"/>
               </a:rPr>
               <a:t>AWS Lambda</a:t>
             </a:r>
-            <a:endParaRPr lang="en-US" sz="1250" dirty="0"/>
+            <a:endParaRPr lang="en-US" sz="1300" dirty="0"/>
           </a:p>
         </p:txBody>
       </p:sp>
       <p:sp>
         <p:nvSpPr>
-          <p:cNvPr id="20" name="Text 18"/>
-          <p:cNvSpPr/>
-          <p:nvPr/>
-        </p:nvSpPr>
-        <p:spPr>
-          <a:xfrm>
-            <a:off x="6473952" y="3401568"/>
-            <a:ext cx="1499616" cy="457200"/>
+          <p:cNvPr id="49" name="Text 47"/>
+          <p:cNvSpPr/>
+          <p:nvPr/>
+        </p:nvSpPr>
+        <p:spPr>
+          <a:xfrm>
+            <a:off x="6470752" y="4407408"/>
+            <a:ext cx="1099261" cy="365760"/>
           </a:xfrm>
           <a:prstGeom prst="rect">
             <a:avLst/>
@@ -2140,13 +3076,13 @@
           <a:bodyPr wrap="square" lIns="0" tIns="0" rIns="0" bIns="0" rtlCol="0" anchor="ctr"/>
           <a:lstStyle/>
           <a:p>
-            <a:pPr algn="ctr" indent="0" marL="0">
+            <a:pPr indent="0" marL="0">
               <a:buNone/>
             </a:pPr>
             <a:r>
               <a:rPr lang="en-US" sz="900" dirty="0">
                 <a:solidFill>
-                  <a:srgbClr val="5F6E78"/>
+                  <a:srgbClr val="8B98A6"/>
                 </a:solidFill>
                 <a:latin typeface="Calibri" pitchFamily="34" charset="0"/>
                 <a:ea typeface="Calibri" pitchFamily="34" charset="-122"/>
@@ -2160,50 +3096,44 @@
       </p:sp>
       <p:sp>
         <p:nvSpPr>
-          <p:cNvPr id="21" name="Shape 19"/>
-          <p:cNvSpPr/>
-          <p:nvPr/>
-        </p:nvSpPr>
-        <p:spPr>
-          <a:xfrm>
-            <a:off x="7964424" y="3337560"/>
-            <a:ext cx="164592" cy="0"/>
-          </a:xfrm>
-          <a:prstGeom prst="line">
-            <a:avLst/>
-          </a:prstGeom>
-          <a:noFill/>
-          <a:ln w="20320">
+          <p:cNvPr id="50" name="Shape 48"/>
+          <p:cNvSpPr/>
+          <p:nvPr/>
+        </p:nvSpPr>
+        <p:spPr>
+          <a:xfrm>
+            <a:off x="7789469" y="3799332"/>
+            <a:ext cx="310896" cy="219456"/>
+          </a:xfrm>
+          <a:prstGeom prst="rightArrow">
+            <a:avLst/>
+          </a:prstGeom>
+          <a:solidFill>
+            <a:srgbClr val="8B98A6"/>
+          </a:solidFill>
+          <a:ln/>
+        </p:spPr>
+      </p:sp>
+      <p:sp>
+        <p:nvSpPr>
+          <p:cNvPr id="51" name="Shape 49"/>
+          <p:cNvSpPr/>
+          <p:nvPr/>
+        </p:nvSpPr>
+        <p:spPr>
+          <a:xfrm>
+            <a:off x="8173517" y="2926080"/>
+            <a:ext cx="1391869" cy="1965960"/>
+          </a:xfrm>
+          <a:prstGeom prst="roundRect">
+            <a:avLst/>
+          </a:prstGeom>
+          <a:solidFill>
+            <a:srgbClr val="24262B"/>
+          </a:solidFill>
+          <a:ln w="12700">
             <a:solidFill>
-              <a:srgbClr val="6C8A9A"/>
-            </a:solidFill>
-            <a:prstDash val="solid"/>
-            <a:tailEnd type="triangle"/>
-          </a:ln>
-        </p:spPr>
-      </p:sp>
-      <p:sp>
-        <p:nvSpPr>
-          <p:cNvPr id="22" name="Shape 20"/>
-          <p:cNvSpPr/>
-          <p:nvPr/>
-        </p:nvSpPr>
-        <p:spPr>
-          <a:xfrm>
-            <a:off x="8138160" y="2651760"/>
-            <a:ext cx="1463040" cy="1371600"/>
-          </a:xfrm>
-          <a:prstGeom prst="roundRect">
-            <a:avLst>
-              <a:gd name="adj" fmla="val 5333"/>
-            </a:avLst>
-          </a:prstGeom>
-          <a:solidFill>
-            <a:srgbClr val="FFFFFF"/>
-          </a:solidFill>
-          <a:ln w="15240">
-            <a:solidFill>
-              <a:srgbClr val="37474F"/>
+              <a:srgbClr val="383A3F"/>
             </a:solidFill>
             <a:prstDash val="solid"/>
           </a:ln>
@@ -2211,14 +3141,14 @@
       </p:sp>
       <p:sp>
         <p:nvSpPr>
-          <p:cNvPr id="23" name="Text 21"/>
-          <p:cNvSpPr/>
-          <p:nvPr/>
-        </p:nvSpPr>
-        <p:spPr>
-          <a:xfrm>
-            <a:off x="8092440" y="2907792"/>
-            <a:ext cx="1554480" cy="457200"/>
+          <p:cNvPr id="52" name="Text 50"/>
+          <p:cNvSpPr/>
+          <p:nvPr/>
+        </p:nvSpPr>
+        <p:spPr>
+          <a:xfrm>
+            <a:off x="8319821" y="3108960"/>
+            <a:ext cx="1099261" cy="320040"/>
           </a:xfrm>
           <a:prstGeom prst="rect">
             <a:avLst/>
@@ -2230,34 +3160,76 @@
           <a:bodyPr wrap="square" lIns="0" tIns="0" rIns="0" bIns="0" rtlCol="0" anchor="ctr"/>
           <a:lstStyle/>
           <a:p>
-            <a:pPr algn="ctr" indent="0" marL="0">
+            <a:pPr indent="0" marL="0">
               <a:buNone/>
             </a:pPr>
             <a:r>
-              <a:rPr lang="en-US" sz="1250" b="1" dirty="0">
+              <a:rPr lang="en-US" sz="1100" dirty="0">
                 <a:solidFill>
-                  <a:srgbClr val="1E2A33"/>
+                  <a:srgbClr val="F2B705"/>
                 </a:solidFill>
-                <a:latin typeface="Calibri" pitchFamily="34" charset="0"/>
-                <a:ea typeface="Calibri" pitchFamily="34" charset="-122"/>
-                <a:cs typeface="Calibri" pitchFamily="34" charset="-120"/>
+                <a:latin typeface="Consolas" pitchFamily="34" charset="0"/>
+                <a:ea typeface="Consolas" pitchFamily="34" charset="-122"/>
+                <a:cs typeface="Consolas" pitchFamily="34" charset="-120"/>
+              </a:rPr>
+              <a:t>05</a:t>
+            </a:r>
+            <a:endParaRPr lang="en-US" sz="1100" dirty="0"/>
+          </a:p>
+        </p:txBody>
+      </p:sp>
+      <p:sp>
+        <p:nvSpPr>
+          <p:cNvPr id="53" name="Text 51"/>
+          <p:cNvSpPr/>
+          <p:nvPr/>
+        </p:nvSpPr>
+        <p:spPr>
+          <a:xfrm>
+            <a:off x="8319821" y="3547872"/>
+            <a:ext cx="1099261" cy="868680"/>
+          </a:xfrm>
+          <a:prstGeom prst="rect">
+            <a:avLst/>
+          </a:prstGeom>
+          <a:noFill/>
+          <a:ln/>
+        </p:spPr>
+        <p:txBody>
+          <a:bodyPr wrap="square" lIns="0" tIns="0" rIns="0" bIns="0" rtlCol="0" anchor="t"/>
+          <a:lstStyle/>
+          <a:p>
+            <a:pPr indent="0" marL="0">
+              <a:lnSpc>
+                <a:spcPct val="96000"/>
+              </a:lnSpc>
+              <a:buNone/>
+            </a:pPr>
+            <a:r>
+              <a:rPr lang="en-US" sz="1300" b="1" dirty="0">
+                <a:solidFill>
+                  <a:srgbClr val="ECE9E2"/>
+                </a:solidFill>
+                <a:latin typeface="Arial" pitchFamily="34" charset="0"/>
+                <a:ea typeface="Arial" pitchFamily="34" charset="-122"/>
+                <a:cs typeface="Arial" pitchFamily="34" charset="-120"/>
               </a:rPr>
               <a:t>DynamoDB</a:t>
             </a:r>
-            <a:endParaRPr lang="en-US" sz="1250" dirty="0"/>
+            <a:endParaRPr lang="en-US" sz="1300" dirty="0"/>
           </a:p>
         </p:txBody>
       </p:sp>
       <p:sp>
         <p:nvSpPr>
-          <p:cNvPr id="24" name="Text 22"/>
-          <p:cNvSpPr/>
-          <p:nvPr/>
-        </p:nvSpPr>
-        <p:spPr>
-          <a:xfrm>
-            <a:off x="8119872" y="3401568"/>
-            <a:ext cx="1499616" cy="457200"/>
+          <p:cNvPr id="54" name="Text 52"/>
+          <p:cNvSpPr/>
+          <p:nvPr/>
+        </p:nvSpPr>
+        <p:spPr>
+          <a:xfrm>
+            <a:off x="8319821" y="4407408"/>
+            <a:ext cx="1099261" cy="365760"/>
           </a:xfrm>
           <a:prstGeom prst="rect">
             <a:avLst/>
@@ -2269,13 +3241,13 @@
           <a:bodyPr wrap="square" lIns="0" tIns="0" rIns="0" bIns="0" rtlCol="0" anchor="ctr"/>
           <a:lstStyle/>
           <a:p>
-            <a:pPr algn="ctr" indent="0" marL="0">
+            <a:pPr indent="0" marL="0">
               <a:buNone/>
             </a:pPr>
             <a:r>
               <a:rPr lang="en-US" sz="900" dirty="0">
                 <a:solidFill>
-                  <a:srgbClr val="5F6E78"/>
+                  <a:srgbClr val="8B98A6"/>
                 </a:solidFill>
                 <a:latin typeface="Calibri" pitchFamily="34" charset="0"/>
                 <a:ea typeface="Calibri" pitchFamily="34" charset="-122"/>
@@ -2289,50 +3261,44 @@
       </p:sp>
       <p:sp>
         <p:nvSpPr>
-          <p:cNvPr id="25" name="Shape 23"/>
-          <p:cNvSpPr/>
-          <p:nvPr/>
-        </p:nvSpPr>
-        <p:spPr>
-          <a:xfrm>
-            <a:off x="9610344" y="3337560"/>
-            <a:ext cx="164592" cy="0"/>
-          </a:xfrm>
-          <a:prstGeom prst="line">
-            <a:avLst/>
-          </a:prstGeom>
-          <a:noFill/>
-          <a:ln w="20320">
+          <p:cNvPr id="55" name="Shape 53"/>
+          <p:cNvSpPr/>
+          <p:nvPr/>
+        </p:nvSpPr>
+        <p:spPr>
+          <a:xfrm>
+            <a:off x="9638538" y="3799332"/>
+            <a:ext cx="310896" cy="219456"/>
+          </a:xfrm>
+          <a:prstGeom prst="rightArrow">
+            <a:avLst/>
+          </a:prstGeom>
+          <a:solidFill>
+            <a:srgbClr val="8B98A6"/>
+          </a:solidFill>
+          <a:ln/>
+        </p:spPr>
+      </p:sp>
+      <p:sp>
+        <p:nvSpPr>
+          <p:cNvPr id="56" name="Shape 54"/>
+          <p:cNvSpPr/>
+          <p:nvPr/>
+        </p:nvSpPr>
+        <p:spPr>
+          <a:xfrm>
+            <a:off x="10022586" y="2926080"/>
+            <a:ext cx="1391869" cy="1965960"/>
+          </a:xfrm>
+          <a:prstGeom prst="roundRect">
+            <a:avLst/>
+          </a:prstGeom>
+          <a:solidFill>
+            <a:srgbClr val="24262B"/>
+          </a:solidFill>
+          <a:ln w="12700">
             <a:solidFill>
-              <a:srgbClr val="6C8A9A"/>
-            </a:solidFill>
-            <a:prstDash val="solid"/>
-            <a:tailEnd type="triangle"/>
-          </a:ln>
-        </p:spPr>
-      </p:sp>
-      <p:sp>
-        <p:nvSpPr>
-          <p:cNvPr id="26" name="Shape 24"/>
-          <p:cNvSpPr/>
-          <p:nvPr/>
-        </p:nvSpPr>
-        <p:spPr>
-          <a:xfrm>
-            <a:off x="9784080" y="2651760"/>
-            <a:ext cx="1463040" cy="1371600"/>
-          </a:xfrm>
-          <a:prstGeom prst="roundRect">
-            <a:avLst>
-              <a:gd name="adj" fmla="val 5333"/>
-            </a:avLst>
-          </a:prstGeom>
-          <a:solidFill>
-            <a:srgbClr val="FFFFFF"/>
-          </a:solidFill>
-          <a:ln w="15240">
-            <a:solidFill>
-              <a:srgbClr val="4E6A78"/>
+              <a:srgbClr val="383A3F"/>
             </a:solidFill>
             <a:prstDash val="solid"/>
           </a:ln>
@@ -2340,14 +3306,14 @@
       </p:sp>
       <p:sp>
         <p:nvSpPr>
-          <p:cNvPr id="27" name="Text 25"/>
-          <p:cNvSpPr/>
-          <p:nvPr/>
-        </p:nvSpPr>
-        <p:spPr>
-          <a:xfrm>
-            <a:off x="9738360" y="2907792"/>
-            <a:ext cx="1554480" cy="457200"/>
+          <p:cNvPr id="57" name="Text 55"/>
+          <p:cNvSpPr/>
+          <p:nvPr/>
+        </p:nvSpPr>
+        <p:spPr>
+          <a:xfrm>
+            <a:off x="10168890" y="3108960"/>
+            <a:ext cx="1099261" cy="320040"/>
           </a:xfrm>
           <a:prstGeom prst="rect">
             <a:avLst/>
@@ -2359,34 +3325,76 @@
           <a:bodyPr wrap="square" lIns="0" tIns="0" rIns="0" bIns="0" rtlCol="0" anchor="ctr"/>
           <a:lstStyle/>
           <a:p>
-            <a:pPr algn="ctr" indent="0" marL="0">
+            <a:pPr indent="0" marL="0">
               <a:buNone/>
             </a:pPr>
             <a:r>
-              <a:rPr lang="en-US" sz="1250" b="1" dirty="0">
+              <a:rPr lang="en-US" sz="1100" dirty="0">
                 <a:solidFill>
-                  <a:srgbClr val="1E2A33"/>
+                  <a:srgbClr val="F2B705"/>
                 </a:solidFill>
-                <a:latin typeface="Calibri" pitchFamily="34" charset="0"/>
-                <a:ea typeface="Calibri" pitchFamily="34" charset="-122"/>
-                <a:cs typeface="Calibri" pitchFamily="34" charset="-120"/>
+                <a:latin typeface="Consolas" pitchFamily="34" charset="0"/>
+                <a:ea typeface="Consolas" pitchFamily="34" charset="-122"/>
+                <a:cs typeface="Consolas" pitchFamily="34" charset="-120"/>
+              </a:rPr>
+              <a:t>06</a:t>
+            </a:r>
+            <a:endParaRPr lang="en-US" sz="1100" dirty="0"/>
+          </a:p>
+        </p:txBody>
+      </p:sp>
+      <p:sp>
+        <p:nvSpPr>
+          <p:cNvPr id="58" name="Text 56"/>
+          <p:cNvSpPr/>
+          <p:nvPr/>
+        </p:nvSpPr>
+        <p:spPr>
+          <a:xfrm>
+            <a:off x="10168890" y="3547872"/>
+            <a:ext cx="1099261" cy="868680"/>
+          </a:xfrm>
+          <a:prstGeom prst="rect">
+            <a:avLst/>
+          </a:prstGeom>
+          <a:noFill/>
+          <a:ln/>
+        </p:spPr>
+        <p:txBody>
+          <a:bodyPr wrap="square" lIns="0" tIns="0" rIns="0" bIns="0" rtlCol="0" anchor="t"/>
+          <a:lstStyle/>
+          <a:p>
+            <a:pPr indent="0" marL="0">
+              <a:lnSpc>
+                <a:spcPct val="96000"/>
+              </a:lnSpc>
+              <a:buNone/>
+            </a:pPr>
+            <a:r>
+              <a:rPr lang="en-US" sz="1300" b="1" dirty="0">
+                <a:solidFill>
+                  <a:srgbClr val="ECE9E2"/>
+                </a:solidFill>
+                <a:latin typeface="Arial" pitchFamily="34" charset="0"/>
+                <a:ea typeface="Arial" pitchFamily="34" charset="-122"/>
+                <a:cs typeface="Arial" pitchFamily="34" charset="-120"/>
               </a:rPr>
               <a:t>API GW + S3</a:t>
             </a:r>
-            <a:endParaRPr lang="en-US" sz="1250" dirty="0"/>
+            <a:endParaRPr lang="en-US" sz="1300" dirty="0"/>
           </a:p>
         </p:txBody>
       </p:sp>
       <p:sp>
         <p:nvSpPr>
-          <p:cNvPr id="28" name="Text 26"/>
-          <p:cNvSpPr/>
-          <p:nvPr/>
-        </p:nvSpPr>
-        <p:spPr>
-          <a:xfrm>
-            <a:off x="9765792" y="3401568"/>
-            <a:ext cx="1499616" cy="457200"/>
+          <p:cNvPr id="59" name="Text 57"/>
+          <p:cNvSpPr/>
+          <p:nvPr/>
+        </p:nvSpPr>
+        <p:spPr>
+          <a:xfrm>
+            <a:off x="10168890" y="4407408"/>
+            <a:ext cx="1099261" cy="365760"/>
           </a:xfrm>
           <a:prstGeom prst="rect">
             <a:avLst/>
@@ -2398,13 +3406,13 @@
           <a:bodyPr wrap="square" lIns="0" tIns="0" rIns="0" bIns="0" rtlCol="0" anchor="ctr"/>
           <a:lstStyle/>
           <a:p>
-            <a:pPr algn="ctr" indent="0" marL="0">
+            <a:pPr indent="0" marL="0">
               <a:buNone/>
             </a:pPr>
             <a:r>
               <a:rPr lang="en-US" sz="900" dirty="0">
                 <a:solidFill>
-                  <a:srgbClr val="5F6E78"/>
+                  <a:srgbClr val="8B98A6"/>
                 </a:solidFill>
                 <a:latin typeface="Calibri" pitchFamily="34" charset="0"/>
                 <a:ea typeface="Calibri" pitchFamily="34" charset="-122"/>
@@ -2413,45 +3421,6 @@
               <a:t>live dashboard</a:t>
             </a:r>
             <a:endParaRPr lang="en-US" sz="900" dirty="0"/>
-          </a:p>
-        </p:txBody>
-      </p:sp>
-      <p:sp>
-        <p:nvSpPr>
-          <p:cNvPr id="29" name="Text 27"/>
-          <p:cNvSpPr/>
-          <p:nvPr/>
-        </p:nvSpPr>
-        <p:spPr>
-          <a:xfrm>
-            <a:off x="640080" y="5257800"/>
-            <a:ext cx="10972800" cy="731520"/>
-          </a:xfrm>
-          <a:prstGeom prst="rect">
-            <a:avLst/>
-          </a:prstGeom>
-          <a:noFill/>
-          <a:ln/>
-        </p:spPr>
-        <p:txBody>
-          <a:bodyPr wrap="square" rtlCol="0" anchor="ctr"/>
-          <a:lstStyle/>
-          <a:p>
-            <a:pPr algn="ctr" indent="0" marL="0">
-              <a:buNone/>
-            </a:pPr>
-            <a:r>
-              <a:rPr lang="en-US" sz="1500" i="1" dirty="0">
-                <a:solidFill>
-                  <a:srgbClr val="37474F"/>
-                </a:solidFill>
-                <a:latin typeface="Calibri" pitchFamily="34" charset="0"/>
-                <a:ea typeface="Calibri" pitchFamily="34" charset="-122"/>
-                <a:cs typeface="Calibri" pitchFamily="34" charset="-120"/>
-              </a:rPr>
-              <a:t>Alarms fire at the fog node — the cloud receives one compact aggregate per window, not a firehose of raw readings.</a:t>
-            </a:r>
-            <a:endParaRPr lang="en-US" sz="1500" dirty="0"/>
           </a:p>
         </p:txBody>
       </p:sp>
@@ -2469,7 +3438,7 @@
     <p:bg>
       <p:bgPr>
         <a:solidFill>
-          <a:srgbClr val="FFFFFF"/>
+          <a:srgbClr val="3A1512"/>
         </a:solidFill>
       </p:bgPr>
     </p:bg>
@@ -2489,14 +3458,534 @@
       </p:grpSpPr>
       <p:sp>
         <p:nvSpPr>
-          <p:cNvPr id="2" name="Text 0"/>
-          <p:cNvSpPr/>
-          <p:nvPr/>
-        </p:nvSpPr>
-        <p:spPr>
-          <a:xfrm>
-            <a:off x="640080" y="457200"/>
-            <a:ext cx="7315200" cy="640080"/>
+          <p:cNvPr id="2" name="Shape 0"/>
+          <p:cNvSpPr/>
+          <p:nvPr/>
+        </p:nvSpPr>
+        <p:spPr>
+          <a:xfrm flipV="1">
+            <a:off x="0" y="6217920"/>
+            <a:ext cx="468911" cy="640080"/>
+          </a:xfrm>
+          <a:prstGeom prst="triangle">
+            <a:avLst/>
+          </a:prstGeom>
+          <a:solidFill>
+            <a:srgbClr val="482320"/>
+          </a:solidFill>
+          <a:ln/>
+        </p:spPr>
+      </p:sp>
+      <p:sp>
+        <p:nvSpPr>
+          <p:cNvPr id="3" name="Shape 1"/>
+          <p:cNvSpPr/>
+          <p:nvPr/>
+        </p:nvSpPr>
+        <p:spPr>
+          <a:xfrm>
+            <a:off x="468911" y="6217920"/>
+            <a:ext cx="468911" cy="640080"/>
+          </a:xfrm>
+          <a:prstGeom prst="triangle">
+            <a:avLst/>
+          </a:prstGeom>
+          <a:solidFill>
+            <a:srgbClr val="F2B705"/>
+          </a:solidFill>
+          <a:ln/>
+        </p:spPr>
+      </p:sp>
+      <p:sp>
+        <p:nvSpPr>
+          <p:cNvPr id="4" name="Shape 2"/>
+          <p:cNvSpPr/>
+          <p:nvPr/>
+        </p:nvSpPr>
+        <p:spPr>
+          <a:xfrm flipV="1">
+            <a:off x="937823" y="6217920"/>
+            <a:ext cx="468911" cy="640080"/>
+          </a:xfrm>
+          <a:prstGeom prst="triangle">
+            <a:avLst/>
+          </a:prstGeom>
+          <a:solidFill>
+            <a:srgbClr val="482320"/>
+          </a:solidFill>
+          <a:ln/>
+        </p:spPr>
+      </p:sp>
+      <p:sp>
+        <p:nvSpPr>
+          <p:cNvPr id="5" name="Shape 3"/>
+          <p:cNvSpPr/>
+          <p:nvPr/>
+        </p:nvSpPr>
+        <p:spPr>
+          <a:xfrm>
+            <a:off x="1406734" y="6217920"/>
+            <a:ext cx="468911" cy="640080"/>
+          </a:xfrm>
+          <a:prstGeom prst="triangle">
+            <a:avLst/>
+          </a:prstGeom>
+          <a:solidFill>
+            <a:srgbClr val="F2B705"/>
+          </a:solidFill>
+          <a:ln/>
+        </p:spPr>
+      </p:sp>
+      <p:sp>
+        <p:nvSpPr>
+          <p:cNvPr id="6" name="Shape 4"/>
+          <p:cNvSpPr/>
+          <p:nvPr/>
+        </p:nvSpPr>
+        <p:spPr>
+          <a:xfrm flipV="1">
+            <a:off x="1875645" y="6217920"/>
+            <a:ext cx="468911" cy="640080"/>
+          </a:xfrm>
+          <a:prstGeom prst="triangle">
+            <a:avLst/>
+          </a:prstGeom>
+          <a:solidFill>
+            <a:srgbClr val="482320"/>
+          </a:solidFill>
+          <a:ln/>
+        </p:spPr>
+      </p:sp>
+      <p:sp>
+        <p:nvSpPr>
+          <p:cNvPr id="7" name="Shape 5"/>
+          <p:cNvSpPr/>
+          <p:nvPr/>
+        </p:nvSpPr>
+        <p:spPr>
+          <a:xfrm>
+            <a:off x="2344557" y="6217920"/>
+            <a:ext cx="468911" cy="640080"/>
+          </a:xfrm>
+          <a:prstGeom prst="triangle">
+            <a:avLst/>
+          </a:prstGeom>
+          <a:solidFill>
+            <a:srgbClr val="F2B705"/>
+          </a:solidFill>
+          <a:ln/>
+        </p:spPr>
+      </p:sp>
+      <p:sp>
+        <p:nvSpPr>
+          <p:cNvPr id="8" name="Shape 6"/>
+          <p:cNvSpPr/>
+          <p:nvPr/>
+        </p:nvSpPr>
+        <p:spPr>
+          <a:xfrm flipV="1">
+            <a:off x="2813468" y="6217920"/>
+            <a:ext cx="468911" cy="640080"/>
+          </a:xfrm>
+          <a:prstGeom prst="triangle">
+            <a:avLst/>
+          </a:prstGeom>
+          <a:solidFill>
+            <a:srgbClr val="482320"/>
+          </a:solidFill>
+          <a:ln/>
+        </p:spPr>
+      </p:sp>
+      <p:sp>
+        <p:nvSpPr>
+          <p:cNvPr id="9" name="Shape 7"/>
+          <p:cNvSpPr/>
+          <p:nvPr/>
+        </p:nvSpPr>
+        <p:spPr>
+          <a:xfrm>
+            <a:off x="3282379" y="6217920"/>
+            <a:ext cx="468911" cy="640080"/>
+          </a:xfrm>
+          <a:prstGeom prst="triangle">
+            <a:avLst/>
+          </a:prstGeom>
+          <a:solidFill>
+            <a:srgbClr val="F2B705"/>
+          </a:solidFill>
+          <a:ln/>
+        </p:spPr>
+      </p:sp>
+      <p:sp>
+        <p:nvSpPr>
+          <p:cNvPr id="10" name="Shape 8"/>
+          <p:cNvSpPr/>
+          <p:nvPr/>
+        </p:nvSpPr>
+        <p:spPr>
+          <a:xfrm flipV="1">
+            <a:off x="3751291" y="6217920"/>
+            <a:ext cx="468911" cy="640080"/>
+          </a:xfrm>
+          <a:prstGeom prst="triangle">
+            <a:avLst/>
+          </a:prstGeom>
+          <a:solidFill>
+            <a:srgbClr val="482320"/>
+          </a:solidFill>
+          <a:ln/>
+        </p:spPr>
+      </p:sp>
+      <p:sp>
+        <p:nvSpPr>
+          <p:cNvPr id="11" name="Shape 9"/>
+          <p:cNvSpPr/>
+          <p:nvPr/>
+        </p:nvSpPr>
+        <p:spPr>
+          <a:xfrm>
+            <a:off x="4220202" y="6217920"/>
+            <a:ext cx="468911" cy="640080"/>
+          </a:xfrm>
+          <a:prstGeom prst="triangle">
+            <a:avLst/>
+          </a:prstGeom>
+          <a:solidFill>
+            <a:srgbClr val="F2B705"/>
+          </a:solidFill>
+          <a:ln/>
+        </p:spPr>
+      </p:sp>
+      <p:sp>
+        <p:nvSpPr>
+          <p:cNvPr id="12" name="Shape 10"/>
+          <p:cNvSpPr/>
+          <p:nvPr/>
+        </p:nvSpPr>
+        <p:spPr>
+          <a:xfrm flipV="1">
+            <a:off x="4689114" y="6217920"/>
+            <a:ext cx="468911" cy="640080"/>
+          </a:xfrm>
+          <a:prstGeom prst="triangle">
+            <a:avLst/>
+          </a:prstGeom>
+          <a:solidFill>
+            <a:srgbClr val="482320"/>
+          </a:solidFill>
+          <a:ln/>
+        </p:spPr>
+      </p:sp>
+      <p:sp>
+        <p:nvSpPr>
+          <p:cNvPr id="13" name="Shape 11"/>
+          <p:cNvSpPr/>
+          <p:nvPr/>
+        </p:nvSpPr>
+        <p:spPr>
+          <a:xfrm>
+            <a:off x="5158025" y="6217920"/>
+            <a:ext cx="468911" cy="640080"/>
+          </a:xfrm>
+          <a:prstGeom prst="triangle">
+            <a:avLst/>
+          </a:prstGeom>
+          <a:solidFill>
+            <a:srgbClr val="F2B705"/>
+          </a:solidFill>
+          <a:ln/>
+        </p:spPr>
+      </p:sp>
+      <p:sp>
+        <p:nvSpPr>
+          <p:cNvPr id="14" name="Shape 12"/>
+          <p:cNvSpPr/>
+          <p:nvPr/>
+        </p:nvSpPr>
+        <p:spPr>
+          <a:xfrm flipV="1">
+            <a:off x="5626936" y="6217920"/>
+            <a:ext cx="468911" cy="640080"/>
+          </a:xfrm>
+          <a:prstGeom prst="triangle">
+            <a:avLst/>
+          </a:prstGeom>
+          <a:solidFill>
+            <a:srgbClr val="482320"/>
+          </a:solidFill>
+          <a:ln/>
+        </p:spPr>
+      </p:sp>
+      <p:sp>
+        <p:nvSpPr>
+          <p:cNvPr id="15" name="Shape 13"/>
+          <p:cNvSpPr/>
+          <p:nvPr/>
+        </p:nvSpPr>
+        <p:spPr>
+          <a:xfrm>
+            <a:off x="6095848" y="6217920"/>
+            <a:ext cx="468911" cy="640080"/>
+          </a:xfrm>
+          <a:prstGeom prst="triangle">
+            <a:avLst/>
+          </a:prstGeom>
+          <a:solidFill>
+            <a:srgbClr val="F2B705"/>
+          </a:solidFill>
+          <a:ln/>
+        </p:spPr>
+      </p:sp>
+      <p:sp>
+        <p:nvSpPr>
+          <p:cNvPr id="16" name="Shape 14"/>
+          <p:cNvSpPr/>
+          <p:nvPr/>
+        </p:nvSpPr>
+        <p:spPr>
+          <a:xfrm flipV="1">
+            <a:off x="6564759" y="6217920"/>
+            <a:ext cx="468911" cy="640080"/>
+          </a:xfrm>
+          <a:prstGeom prst="triangle">
+            <a:avLst/>
+          </a:prstGeom>
+          <a:solidFill>
+            <a:srgbClr val="482320"/>
+          </a:solidFill>
+          <a:ln/>
+        </p:spPr>
+      </p:sp>
+      <p:sp>
+        <p:nvSpPr>
+          <p:cNvPr id="17" name="Shape 15"/>
+          <p:cNvSpPr/>
+          <p:nvPr/>
+        </p:nvSpPr>
+        <p:spPr>
+          <a:xfrm>
+            <a:off x="7033670" y="6217920"/>
+            <a:ext cx="468911" cy="640080"/>
+          </a:xfrm>
+          <a:prstGeom prst="triangle">
+            <a:avLst/>
+          </a:prstGeom>
+          <a:solidFill>
+            <a:srgbClr val="F2B705"/>
+          </a:solidFill>
+          <a:ln/>
+        </p:spPr>
+      </p:sp>
+      <p:sp>
+        <p:nvSpPr>
+          <p:cNvPr id="18" name="Shape 16"/>
+          <p:cNvSpPr/>
+          <p:nvPr/>
+        </p:nvSpPr>
+        <p:spPr>
+          <a:xfrm flipV="1">
+            <a:off x="7502582" y="6217920"/>
+            <a:ext cx="468911" cy="640080"/>
+          </a:xfrm>
+          <a:prstGeom prst="triangle">
+            <a:avLst/>
+          </a:prstGeom>
+          <a:solidFill>
+            <a:srgbClr val="482320"/>
+          </a:solidFill>
+          <a:ln/>
+        </p:spPr>
+      </p:sp>
+      <p:sp>
+        <p:nvSpPr>
+          <p:cNvPr id="19" name="Shape 17"/>
+          <p:cNvSpPr/>
+          <p:nvPr/>
+        </p:nvSpPr>
+        <p:spPr>
+          <a:xfrm>
+            <a:off x="7971493" y="6217920"/>
+            <a:ext cx="468911" cy="640080"/>
+          </a:xfrm>
+          <a:prstGeom prst="triangle">
+            <a:avLst/>
+          </a:prstGeom>
+          <a:solidFill>
+            <a:srgbClr val="F2B705"/>
+          </a:solidFill>
+          <a:ln/>
+        </p:spPr>
+      </p:sp>
+      <p:sp>
+        <p:nvSpPr>
+          <p:cNvPr id="20" name="Shape 18"/>
+          <p:cNvSpPr/>
+          <p:nvPr/>
+        </p:nvSpPr>
+        <p:spPr>
+          <a:xfrm flipV="1">
+            <a:off x="8440404" y="6217920"/>
+            <a:ext cx="468911" cy="640080"/>
+          </a:xfrm>
+          <a:prstGeom prst="triangle">
+            <a:avLst/>
+          </a:prstGeom>
+          <a:solidFill>
+            <a:srgbClr val="482320"/>
+          </a:solidFill>
+          <a:ln/>
+        </p:spPr>
+      </p:sp>
+      <p:sp>
+        <p:nvSpPr>
+          <p:cNvPr id="21" name="Shape 19"/>
+          <p:cNvSpPr/>
+          <p:nvPr/>
+        </p:nvSpPr>
+        <p:spPr>
+          <a:xfrm>
+            <a:off x="8909316" y="6217920"/>
+            <a:ext cx="468911" cy="640080"/>
+          </a:xfrm>
+          <a:prstGeom prst="triangle">
+            <a:avLst/>
+          </a:prstGeom>
+          <a:solidFill>
+            <a:srgbClr val="F2B705"/>
+          </a:solidFill>
+          <a:ln/>
+        </p:spPr>
+      </p:sp>
+      <p:sp>
+        <p:nvSpPr>
+          <p:cNvPr id="22" name="Shape 20"/>
+          <p:cNvSpPr/>
+          <p:nvPr/>
+        </p:nvSpPr>
+        <p:spPr>
+          <a:xfrm flipV="1">
+            <a:off x="9378227" y="6217920"/>
+            <a:ext cx="468911" cy="640080"/>
+          </a:xfrm>
+          <a:prstGeom prst="triangle">
+            <a:avLst/>
+          </a:prstGeom>
+          <a:solidFill>
+            <a:srgbClr val="482320"/>
+          </a:solidFill>
+          <a:ln/>
+        </p:spPr>
+      </p:sp>
+      <p:sp>
+        <p:nvSpPr>
+          <p:cNvPr id="23" name="Shape 21"/>
+          <p:cNvSpPr/>
+          <p:nvPr/>
+        </p:nvSpPr>
+        <p:spPr>
+          <a:xfrm>
+            <a:off x="9847138" y="6217920"/>
+            <a:ext cx="468911" cy="640080"/>
+          </a:xfrm>
+          <a:prstGeom prst="triangle">
+            <a:avLst/>
+          </a:prstGeom>
+          <a:solidFill>
+            <a:srgbClr val="F2B705"/>
+          </a:solidFill>
+          <a:ln/>
+        </p:spPr>
+      </p:sp>
+      <p:sp>
+        <p:nvSpPr>
+          <p:cNvPr id="24" name="Shape 22"/>
+          <p:cNvSpPr/>
+          <p:nvPr/>
+        </p:nvSpPr>
+        <p:spPr>
+          <a:xfrm flipV="1">
+            <a:off x="10316050" y="6217920"/>
+            <a:ext cx="468911" cy="640080"/>
+          </a:xfrm>
+          <a:prstGeom prst="triangle">
+            <a:avLst/>
+          </a:prstGeom>
+          <a:solidFill>
+            <a:srgbClr val="482320"/>
+          </a:solidFill>
+          <a:ln/>
+        </p:spPr>
+      </p:sp>
+      <p:sp>
+        <p:nvSpPr>
+          <p:cNvPr id="25" name="Shape 23"/>
+          <p:cNvSpPr/>
+          <p:nvPr/>
+        </p:nvSpPr>
+        <p:spPr>
+          <a:xfrm>
+            <a:off x="10784961" y="6217920"/>
+            <a:ext cx="468911" cy="640080"/>
+          </a:xfrm>
+          <a:prstGeom prst="triangle">
+            <a:avLst/>
+          </a:prstGeom>
+          <a:solidFill>
+            <a:srgbClr val="F2B705"/>
+          </a:solidFill>
+          <a:ln/>
+        </p:spPr>
+      </p:sp>
+      <p:sp>
+        <p:nvSpPr>
+          <p:cNvPr id="26" name="Shape 24"/>
+          <p:cNvSpPr/>
+          <p:nvPr/>
+        </p:nvSpPr>
+        <p:spPr>
+          <a:xfrm flipV="1">
+            <a:off x="11253872" y="6217920"/>
+            <a:ext cx="468911" cy="640080"/>
+          </a:xfrm>
+          <a:prstGeom prst="triangle">
+            <a:avLst/>
+          </a:prstGeom>
+          <a:solidFill>
+            <a:srgbClr val="482320"/>
+          </a:solidFill>
+          <a:ln/>
+        </p:spPr>
+      </p:sp>
+      <p:sp>
+        <p:nvSpPr>
+          <p:cNvPr id="27" name="Shape 25"/>
+          <p:cNvSpPr/>
+          <p:nvPr/>
+        </p:nvSpPr>
+        <p:spPr>
+          <a:xfrm>
+            <a:off x="11722784" y="6217920"/>
+            <a:ext cx="468911" cy="640080"/>
+          </a:xfrm>
+          <a:prstGeom prst="triangle">
+            <a:avLst/>
+          </a:prstGeom>
+          <a:solidFill>
+            <a:srgbClr val="F2B705"/>
+          </a:solidFill>
+          <a:ln/>
+        </p:spPr>
+      </p:sp>
+      <p:sp>
+        <p:nvSpPr>
+          <p:cNvPr id="28" name="Text 26"/>
+          <p:cNvSpPr/>
+          <p:nvPr/>
+        </p:nvSpPr>
+        <p:spPr>
+          <a:xfrm>
+            <a:off x="777240" y="685800"/>
+            <a:ext cx="914400" cy="640080"/>
           </a:xfrm>
           <a:prstGeom prst="rect">
             <a:avLst/>
@@ -2505,7 +3994,7 @@
           <a:ln/>
         </p:spPr>
         <p:txBody>
-          <a:bodyPr wrap="square" rtlCol="0" anchor="ctr"/>
+          <a:bodyPr wrap="square" lIns="0" tIns="0" rIns="0" bIns="0" rtlCol="0" anchor="ctr"/>
           <a:lstStyle/>
           <a:p>
             <a:pPr indent="0" marL="0">
@@ -2514,13 +4003,13 @@
             <a:r>
               <a:rPr lang="en-US" sz="3000" b="1" dirty="0">
                 <a:solidFill>
-                  <a:srgbClr val="1E2A33"/>
+                  <a:srgbClr val="F2B705"/>
                 </a:solidFill>
-                <a:latin typeface="Bookman Old Style" pitchFamily="34" charset="0"/>
-                <a:ea typeface="Bookman Old Style" pitchFamily="34" charset="-122"/>
-                <a:cs typeface="Bookman Old Style" pitchFamily="34" charset="-120"/>
+                <a:latin typeface="Arial" pitchFamily="34" charset="0"/>
+                <a:ea typeface="Arial" pitchFamily="34" charset="-122"/>
+                <a:cs typeface="Arial" pitchFamily="34" charset="-120"/>
               </a:rPr>
-              <a:t>Live Demo</a:t>
+              <a:t>02</a:t>
             </a:r>
             <a:endParaRPr lang="en-US" sz="3000" dirty="0"/>
           </a:p>
@@ -2528,14 +4017,14 @@
       </p:sp>
       <p:sp>
         <p:nvSpPr>
-          <p:cNvPr id="3" name="Text 1"/>
-          <p:cNvSpPr/>
-          <p:nvPr/>
-        </p:nvSpPr>
-        <p:spPr>
-          <a:xfrm>
-            <a:off x="658368" y="1143000"/>
-            <a:ext cx="10972800" cy="365760"/>
+          <p:cNvPr id="29" name="Text 27"/>
+          <p:cNvSpPr/>
+          <p:nvPr/>
+        </p:nvSpPr>
+        <p:spPr>
+          <a:xfrm>
+            <a:off x="1645920" y="859536"/>
+            <a:ext cx="9768535" cy="274320"/>
           </a:xfrm>
           <a:prstGeom prst="rect">
             <a:avLst/>
@@ -2544,16 +4033,94 @@
           <a:ln/>
         </p:spPr>
         <p:txBody>
-          <a:bodyPr wrap="square" rtlCol="0" anchor="ctr"/>
+          <a:bodyPr wrap="square" lIns="0" tIns="0" rIns="0" bIns="0" rtlCol="0" anchor="ctr"/>
           <a:lstStyle/>
           <a:p>
             <a:pPr indent="0" marL="0">
               <a:buNone/>
             </a:pPr>
             <a:r>
-              <a:rPr lang="en-US" sz="1400" dirty="0">
+              <a:rPr lang="en-US" sz="1100" b="1" spc="200" kern="0" dirty="0">
                 <a:solidFill>
-                  <a:srgbClr val="4E6A78"/>
+                  <a:srgbClr val="8B98A6"/>
+                </a:solidFill>
+                <a:latin typeface="Calibri" pitchFamily="34" charset="0"/>
+                <a:ea typeface="Calibri" pitchFamily="34" charset="-122"/>
+                <a:cs typeface="Calibri" pitchFamily="34" charset="-120"/>
+              </a:rPr>
+              <a:t>LIVE DEMO</a:t>
+            </a:r>
+            <a:endParaRPr lang="en-US" sz="1100" dirty="0"/>
+          </a:p>
+        </p:txBody>
+      </p:sp>
+      <p:sp>
+        <p:nvSpPr>
+          <p:cNvPr id="30" name="Text 28"/>
+          <p:cNvSpPr/>
+          <p:nvPr/>
+        </p:nvSpPr>
+        <p:spPr>
+          <a:xfrm>
+            <a:off x="777240" y="1335024"/>
+            <a:ext cx="10637215" cy="640080"/>
+          </a:xfrm>
+          <a:prstGeom prst="rect">
+            <a:avLst/>
+          </a:prstGeom>
+          <a:noFill/>
+          <a:ln/>
+        </p:spPr>
+        <p:txBody>
+          <a:bodyPr wrap="square" lIns="0" tIns="0" rIns="0" bIns="0" rtlCol="0" anchor="ctr"/>
+          <a:lstStyle/>
+          <a:p>
+            <a:pPr indent="0" marL="0">
+              <a:buNone/>
+            </a:pPr>
+            <a:r>
+              <a:rPr lang="en-US" sz="2300" b="1" dirty="0">
+                <a:solidFill>
+                  <a:srgbClr val="ECE9E2"/>
+                </a:solidFill>
+                <a:latin typeface="Arial" pitchFamily="34" charset="0"/>
+                <a:ea typeface="Arial" pitchFamily="34" charset="-122"/>
+                <a:cs typeface="Arial" pitchFamily="34" charset="-120"/>
+              </a:rPr>
+              <a:t>See it running on AWS</a:t>
+            </a:r>
+            <a:endParaRPr lang="en-US" sz="2300" dirty="0"/>
+          </a:p>
+        </p:txBody>
+      </p:sp>
+      <p:sp>
+        <p:nvSpPr>
+          <p:cNvPr id="31" name="Text 29"/>
+          <p:cNvSpPr/>
+          <p:nvPr/>
+        </p:nvSpPr>
+        <p:spPr>
+          <a:xfrm>
+            <a:off x="777240" y="1856232"/>
+            <a:ext cx="10637215" cy="274320"/>
+          </a:xfrm>
+          <a:prstGeom prst="rect">
+            <a:avLst/>
+          </a:prstGeom>
+          <a:noFill/>
+          <a:ln/>
+        </p:spPr>
+        <p:txBody>
+          <a:bodyPr wrap="square" rtlCol="0" anchor="ctr"/>
+          <a:lstStyle/>
+          <a:p>
+            <a:pPr indent="0" marL="0">
+              <a:buNone/>
+            </a:pPr>
+            <a:r>
+              <a:rPr lang="en-US" sz="1100" dirty="0">
+                <a:solidFill>
+                  <a:srgbClr val="F2B705"/>
                 </a:solidFill>
                 <a:latin typeface="Consolas" pitchFamily="34" charset="0"/>
                 <a:ea typeface="Consolas" pitchFamily="34" charset="-122"/>
@@ -2561,32 +4128,30 @@
               </a:rPr>
               <a:t>fei-frontend-964346251483.s3.us-east-1.amazonaws.com</a:t>
             </a:r>
-            <a:endParaRPr lang="en-US" sz="1400" dirty="0"/>
+            <a:endParaRPr lang="en-US" sz="1100" dirty="0"/>
           </a:p>
         </p:txBody>
       </p:sp>
       <p:sp>
         <p:nvSpPr>
-          <p:cNvPr id="4" name="Shape 2"/>
-          <p:cNvSpPr/>
-          <p:nvPr/>
-        </p:nvSpPr>
-        <p:spPr>
-          <a:xfrm>
-            <a:off x="640080" y="1828800"/>
-            <a:ext cx="10881360" cy="1371600"/>
+          <p:cNvPr id="32" name="Shape 30"/>
+          <p:cNvSpPr/>
+          <p:nvPr/>
+        </p:nvSpPr>
+        <p:spPr>
+          <a:xfrm>
+            <a:off x="777240" y="2468880"/>
+            <a:ext cx="3301898" cy="3291840"/>
           </a:xfrm>
           <a:prstGeom prst="roundRect">
-            <a:avLst>
-              <a:gd name="adj" fmla="val 6667"/>
-            </a:avLst>
-          </a:prstGeom>
-          <a:solidFill>
-            <a:srgbClr val="EEF2F4"/>
-          </a:solidFill>
-          <a:ln w="15240">
+            <a:avLst/>
+          </a:prstGeom>
+          <a:solidFill>
+            <a:srgbClr val="24262B"/>
+          </a:solidFill>
+          <a:ln w="12700">
             <a:solidFill>
-              <a:srgbClr val="4E6A78"/>
+              <a:srgbClr val="383A3F"/>
             </a:solidFill>
             <a:prstDash val="solid"/>
           </a:ln>
@@ -2594,73 +4159,14 @@
       </p:sp>
       <p:sp>
         <p:nvSpPr>
-          <p:cNvPr id="5" name="Shape 3"/>
-          <p:cNvSpPr/>
-          <p:nvPr/>
-        </p:nvSpPr>
-        <p:spPr>
-          <a:xfrm>
-            <a:off x="960120" y="2203704"/>
-            <a:ext cx="621792" cy="621792"/>
-          </a:xfrm>
-          <a:prstGeom prst="ellipse">
-            <a:avLst/>
-          </a:prstGeom>
-          <a:solidFill>
-            <a:srgbClr val="37474F"/>
-          </a:solidFill>
-          <a:ln/>
-        </p:spPr>
-      </p:sp>
-      <p:sp>
-        <p:nvSpPr>
-          <p:cNvPr id="6" name="Text 4"/>
-          <p:cNvSpPr/>
-          <p:nvPr/>
-        </p:nvSpPr>
-        <p:spPr>
-          <a:xfrm>
-            <a:off x="960120" y="2203704"/>
-            <a:ext cx="621792" cy="621792"/>
-          </a:xfrm>
-          <a:prstGeom prst="rect">
-            <a:avLst/>
-          </a:prstGeom>
-          <a:noFill/>
-          <a:ln/>
-        </p:spPr>
-        <p:txBody>
-          <a:bodyPr wrap="square" lIns="0" tIns="0" rIns="0" bIns="0" rtlCol="0" anchor="ctr"/>
-          <a:lstStyle/>
-          <a:p>
-            <a:pPr algn="ctr" indent="0" marL="0">
-              <a:buNone/>
-            </a:pPr>
-            <a:r>
-              <a:rPr lang="en-US" sz="2200" b="1" dirty="0">
-                <a:solidFill>
-                  <a:srgbClr val="FFFFFF"/>
-                </a:solidFill>
-                <a:latin typeface="Bookman Old Style" pitchFamily="34" charset="0"/>
-                <a:ea typeface="Bookman Old Style" pitchFamily="34" charset="-122"/>
-                <a:cs typeface="Bookman Old Style" pitchFamily="34" charset="-120"/>
-              </a:rPr>
-              <a:t>1</a:t>
-            </a:r>
-            <a:endParaRPr lang="en-US" sz="2200" dirty="0"/>
-          </a:p>
-        </p:txBody>
-      </p:sp>
-      <p:sp>
-        <p:nvSpPr>
-          <p:cNvPr id="7" name="Text 5"/>
-          <p:cNvSpPr/>
-          <p:nvPr/>
-        </p:nvSpPr>
-        <p:spPr>
-          <a:xfrm>
-            <a:off x="1828800" y="2029968"/>
-            <a:ext cx="9418320" cy="411480"/>
+          <p:cNvPr id="33" name="Text 31"/>
+          <p:cNvSpPr/>
+          <p:nvPr/>
+        </p:nvSpPr>
+        <p:spPr>
+          <a:xfrm>
+            <a:off x="1051560" y="2706624"/>
+            <a:ext cx="1828800" cy="777240"/>
           </a:xfrm>
           <a:prstGeom prst="rect">
             <a:avLst/>
@@ -2676,30 +4182,30 @@
               <a:buNone/>
             </a:pPr>
             <a:r>
-              <a:rPr lang="en-US" sz="1700" b="1" dirty="0">
+              <a:rPr lang="en-US" sz="3800" b="1" dirty="0">
                 <a:solidFill>
-                  <a:srgbClr val="1E2A33"/>
+                  <a:srgbClr val="F2B705"/>
                 </a:solidFill>
-                <a:latin typeface="Calibri" pitchFamily="34" charset="0"/>
-                <a:ea typeface="Calibri" pitchFamily="34" charset="-122"/>
-                <a:cs typeface="Calibri" pitchFamily="34" charset="-120"/>
+                <a:latin typeface="Arial" pitchFamily="34" charset="0"/>
+                <a:ea typeface="Arial" pitchFamily="34" charset="-122"/>
+                <a:cs typeface="Arial" pitchFamily="34" charset="-120"/>
               </a:rPr>
-              <a:t>A card per signal, per line</a:t>
+              <a:t>01</a:t>
             </a:r>
-            <a:endParaRPr lang="en-US" sz="1700" dirty="0"/>
+            <a:endParaRPr lang="en-US" sz="3800" dirty="0"/>
           </a:p>
         </p:txBody>
       </p:sp>
       <p:sp>
         <p:nvSpPr>
-          <p:cNvPr id="8" name="Text 6"/>
-          <p:cNvSpPr/>
-          <p:nvPr/>
-        </p:nvSpPr>
-        <p:spPr>
-          <a:xfrm>
-            <a:off x="1828800" y="2450592"/>
-            <a:ext cx="9418320" cy="594360"/>
+          <p:cNvPr id="34" name="Text 32"/>
+          <p:cNvSpPr/>
+          <p:nvPr/>
+        </p:nvSpPr>
+        <p:spPr>
+          <a:xfrm>
+            <a:off x="1069848" y="3520440"/>
+            <a:ext cx="2753258" cy="868680"/>
           </a:xfrm>
           <a:prstGeom prst="rect">
             <a:avLst/>
@@ -2708,19 +4214,61 @@
           <a:ln/>
         </p:spPr>
         <p:txBody>
-          <a:bodyPr wrap="square" lIns="0" tIns="0" rIns="0" bIns="0" rtlCol="0" anchor="ctr"/>
+          <a:bodyPr wrap="square" lIns="0" tIns="0" rIns="0" bIns="0" rtlCol="0" anchor="t"/>
           <a:lstStyle/>
           <a:p>
             <a:pPr indent="0" marL="0">
               <a:lnSpc>
-                <a:spcPct val="105000"/>
+                <a:spcPct val="100000"/>
               </a:lnSpc>
               <a:buNone/>
             </a:pPr>
             <a:r>
-              <a:rPr lang="en-US" sz="1300" dirty="0">
+              <a:rPr lang="en-US" sz="1550" b="1" dirty="0">
                 <a:solidFill>
-                  <a:srgbClr val="5F6E78"/>
+                  <a:srgbClr val="ECE9E2"/>
+                </a:solidFill>
+                <a:latin typeface="Arial" pitchFamily="34" charset="0"/>
+                <a:ea typeface="Arial" pitchFamily="34" charset="-122"/>
+                <a:cs typeface="Arial" pitchFamily="34" charset="-120"/>
+              </a:rPr>
+              <a:t>A card per signal, per line</a:t>
+            </a:r>
+            <a:endParaRPr lang="en-US" sz="1550" dirty="0"/>
+          </a:p>
+        </p:txBody>
+      </p:sp>
+      <p:sp>
+        <p:nvSpPr>
+          <p:cNvPr id="35" name="Text 33"/>
+          <p:cNvSpPr/>
+          <p:nvPr/>
+        </p:nvSpPr>
+        <p:spPr>
+          <a:xfrm>
+            <a:off x="1069848" y="4389120"/>
+            <a:ext cx="2753258" cy="1188720"/>
+          </a:xfrm>
+          <a:prstGeom prst="rect">
+            <a:avLst/>
+          </a:prstGeom>
+          <a:noFill/>
+          <a:ln/>
+        </p:spPr>
+        <p:txBody>
+          <a:bodyPr wrap="square" lIns="0" tIns="0" rIns="0" bIns="0" rtlCol="0" anchor="ctr"/>
+          <a:lstStyle/>
+          <a:p>
+            <a:pPr indent="0" marL="0">
+              <a:lnSpc>
+                <a:spcPct val="120000"/>
+              </a:lnSpc>
+              <a:buNone/>
+            </a:pPr>
+            <a:r>
+              <a:rPr lang="en-US" sz="1200" dirty="0">
+                <a:solidFill>
+                  <a:srgbClr val="8B98A6"/>
                 </a:solidFill>
                 <a:latin typeface="Calibri" pitchFamily="34" charset="0"/>
                 <a:ea typeface="Calibri" pitchFamily="34" charset="-122"/>
@@ -2728,32 +4276,30 @@
               </a:rPr>
               <a:t>Vibration, motor temperature, bearing acoustic, rotation speed and power draw live on both production lines, each with its real alarm limit and a sparkline.</a:t>
             </a:r>
-            <a:endParaRPr lang="en-US" sz="1300" dirty="0"/>
+            <a:endParaRPr lang="en-US" sz="1200" dirty="0"/>
           </a:p>
         </p:txBody>
       </p:sp>
       <p:sp>
         <p:nvSpPr>
-          <p:cNvPr id="9" name="Shape 7"/>
-          <p:cNvSpPr/>
-          <p:nvPr/>
-        </p:nvSpPr>
-        <p:spPr>
-          <a:xfrm>
-            <a:off x="640080" y="3401568"/>
-            <a:ext cx="5303520" cy="2606040"/>
+          <p:cNvPr id="36" name="Shape 34"/>
+          <p:cNvSpPr/>
+          <p:nvPr/>
+        </p:nvSpPr>
+        <p:spPr>
+          <a:xfrm>
+            <a:off x="4444898" y="2468880"/>
+            <a:ext cx="3301898" cy="3291840"/>
           </a:xfrm>
           <a:prstGeom prst="roundRect">
-            <a:avLst>
-              <a:gd name="adj" fmla="val 3509"/>
-            </a:avLst>
-          </a:prstGeom>
-          <a:solidFill>
-            <a:srgbClr val="EEF2F4"/>
-          </a:solidFill>
-          <a:ln w="15240">
+            <a:avLst/>
+          </a:prstGeom>
+          <a:solidFill>
+            <a:srgbClr val="24262B"/>
+          </a:solidFill>
+          <a:ln w="12700">
             <a:solidFill>
-              <a:srgbClr val="4E6A78"/>
+              <a:srgbClr val="383A3F"/>
             </a:solidFill>
             <a:prstDash val="solid"/>
           </a:ln>
@@ -2761,73 +4307,14 @@
       </p:sp>
       <p:sp>
         <p:nvSpPr>
-          <p:cNvPr id="10" name="Shape 8"/>
-          <p:cNvSpPr/>
-          <p:nvPr/>
-        </p:nvSpPr>
-        <p:spPr>
-          <a:xfrm>
-            <a:off x="914400" y="3675888"/>
-            <a:ext cx="603504" cy="603504"/>
-          </a:xfrm>
-          <a:prstGeom prst="ellipse">
-            <a:avLst/>
-          </a:prstGeom>
-          <a:solidFill>
-            <a:srgbClr val="37474F"/>
-          </a:solidFill>
-          <a:ln/>
-        </p:spPr>
-      </p:sp>
-      <p:sp>
-        <p:nvSpPr>
-          <p:cNvPr id="11" name="Text 9"/>
-          <p:cNvSpPr/>
-          <p:nvPr/>
-        </p:nvSpPr>
-        <p:spPr>
-          <a:xfrm>
-            <a:off x="914400" y="3675888"/>
-            <a:ext cx="603504" cy="603504"/>
-          </a:xfrm>
-          <a:prstGeom prst="rect">
-            <a:avLst/>
-          </a:prstGeom>
-          <a:noFill/>
-          <a:ln/>
-        </p:spPr>
-        <p:txBody>
-          <a:bodyPr wrap="square" lIns="0" tIns="0" rIns="0" bIns="0" rtlCol="0" anchor="ctr"/>
-          <a:lstStyle/>
-          <a:p>
-            <a:pPr algn="ctr" indent="0" marL="0">
-              <a:buNone/>
-            </a:pPr>
-            <a:r>
-              <a:rPr lang="en-US" sz="2200" b="1" dirty="0">
-                <a:solidFill>
-                  <a:srgbClr val="FFFFFF"/>
-                </a:solidFill>
-                <a:latin typeface="Bookman Old Style" pitchFamily="34" charset="0"/>
-                <a:ea typeface="Bookman Old Style" pitchFamily="34" charset="-122"/>
-                <a:cs typeface="Bookman Old Style" pitchFamily="34" charset="-120"/>
-              </a:rPr>
-              <a:t>2</a:t>
-            </a:r>
-            <a:endParaRPr lang="en-US" sz="2200" dirty="0"/>
-          </a:p>
-        </p:txBody>
-      </p:sp>
-      <p:sp>
-        <p:nvSpPr>
-          <p:cNvPr id="12" name="Text 10"/>
-          <p:cNvSpPr/>
-          <p:nvPr/>
-        </p:nvSpPr>
-        <p:spPr>
-          <a:xfrm>
-            <a:off x="914400" y="4425696"/>
-            <a:ext cx="4754880" cy="777240"/>
+          <p:cNvPr id="37" name="Text 35"/>
+          <p:cNvSpPr/>
+          <p:nvPr/>
+        </p:nvSpPr>
+        <p:spPr>
+          <a:xfrm>
+            <a:off x="4719218" y="2706624"/>
+            <a:ext cx="1828800" cy="777240"/>
           </a:xfrm>
           <a:prstGeom prst="rect">
             <a:avLst/>
@@ -2843,30 +4330,30 @@
               <a:buNone/>
             </a:pPr>
             <a:r>
-              <a:rPr lang="en-US" sz="1600" b="1" dirty="0">
+              <a:rPr lang="en-US" sz="3800" b="1" dirty="0">
                 <a:solidFill>
-                  <a:srgbClr val="1E2A33"/>
+                  <a:srgbClr val="F2B705"/>
                 </a:solidFill>
-                <a:latin typeface="Calibri" pitchFamily="34" charset="0"/>
-                <a:ea typeface="Calibri" pitchFamily="34" charset="-122"/>
-                <a:cs typeface="Calibri" pitchFamily="34" charset="-120"/>
+                <a:latin typeface="Arial" pitchFamily="34" charset="0"/>
+                <a:ea typeface="Arial" pitchFamily="34" charset="-122"/>
+                <a:cs typeface="Arial" pitchFamily="34" charset="-120"/>
               </a:rPr>
-              <a:t>The two-sided speed rule</a:t>
+              <a:t>02</a:t>
             </a:r>
-            <a:endParaRPr lang="en-US" sz="1600" dirty="0"/>
+            <a:endParaRPr lang="en-US" sz="3800" dirty="0"/>
           </a:p>
         </p:txBody>
       </p:sp>
       <p:sp>
         <p:nvSpPr>
-          <p:cNvPr id="13" name="Text 11"/>
-          <p:cNvSpPr/>
-          <p:nvPr/>
-        </p:nvSpPr>
-        <p:spPr>
-          <a:xfrm>
-            <a:off x="914400" y="5184648"/>
-            <a:ext cx="4754880" cy="640080"/>
+          <p:cNvPr id="38" name="Text 36"/>
+          <p:cNvSpPr/>
+          <p:nvPr/>
+        </p:nvSpPr>
+        <p:spPr>
+          <a:xfrm>
+            <a:off x="4737506" y="3520440"/>
+            <a:ext cx="2753258" cy="868680"/>
           </a:xfrm>
           <a:prstGeom prst="rect">
             <a:avLst/>
@@ -2875,19 +4362,61 @@
           <a:ln/>
         </p:spPr>
         <p:txBody>
-          <a:bodyPr wrap="square" lIns="0" tIns="0" rIns="0" bIns="0" rtlCol="0" anchor="ctr"/>
+          <a:bodyPr wrap="square" lIns="0" tIns="0" rIns="0" bIns="0" rtlCol="0" anchor="t"/>
           <a:lstStyle/>
           <a:p>
             <a:pPr indent="0" marL="0">
               <a:lnSpc>
-                <a:spcPct val="106000"/>
+                <a:spcPct val="100000"/>
               </a:lnSpc>
               <a:buNone/>
             </a:pPr>
             <a:r>
-              <a:rPr lang="en-US" sz="1250" dirty="0">
+              <a:rPr lang="en-US" sz="1550" b="1" dirty="0">
                 <a:solidFill>
-                  <a:srgbClr val="5F6E78"/>
+                  <a:srgbClr val="ECE9E2"/>
+                </a:solidFill>
+                <a:latin typeface="Arial" pitchFamily="34" charset="0"/>
+                <a:ea typeface="Arial" pitchFamily="34" charset="-122"/>
+                <a:cs typeface="Arial" pitchFamily="34" charset="-120"/>
+              </a:rPr>
+              <a:t>The two-sided speed rule</a:t>
+            </a:r>
+            <a:endParaRPr lang="en-US" sz="1550" dirty="0"/>
+          </a:p>
+        </p:txBody>
+      </p:sp>
+      <p:sp>
+        <p:nvSpPr>
+          <p:cNvPr id="39" name="Text 37"/>
+          <p:cNvSpPr/>
+          <p:nvPr/>
+        </p:nvSpPr>
+        <p:spPr>
+          <a:xfrm>
+            <a:off x="4737506" y="4389120"/>
+            <a:ext cx="2753258" cy="1188720"/>
+          </a:xfrm>
+          <a:prstGeom prst="rect">
+            <a:avLst/>
+          </a:prstGeom>
+          <a:noFill/>
+          <a:ln/>
+        </p:spPr>
+        <p:txBody>
+          <a:bodyPr wrap="square" lIns="0" tIns="0" rIns="0" bIns="0" rtlCol="0" anchor="ctr"/>
+          <a:lstStyle/>
+          <a:p>
+            <a:pPr indent="0" marL="0">
+              <a:lnSpc>
+                <a:spcPct val="120000"/>
+              </a:lnSpc>
+              <a:buNone/>
+            </a:pPr>
+            <a:r>
+              <a:rPr lang="en-US" sz="1200" dirty="0">
+                <a:solidFill>
+                  <a:srgbClr val="8B98A6"/>
                 </a:solidFill>
                 <a:latin typeface="Calibri" pitchFamily="34" charset="0"/>
                 <a:ea typeface="Calibri" pitchFamily="34" charset="-122"/>
@@ -2895,32 +4424,30 @@
               </a:rPr>
               <a:t>Rotation speed is the one signal faulted at both ends — an underspeed alarm at 1,000 RPM and an overspeed at 3,400 — unlike the four single-limit signals.</a:t>
             </a:r>
-            <a:endParaRPr lang="en-US" sz="1250" dirty="0"/>
+            <a:endParaRPr lang="en-US" sz="1200" dirty="0"/>
           </a:p>
         </p:txBody>
       </p:sp>
       <p:sp>
         <p:nvSpPr>
-          <p:cNvPr id="14" name="Shape 12"/>
-          <p:cNvSpPr/>
-          <p:nvPr/>
-        </p:nvSpPr>
-        <p:spPr>
-          <a:xfrm>
-            <a:off x="6217920" y="3401568"/>
-            <a:ext cx="5303520" cy="2606040"/>
+          <p:cNvPr id="40" name="Shape 38"/>
+          <p:cNvSpPr/>
+          <p:nvPr/>
+        </p:nvSpPr>
+        <p:spPr>
+          <a:xfrm>
+            <a:off x="8112557" y="2468880"/>
+            <a:ext cx="3301898" cy="3291840"/>
           </a:xfrm>
           <a:prstGeom prst="roundRect">
-            <a:avLst>
-              <a:gd name="adj" fmla="val 3509"/>
-            </a:avLst>
-          </a:prstGeom>
-          <a:solidFill>
-            <a:srgbClr val="EEF2F4"/>
-          </a:solidFill>
-          <a:ln w="15240">
+            <a:avLst/>
+          </a:prstGeom>
+          <a:solidFill>
+            <a:srgbClr val="24262B"/>
+          </a:solidFill>
+          <a:ln w="12700">
             <a:solidFill>
-              <a:srgbClr val="4E6A78"/>
+              <a:srgbClr val="383A3F"/>
             </a:solidFill>
             <a:prstDash val="solid"/>
           </a:ln>
@@ -2928,73 +4455,14 @@
       </p:sp>
       <p:sp>
         <p:nvSpPr>
-          <p:cNvPr id="15" name="Shape 13"/>
-          <p:cNvSpPr/>
-          <p:nvPr/>
-        </p:nvSpPr>
-        <p:spPr>
-          <a:xfrm>
-            <a:off x="6492240" y="3675888"/>
-            <a:ext cx="603504" cy="603504"/>
-          </a:xfrm>
-          <a:prstGeom prst="ellipse">
-            <a:avLst/>
-          </a:prstGeom>
-          <a:solidFill>
-            <a:srgbClr val="37474F"/>
-          </a:solidFill>
-          <a:ln/>
-        </p:spPr>
-      </p:sp>
-      <p:sp>
-        <p:nvSpPr>
-          <p:cNvPr id="16" name="Text 14"/>
-          <p:cNvSpPr/>
-          <p:nvPr/>
-        </p:nvSpPr>
-        <p:spPr>
-          <a:xfrm>
-            <a:off x="6492240" y="3675888"/>
-            <a:ext cx="603504" cy="603504"/>
-          </a:xfrm>
-          <a:prstGeom prst="rect">
-            <a:avLst/>
-          </a:prstGeom>
-          <a:noFill/>
-          <a:ln/>
-        </p:spPr>
-        <p:txBody>
-          <a:bodyPr wrap="square" lIns="0" tIns="0" rIns="0" bIns="0" rtlCol="0" anchor="ctr"/>
-          <a:lstStyle/>
-          <a:p>
-            <a:pPr algn="ctr" indent="0" marL="0">
-              <a:buNone/>
-            </a:pPr>
-            <a:r>
-              <a:rPr lang="en-US" sz="2200" b="1" dirty="0">
-                <a:solidFill>
-                  <a:srgbClr val="FFFFFF"/>
-                </a:solidFill>
-                <a:latin typeface="Bookman Old Style" pitchFamily="34" charset="0"/>
-                <a:ea typeface="Bookman Old Style" pitchFamily="34" charset="-122"/>
-                <a:cs typeface="Bookman Old Style" pitchFamily="34" charset="-120"/>
-              </a:rPr>
-              <a:t>3</a:t>
-            </a:r>
-            <a:endParaRPr lang="en-US" sz="2200" dirty="0"/>
-          </a:p>
-        </p:txBody>
-      </p:sp>
-      <p:sp>
-        <p:nvSpPr>
-          <p:cNvPr id="17" name="Text 15"/>
-          <p:cNvSpPr/>
-          <p:nvPr/>
-        </p:nvSpPr>
-        <p:spPr>
-          <a:xfrm>
-            <a:off x="6492240" y="4425696"/>
-            <a:ext cx="4754880" cy="777240"/>
+          <p:cNvPr id="41" name="Text 39"/>
+          <p:cNvSpPr/>
+          <p:nvPr/>
+        </p:nvSpPr>
+        <p:spPr>
+          <a:xfrm>
+            <a:off x="8386877" y="2706624"/>
+            <a:ext cx="1828800" cy="777240"/>
           </a:xfrm>
           <a:prstGeom prst="rect">
             <a:avLst/>
@@ -3010,30 +4478,30 @@
               <a:buNone/>
             </a:pPr>
             <a:r>
-              <a:rPr lang="en-US" sz="1600" b="1" dirty="0">
+              <a:rPr lang="en-US" sz="3800" b="1" dirty="0">
                 <a:solidFill>
-                  <a:srgbClr val="1E2A33"/>
+                  <a:srgbClr val="F2B705"/>
                 </a:solidFill>
-                <a:latin typeface="Calibri" pitchFamily="34" charset="0"/>
-                <a:ea typeface="Calibri" pitchFamily="34" charset="-122"/>
-                <a:cs typeface="Calibri" pitchFamily="34" charset="-120"/>
+                <a:latin typeface="Arial" pitchFamily="34" charset="0"/>
+                <a:ea typeface="Arial" pitchFamily="34" charset="-122"/>
+                <a:cs typeface="Arial" pitchFamily="34" charset="-120"/>
               </a:rPr>
-              <a:t>An active alarm on the floor</a:t>
+              <a:t>03</a:t>
             </a:r>
-            <a:endParaRPr lang="en-US" sz="1600" dirty="0"/>
+            <a:endParaRPr lang="en-US" sz="3800" dirty="0"/>
           </a:p>
         </p:txBody>
       </p:sp>
       <p:sp>
         <p:nvSpPr>
-          <p:cNvPr id="18" name="Text 16"/>
-          <p:cNvSpPr/>
-          <p:nvPr/>
-        </p:nvSpPr>
-        <p:spPr>
-          <a:xfrm>
-            <a:off x="6492240" y="5184648"/>
-            <a:ext cx="4754880" cy="640080"/>
+          <p:cNvPr id="42" name="Text 40"/>
+          <p:cNvSpPr/>
+          <p:nvPr/>
+        </p:nvSpPr>
+        <p:spPr>
+          <a:xfrm>
+            <a:off x="8405165" y="3520440"/>
+            <a:ext cx="2753258" cy="868680"/>
           </a:xfrm>
           <a:prstGeom prst="rect">
             <a:avLst/>
@@ -3042,19 +4510,61 @@
           <a:ln/>
         </p:spPr>
         <p:txBody>
-          <a:bodyPr wrap="square" lIns="0" tIns="0" rIns="0" bIns="0" rtlCol="0" anchor="ctr"/>
+          <a:bodyPr wrap="square" lIns="0" tIns="0" rIns="0" bIns="0" rtlCol="0" anchor="t"/>
           <a:lstStyle/>
           <a:p>
             <a:pPr indent="0" marL="0">
               <a:lnSpc>
-                <a:spcPct val="106000"/>
+                <a:spcPct val="100000"/>
               </a:lnSpc>
               <a:buNone/>
             </a:pPr>
             <a:r>
-              <a:rPr lang="en-US" sz="1250" dirty="0">
+              <a:rPr lang="en-US" sz="1550" b="1" dirty="0">
                 <a:solidFill>
-                  <a:srgbClr val="5F6E78"/>
+                  <a:srgbClr val="ECE9E2"/>
+                </a:solidFill>
+                <a:latin typeface="Arial" pitchFamily="34" charset="0"/>
+                <a:ea typeface="Arial" pitchFamily="34" charset="-122"/>
+                <a:cs typeface="Arial" pitchFamily="34" charset="-120"/>
+              </a:rPr>
+              <a:t>An active alarm on the floor</a:t>
+            </a:r>
+            <a:endParaRPr lang="en-US" sz="1550" dirty="0"/>
+          </a:p>
+        </p:txBody>
+      </p:sp>
+      <p:sp>
+        <p:nvSpPr>
+          <p:cNvPr id="43" name="Text 41"/>
+          <p:cNvSpPr/>
+          <p:nvPr/>
+        </p:nvSpPr>
+        <p:spPr>
+          <a:xfrm>
+            <a:off x="8405165" y="4389120"/>
+            <a:ext cx="2753258" cy="1188720"/>
+          </a:xfrm>
+          <a:prstGeom prst="rect">
+            <a:avLst/>
+          </a:prstGeom>
+          <a:noFill/>
+          <a:ln/>
+        </p:spPr>
+        <p:txBody>
+          <a:bodyPr wrap="square" lIns="0" tIns="0" rIns="0" bIns="0" rtlCol="0" anchor="ctr"/>
+          <a:lstStyle/>
+          <a:p>
+            <a:pPr indent="0" marL="0">
+              <a:lnSpc>
+                <a:spcPct val="120000"/>
+              </a:lnSpc>
+              <a:buNone/>
+            </a:pPr>
+            <a:r>
+              <a:rPr lang="en-US" sz="1200" dirty="0">
+                <a:solidFill>
+                  <a:srgbClr val="8B98A6"/>
                 </a:solidFill>
                 <a:latin typeface="Calibri" pitchFamily="34" charset="0"/>
                 <a:ea typeface="Calibri" pitchFamily="34" charset="-122"/>
@@ -3062,7 +4572,7 @@
               </a:rPr>
               <a:t>Line-1 is firing a rotation-speed underspeed alarm right now, shown red on its card with the GATEWAY/QUEUE/LAMBDA/PIPELINE bar green below.</a:t>
             </a:r>
-            <a:endParaRPr lang="en-US" sz="1250" dirty="0"/>
+            <a:endParaRPr lang="en-US" sz="1200" dirty="0"/>
           </a:p>
         </p:txBody>
       </p:sp>
@@ -3080,7 +4590,7 @@
     <p:bg>
       <p:bgPr>
         <a:solidFill>
-          <a:srgbClr val="FFFFFF"/>
+          <a:srgbClr val="3A1512"/>
         </a:solidFill>
       </p:bgPr>
     </p:bg>
@@ -3100,14 +4610,534 @@
       </p:grpSpPr>
       <p:sp>
         <p:nvSpPr>
-          <p:cNvPr id="2" name="Text 0"/>
-          <p:cNvSpPr/>
-          <p:nvPr/>
-        </p:nvSpPr>
-        <p:spPr>
-          <a:xfrm>
-            <a:off x="640080" y="502920"/>
-            <a:ext cx="10972800" cy="822960"/>
+          <p:cNvPr id="2" name="Shape 0"/>
+          <p:cNvSpPr/>
+          <p:nvPr/>
+        </p:nvSpPr>
+        <p:spPr>
+          <a:xfrm flipV="1">
+            <a:off x="0" y="6217920"/>
+            <a:ext cx="468911" cy="640080"/>
+          </a:xfrm>
+          <a:prstGeom prst="triangle">
+            <a:avLst/>
+          </a:prstGeom>
+          <a:solidFill>
+            <a:srgbClr val="482320"/>
+          </a:solidFill>
+          <a:ln/>
+        </p:spPr>
+      </p:sp>
+      <p:sp>
+        <p:nvSpPr>
+          <p:cNvPr id="3" name="Shape 1"/>
+          <p:cNvSpPr/>
+          <p:nvPr/>
+        </p:nvSpPr>
+        <p:spPr>
+          <a:xfrm>
+            <a:off x="468911" y="6217920"/>
+            <a:ext cx="468911" cy="640080"/>
+          </a:xfrm>
+          <a:prstGeom prst="triangle">
+            <a:avLst/>
+          </a:prstGeom>
+          <a:solidFill>
+            <a:srgbClr val="F2B705"/>
+          </a:solidFill>
+          <a:ln/>
+        </p:spPr>
+      </p:sp>
+      <p:sp>
+        <p:nvSpPr>
+          <p:cNvPr id="4" name="Shape 2"/>
+          <p:cNvSpPr/>
+          <p:nvPr/>
+        </p:nvSpPr>
+        <p:spPr>
+          <a:xfrm flipV="1">
+            <a:off x="937823" y="6217920"/>
+            <a:ext cx="468911" cy="640080"/>
+          </a:xfrm>
+          <a:prstGeom prst="triangle">
+            <a:avLst/>
+          </a:prstGeom>
+          <a:solidFill>
+            <a:srgbClr val="482320"/>
+          </a:solidFill>
+          <a:ln/>
+        </p:spPr>
+      </p:sp>
+      <p:sp>
+        <p:nvSpPr>
+          <p:cNvPr id="5" name="Shape 3"/>
+          <p:cNvSpPr/>
+          <p:nvPr/>
+        </p:nvSpPr>
+        <p:spPr>
+          <a:xfrm>
+            <a:off x="1406734" y="6217920"/>
+            <a:ext cx="468911" cy="640080"/>
+          </a:xfrm>
+          <a:prstGeom prst="triangle">
+            <a:avLst/>
+          </a:prstGeom>
+          <a:solidFill>
+            <a:srgbClr val="F2B705"/>
+          </a:solidFill>
+          <a:ln/>
+        </p:spPr>
+      </p:sp>
+      <p:sp>
+        <p:nvSpPr>
+          <p:cNvPr id="6" name="Shape 4"/>
+          <p:cNvSpPr/>
+          <p:nvPr/>
+        </p:nvSpPr>
+        <p:spPr>
+          <a:xfrm flipV="1">
+            <a:off x="1875645" y="6217920"/>
+            <a:ext cx="468911" cy="640080"/>
+          </a:xfrm>
+          <a:prstGeom prst="triangle">
+            <a:avLst/>
+          </a:prstGeom>
+          <a:solidFill>
+            <a:srgbClr val="482320"/>
+          </a:solidFill>
+          <a:ln/>
+        </p:spPr>
+      </p:sp>
+      <p:sp>
+        <p:nvSpPr>
+          <p:cNvPr id="7" name="Shape 5"/>
+          <p:cNvSpPr/>
+          <p:nvPr/>
+        </p:nvSpPr>
+        <p:spPr>
+          <a:xfrm>
+            <a:off x="2344557" y="6217920"/>
+            <a:ext cx="468911" cy="640080"/>
+          </a:xfrm>
+          <a:prstGeom prst="triangle">
+            <a:avLst/>
+          </a:prstGeom>
+          <a:solidFill>
+            <a:srgbClr val="F2B705"/>
+          </a:solidFill>
+          <a:ln/>
+        </p:spPr>
+      </p:sp>
+      <p:sp>
+        <p:nvSpPr>
+          <p:cNvPr id="8" name="Shape 6"/>
+          <p:cNvSpPr/>
+          <p:nvPr/>
+        </p:nvSpPr>
+        <p:spPr>
+          <a:xfrm flipV="1">
+            <a:off x="2813468" y="6217920"/>
+            <a:ext cx="468911" cy="640080"/>
+          </a:xfrm>
+          <a:prstGeom prst="triangle">
+            <a:avLst/>
+          </a:prstGeom>
+          <a:solidFill>
+            <a:srgbClr val="482320"/>
+          </a:solidFill>
+          <a:ln/>
+        </p:spPr>
+      </p:sp>
+      <p:sp>
+        <p:nvSpPr>
+          <p:cNvPr id="9" name="Shape 7"/>
+          <p:cNvSpPr/>
+          <p:nvPr/>
+        </p:nvSpPr>
+        <p:spPr>
+          <a:xfrm>
+            <a:off x="3282379" y="6217920"/>
+            <a:ext cx="468911" cy="640080"/>
+          </a:xfrm>
+          <a:prstGeom prst="triangle">
+            <a:avLst/>
+          </a:prstGeom>
+          <a:solidFill>
+            <a:srgbClr val="F2B705"/>
+          </a:solidFill>
+          <a:ln/>
+        </p:spPr>
+      </p:sp>
+      <p:sp>
+        <p:nvSpPr>
+          <p:cNvPr id="10" name="Shape 8"/>
+          <p:cNvSpPr/>
+          <p:nvPr/>
+        </p:nvSpPr>
+        <p:spPr>
+          <a:xfrm flipV="1">
+            <a:off x="3751291" y="6217920"/>
+            <a:ext cx="468911" cy="640080"/>
+          </a:xfrm>
+          <a:prstGeom prst="triangle">
+            <a:avLst/>
+          </a:prstGeom>
+          <a:solidFill>
+            <a:srgbClr val="482320"/>
+          </a:solidFill>
+          <a:ln/>
+        </p:spPr>
+      </p:sp>
+      <p:sp>
+        <p:nvSpPr>
+          <p:cNvPr id="11" name="Shape 9"/>
+          <p:cNvSpPr/>
+          <p:nvPr/>
+        </p:nvSpPr>
+        <p:spPr>
+          <a:xfrm>
+            <a:off x="4220202" y="6217920"/>
+            <a:ext cx="468911" cy="640080"/>
+          </a:xfrm>
+          <a:prstGeom prst="triangle">
+            <a:avLst/>
+          </a:prstGeom>
+          <a:solidFill>
+            <a:srgbClr val="F2B705"/>
+          </a:solidFill>
+          <a:ln/>
+        </p:spPr>
+      </p:sp>
+      <p:sp>
+        <p:nvSpPr>
+          <p:cNvPr id="12" name="Shape 10"/>
+          <p:cNvSpPr/>
+          <p:nvPr/>
+        </p:nvSpPr>
+        <p:spPr>
+          <a:xfrm flipV="1">
+            <a:off x="4689114" y="6217920"/>
+            <a:ext cx="468911" cy="640080"/>
+          </a:xfrm>
+          <a:prstGeom prst="triangle">
+            <a:avLst/>
+          </a:prstGeom>
+          <a:solidFill>
+            <a:srgbClr val="482320"/>
+          </a:solidFill>
+          <a:ln/>
+        </p:spPr>
+      </p:sp>
+      <p:sp>
+        <p:nvSpPr>
+          <p:cNvPr id="13" name="Shape 11"/>
+          <p:cNvSpPr/>
+          <p:nvPr/>
+        </p:nvSpPr>
+        <p:spPr>
+          <a:xfrm>
+            <a:off x="5158025" y="6217920"/>
+            <a:ext cx="468911" cy="640080"/>
+          </a:xfrm>
+          <a:prstGeom prst="triangle">
+            <a:avLst/>
+          </a:prstGeom>
+          <a:solidFill>
+            <a:srgbClr val="F2B705"/>
+          </a:solidFill>
+          <a:ln/>
+        </p:spPr>
+      </p:sp>
+      <p:sp>
+        <p:nvSpPr>
+          <p:cNvPr id="14" name="Shape 12"/>
+          <p:cNvSpPr/>
+          <p:nvPr/>
+        </p:nvSpPr>
+        <p:spPr>
+          <a:xfrm flipV="1">
+            <a:off x="5626936" y="6217920"/>
+            <a:ext cx="468911" cy="640080"/>
+          </a:xfrm>
+          <a:prstGeom prst="triangle">
+            <a:avLst/>
+          </a:prstGeom>
+          <a:solidFill>
+            <a:srgbClr val="482320"/>
+          </a:solidFill>
+          <a:ln/>
+        </p:spPr>
+      </p:sp>
+      <p:sp>
+        <p:nvSpPr>
+          <p:cNvPr id="15" name="Shape 13"/>
+          <p:cNvSpPr/>
+          <p:nvPr/>
+        </p:nvSpPr>
+        <p:spPr>
+          <a:xfrm>
+            <a:off x="6095848" y="6217920"/>
+            <a:ext cx="468911" cy="640080"/>
+          </a:xfrm>
+          <a:prstGeom prst="triangle">
+            <a:avLst/>
+          </a:prstGeom>
+          <a:solidFill>
+            <a:srgbClr val="F2B705"/>
+          </a:solidFill>
+          <a:ln/>
+        </p:spPr>
+      </p:sp>
+      <p:sp>
+        <p:nvSpPr>
+          <p:cNvPr id="16" name="Shape 14"/>
+          <p:cNvSpPr/>
+          <p:nvPr/>
+        </p:nvSpPr>
+        <p:spPr>
+          <a:xfrm flipV="1">
+            <a:off x="6564759" y="6217920"/>
+            <a:ext cx="468911" cy="640080"/>
+          </a:xfrm>
+          <a:prstGeom prst="triangle">
+            <a:avLst/>
+          </a:prstGeom>
+          <a:solidFill>
+            <a:srgbClr val="482320"/>
+          </a:solidFill>
+          <a:ln/>
+        </p:spPr>
+      </p:sp>
+      <p:sp>
+        <p:nvSpPr>
+          <p:cNvPr id="17" name="Shape 15"/>
+          <p:cNvSpPr/>
+          <p:nvPr/>
+        </p:nvSpPr>
+        <p:spPr>
+          <a:xfrm>
+            <a:off x="7033670" y="6217920"/>
+            <a:ext cx="468911" cy="640080"/>
+          </a:xfrm>
+          <a:prstGeom prst="triangle">
+            <a:avLst/>
+          </a:prstGeom>
+          <a:solidFill>
+            <a:srgbClr val="F2B705"/>
+          </a:solidFill>
+          <a:ln/>
+        </p:spPr>
+      </p:sp>
+      <p:sp>
+        <p:nvSpPr>
+          <p:cNvPr id="18" name="Shape 16"/>
+          <p:cNvSpPr/>
+          <p:nvPr/>
+        </p:nvSpPr>
+        <p:spPr>
+          <a:xfrm flipV="1">
+            <a:off x="7502582" y="6217920"/>
+            <a:ext cx="468911" cy="640080"/>
+          </a:xfrm>
+          <a:prstGeom prst="triangle">
+            <a:avLst/>
+          </a:prstGeom>
+          <a:solidFill>
+            <a:srgbClr val="482320"/>
+          </a:solidFill>
+          <a:ln/>
+        </p:spPr>
+      </p:sp>
+      <p:sp>
+        <p:nvSpPr>
+          <p:cNvPr id="19" name="Shape 17"/>
+          <p:cNvSpPr/>
+          <p:nvPr/>
+        </p:nvSpPr>
+        <p:spPr>
+          <a:xfrm>
+            <a:off x="7971493" y="6217920"/>
+            <a:ext cx="468911" cy="640080"/>
+          </a:xfrm>
+          <a:prstGeom prst="triangle">
+            <a:avLst/>
+          </a:prstGeom>
+          <a:solidFill>
+            <a:srgbClr val="F2B705"/>
+          </a:solidFill>
+          <a:ln/>
+        </p:spPr>
+      </p:sp>
+      <p:sp>
+        <p:nvSpPr>
+          <p:cNvPr id="20" name="Shape 18"/>
+          <p:cNvSpPr/>
+          <p:nvPr/>
+        </p:nvSpPr>
+        <p:spPr>
+          <a:xfrm flipV="1">
+            <a:off x="8440404" y="6217920"/>
+            <a:ext cx="468911" cy="640080"/>
+          </a:xfrm>
+          <a:prstGeom prst="triangle">
+            <a:avLst/>
+          </a:prstGeom>
+          <a:solidFill>
+            <a:srgbClr val="482320"/>
+          </a:solidFill>
+          <a:ln/>
+        </p:spPr>
+      </p:sp>
+      <p:sp>
+        <p:nvSpPr>
+          <p:cNvPr id="21" name="Shape 19"/>
+          <p:cNvSpPr/>
+          <p:nvPr/>
+        </p:nvSpPr>
+        <p:spPr>
+          <a:xfrm>
+            <a:off x="8909316" y="6217920"/>
+            <a:ext cx="468911" cy="640080"/>
+          </a:xfrm>
+          <a:prstGeom prst="triangle">
+            <a:avLst/>
+          </a:prstGeom>
+          <a:solidFill>
+            <a:srgbClr val="F2B705"/>
+          </a:solidFill>
+          <a:ln/>
+        </p:spPr>
+      </p:sp>
+      <p:sp>
+        <p:nvSpPr>
+          <p:cNvPr id="22" name="Shape 20"/>
+          <p:cNvSpPr/>
+          <p:nvPr/>
+        </p:nvSpPr>
+        <p:spPr>
+          <a:xfrm flipV="1">
+            <a:off x="9378227" y="6217920"/>
+            <a:ext cx="468911" cy="640080"/>
+          </a:xfrm>
+          <a:prstGeom prst="triangle">
+            <a:avLst/>
+          </a:prstGeom>
+          <a:solidFill>
+            <a:srgbClr val="482320"/>
+          </a:solidFill>
+          <a:ln/>
+        </p:spPr>
+      </p:sp>
+      <p:sp>
+        <p:nvSpPr>
+          <p:cNvPr id="23" name="Shape 21"/>
+          <p:cNvSpPr/>
+          <p:nvPr/>
+        </p:nvSpPr>
+        <p:spPr>
+          <a:xfrm>
+            <a:off x="9847138" y="6217920"/>
+            <a:ext cx="468911" cy="640080"/>
+          </a:xfrm>
+          <a:prstGeom prst="triangle">
+            <a:avLst/>
+          </a:prstGeom>
+          <a:solidFill>
+            <a:srgbClr val="F2B705"/>
+          </a:solidFill>
+          <a:ln/>
+        </p:spPr>
+      </p:sp>
+      <p:sp>
+        <p:nvSpPr>
+          <p:cNvPr id="24" name="Shape 22"/>
+          <p:cNvSpPr/>
+          <p:nvPr/>
+        </p:nvSpPr>
+        <p:spPr>
+          <a:xfrm flipV="1">
+            <a:off x="10316050" y="6217920"/>
+            <a:ext cx="468911" cy="640080"/>
+          </a:xfrm>
+          <a:prstGeom prst="triangle">
+            <a:avLst/>
+          </a:prstGeom>
+          <a:solidFill>
+            <a:srgbClr val="482320"/>
+          </a:solidFill>
+          <a:ln/>
+        </p:spPr>
+      </p:sp>
+      <p:sp>
+        <p:nvSpPr>
+          <p:cNvPr id="25" name="Shape 23"/>
+          <p:cNvSpPr/>
+          <p:nvPr/>
+        </p:nvSpPr>
+        <p:spPr>
+          <a:xfrm>
+            <a:off x="10784961" y="6217920"/>
+            <a:ext cx="468911" cy="640080"/>
+          </a:xfrm>
+          <a:prstGeom prst="triangle">
+            <a:avLst/>
+          </a:prstGeom>
+          <a:solidFill>
+            <a:srgbClr val="F2B705"/>
+          </a:solidFill>
+          <a:ln/>
+        </p:spPr>
+      </p:sp>
+      <p:sp>
+        <p:nvSpPr>
+          <p:cNvPr id="26" name="Shape 24"/>
+          <p:cNvSpPr/>
+          <p:nvPr/>
+        </p:nvSpPr>
+        <p:spPr>
+          <a:xfrm flipV="1">
+            <a:off x="11253872" y="6217920"/>
+            <a:ext cx="468911" cy="640080"/>
+          </a:xfrm>
+          <a:prstGeom prst="triangle">
+            <a:avLst/>
+          </a:prstGeom>
+          <a:solidFill>
+            <a:srgbClr val="482320"/>
+          </a:solidFill>
+          <a:ln/>
+        </p:spPr>
+      </p:sp>
+      <p:sp>
+        <p:nvSpPr>
+          <p:cNvPr id="27" name="Shape 25"/>
+          <p:cNvSpPr/>
+          <p:nvPr/>
+        </p:nvSpPr>
+        <p:spPr>
+          <a:xfrm>
+            <a:off x="11722784" y="6217920"/>
+            <a:ext cx="468911" cy="640080"/>
+          </a:xfrm>
+          <a:prstGeom prst="triangle">
+            <a:avLst/>
+          </a:prstGeom>
+          <a:solidFill>
+            <a:srgbClr val="F2B705"/>
+          </a:solidFill>
+          <a:ln/>
+        </p:spPr>
+      </p:sp>
+      <p:sp>
+        <p:nvSpPr>
+          <p:cNvPr id="28" name="Text 26"/>
+          <p:cNvSpPr/>
+          <p:nvPr/>
+        </p:nvSpPr>
+        <p:spPr>
+          <a:xfrm>
+            <a:off x="777240" y="685800"/>
+            <a:ext cx="914400" cy="640080"/>
           </a:xfrm>
           <a:prstGeom prst="rect">
             <a:avLst/>
@@ -3116,64 +5146,37 @@
           <a:ln/>
         </p:spPr>
         <p:txBody>
-          <a:bodyPr wrap="square" rtlCol="0" anchor="t"/>
+          <a:bodyPr wrap="square" lIns="0" tIns="0" rIns="0" bIns="0" rtlCol="0" anchor="ctr"/>
           <a:lstStyle/>
           <a:p>
             <a:pPr indent="0" marL="0">
               <a:buNone/>
             </a:pPr>
             <a:r>
-              <a:rPr lang="en-US" sz="2800" b="1" dirty="0">
+              <a:rPr lang="en-US" sz="3000" b="1" dirty="0">
                 <a:solidFill>
-                  <a:srgbClr val="1E2A33"/>
+                  <a:srgbClr val="F2B705"/>
                 </a:solidFill>
-                <a:latin typeface="Bookman Old Style" pitchFamily="34" charset="0"/>
-                <a:ea typeface="Bookman Old Style" pitchFamily="34" charset="-122"/>
-                <a:cs typeface="Bookman Old Style" pitchFamily="34" charset="-120"/>
+                <a:latin typeface="Arial" pitchFamily="34" charset="0"/>
+                <a:ea typeface="Arial" pitchFamily="34" charset="-122"/>
+                <a:cs typeface="Arial" pitchFamily="34" charset="-120"/>
               </a:rPr>
-              <a:t>Hardest Part — sealing a window under concurrent writes</a:t>
+              <a:t>03</a:t>
             </a:r>
-            <a:endParaRPr lang="en-US" sz="2800" dirty="0"/>
+            <a:endParaRPr lang="en-US" sz="3000" dirty="0"/>
           </a:p>
         </p:txBody>
       </p:sp>
       <p:sp>
         <p:nvSpPr>
-          <p:cNvPr id="3" name="Shape 1"/>
-          <p:cNvSpPr/>
-          <p:nvPr/>
-        </p:nvSpPr>
-        <p:spPr>
-          <a:xfrm>
-            <a:off x="640080" y="1874520"/>
-            <a:ext cx="4937760" cy="4160520"/>
-          </a:xfrm>
-          <a:prstGeom prst="roundRect">
-            <a:avLst>
-              <a:gd name="adj" fmla="val 2198"/>
-            </a:avLst>
-          </a:prstGeom>
-          <a:solidFill>
-            <a:srgbClr val="EEF2F4"/>
-          </a:solidFill>
-          <a:ln w="19050">
-            <a:solidFill>
-              <a:srgbClr val="F0A500"/>
-            </a:solidFill>
-            <a:prstDash val="solid"/>
-          </a:ln>
-        </p:spPr>
-      </p:sp>
-      <p:sp>
-        <p:nvSpPr>
-          <p:cNvPr id="4" name="Text 2"/>
-          <p:cNvSpPr/>
-          <p:nvPr/>
-        </p:nvSpPr>
-        <p:spPr>
-          <a:xfrm>
-            <a:off x="960120" y="2103120"/>
-            <a:ext cx="3657600" cy="457200"/>
+          <p:cNvPr id="29" name="Text 27"/>
+          <p:cNvSpPr/>
+          <p:nvPr/>
+        </p:nvSpPr>
+        <p:spPr>
+          <a:xfrm>
+            <a:off x="1645920" y="859536"/>
+            <a:ext cx="9768535" cy="274320"/>
           </a:xfrm>
           <a:prstGeom prst="rect">
             <a:avLst/>
@@ -3189,30 +5192,30 @@
               <a:buNone/>
             </a:pPr>
             <a:r>
-              <a:rPr lang="en-US" sz="1900" b="1" dirty="0">
+              <a:rPr lang="en-US" sz="1100" b="1" spc="200" kern="0" dirty="0">
                 <a:solidFill>
-                  <a:srgbClr val="F0A500"/>
+                  <a:srgbClr val="8B98A6"/>
                 </a:solidFill>
-                <a:latin typeface="Bookman Old Style" pitchFamily="34" charset="0"/>
-                <a:ea typeface="Bookman Old Style" pitchFamily="34" charset="-122"/>
-                <a:cs typeface="Bookman Old Style" pitchFamily="34" charset="-120"/>
+                <a:latin typeface="Calibri" pitchFamily="34" charset="0"/>
+                <a:ea typeface="Calibri" pitchFamily="34" charset="-122"/>
+                <a:cs typeface="Calibri" pitchFamily="34" charset="-120"/>
               </a:rPr>
-              <a:t>Problem</a:t>
+              <a:t>CHALLENGE</a:t>
             </a:r>
-            <a:endParaRPr lang="en-US" sz="1900" dirty="0"/>
+            <a:endParaRPr lang="en-US" sz="1100" dirty="0"/>
           </a:p>
         </p:txBody>
       </p:sp>
       <p:sp>
         <p:nvSpPr>
-          <p:cNvPr id="5" name="Text 3"/>
-          <p:cNvSpPr/>
-          <p:nvPr/>
-        </p:nvSpPr>
-        <p:spPr>
-          <a:xfrm>
-            <a:off x="960120" y="2651760"/>
-            <a:ext cx="4343400" cy="3200400"/>
+          <p:cNvPr id="30" name="Text 28"/>
+          <p:cNvSpPr/>
+          <p:nvPr/>
+        </p:nvSpPr>
+        <p:spPr>
+          <a:xfrm>
+            <a:off x="777240" y="1335024"/>
+            <a:ext cx="10637215" cy="640080"/>
           </a:xfrm>
           <a:prstGeom prst="rect">
             <a:avLst/>
@@ -3225,15 +5228,141 @@
           <a:lstStyle/>
           <a:p>
             <a:pPr indent="0" marL="0">
+              <a:buNone/>
+            </a:pPr>
+            <a:r>
+              <a:rPr lang="en-US" sz="2300" b="1" dirty="0">
+                <a:solidFill>
+                  <a:srgbClr val="ECE9E2"/>
+                </a:solidFill>
+                <a:latin typeface="Arial" pitchFamily="34" charset="0"/>
+                <a:ea typeface="Arial" pitchFamily="34" charset="-122"/>
+                <a:cs typeface="Arial" pitchFamily="34" charset="-120"/>
+              </a:rPr>
+              <a:t>sealing a window under concurrent writes</a:t>
+            </a:r>
+            <a:endParaRPr lang="en-US" sz="2300" dirty="0"/>
+          </a:p>
+        </p:txBody>
+      </p:sp>
+      <p:sp>
+        <p:nvSpPr>
+          <p:cNvPr id="31" name="Shape 29"/>
+          <p:cNvSpPr/>
+          <p:nvPr/>
+        </p:nvSpPr>
+        <p:spPr>
+          <a:xfrm>
+            <a:off x="777240" y="2377440"/>
+            <a:ext cx="5090008" cy="3383280"/>
+          </a:xfrm>
+          <a:prstGeom prst="roundRect">
+            <a:avLst/>
+          </a:prstGeom>
+          <a:solidFill>
+            <a:srgbClr val="24262B"/>
+          </a:solidFill>
+          <a:ln w="12700">
+            <a:solidFill>
+              <a:srgbClr val="383A3F"/>
+            </a:solidFill>
+            <a:prstDash val="solid"/>
+          </a:ln>
+        </p:spPr>
+      </p:sp>
+      <p:sp>
+        <p:nvSpPr>
+          <p:cNvPr id="32" name="Text 30"/>
+          <p:cNvSpPr/>
+          <p:nvPr/>
+        </p:nvSpPr>
+        <p:spPr>
+          <a:xfrm>
+            <a:off x="1097280" y="2651760"/>
+            <a:ext cx="4449928" cy="320040"/>
+          </a:xfrm>
+          <a:prstGeom prst="rect">
+            <a:avLst/>
+          </a:prstGeom>
+          <a:noFill/>
+          <a:ln/>
+        </p:spPr>
+        <p:txBody>
+          <a:bodyPr wrap="square" lIns="0" tIns="0" rIns="0" bIns="0" rtlCol="0" anchor="ctr"/>
+          <a:lstStyle/>
+          <a:p>
+            <a:pPr indent="0" marL="0">
+              <a:buNone/>
+            </a:pPr>
+            <a:r>
+              <a:rPr lang="en-US" sz="1200" b="1" spc="200" kern="0" dirty="0">
+                <a:solidFill>
+                  <a:srgbClr val="D1584E"/>
+                </a:solidFill>
+                <a:latin typeface="Calibri" pitchFamily="34" charset="0"/>
+                <a:ea typeface="Calibri" pitchFamily="34" charset="-122"/>
+                <a:cs typeface="Calibri" pitchFamily="34" charset="-120"/>
+              </a:rPr>
+              <a:t>PROBLEM</a:t>
+            </a:r>
+            <a:endParaRPr lang="en-US" sz="1200" dirty="0"/>
+          </a:p>
+        </p:txBody>
+      </p:sp>
+      <p:sp>
+        <p:nvSpPr>
+          <p:cNvPr id="33" name="Shape 31"/>
+          <p:cNvSpPr/>
+          <p:nvPr/>
+        </p:nvSpPr>
+        <p:spPr>
+          <a:xfrm>
+            <a:off x="1097280" y="3035808"/>
+            <a:ext cx="4449928" cy="0"/>
+          </a:xfrm>
+          <a:prstGeom prst="line">
+            <a:avLst/>
+          </a:prstGeom>
+          <a:noFill/>
+          <a:ln w="19050">
+            <a:solidFill>
+              <a:srgbClr val="D1584E"/>
+            </a:solidFill>
+            <a:prstDash val="solid"/>
+          </a:ln>
+        </p:spPr>
+      </p:sp>
+      <p:sp>
+        <p:nvSpPr>
+          <p:cNvPr id="34" name="Text 32"/>
+          <p:cNvSpPr/>
+          <p:nvPr/>
+        </p:nvSpPr>
+        <p:spPr>
+          <a:xfrm>
+            <a:off x="1097280" y="3200400"/>
+            <a:ext cx="4449928" cy="2377440"/>
+          </a:xfrm>
+          <a:prstGeom prst="rect">
+            <a:avLst/>
+          </a:prstGeom>
+          <a:noFill/>
+          <a:ln/>
+        </p:spPr>
+        <p:txBody>
+          <a:bodyPr wrap="square" lIns="0" tIns="0" rIns="0" bIns="0" rtlCol="0" anchor="t"/>
+          <a:lstStyle/>
+          <a:p>
+            <a:pPr indent="0" marL="0">
               <a:lnSpc>
-                <a:spcPct val="112000"/>
+                <a:spcPct val="128000"/>
               </a:lnSpc>
               <a:buNone/>
             </a:pPr>
             <a:r>
               <a:rPr lang="en-US" sz="1350" dirty="0">
                 <a:solidFill>
-                  <a:srgbClr val="1E2A33"/>
+                  <a:srgbClr val="ECE9E2"/>
                 </a:solidFill>
                 <a:latin typeface="Calibri" pitchFamily="34" charset="0"/>
                 <a:ea typeface="Calibri" pitchFamily="34" charset="-122"/>
@@ -3247,26 +5376,24 @@
       </p:sp>
       <p:sp>
         <p:nvSpPr>
-          <p:cNvPr id="6" name="Shape 4"/>
-          <p:cNvSpPr/>
-          <p:nvPr/>
-        </p:nvSpPr>
-        <p:spPr>
-          <a:xfrm>
-            <a:off x="6611112" y="1874520"/>
-            <a:ext cx="4937760" cy="4160520"/>
+          <p:cNvPr id="35" name="Shape 33"/>
+          <p:cNvSpPr/>
+          <p:nvPr/>
+        </p:nvSpPr>
+        <p:spPr>
+          <a:xfrm>
+            <a:off x="6324448" y="2377440"/>
+            <a:ext cx="5090008" cy="3383280"/>
           </a:xfrm>
           <a:prstGeom prst="roundRect">
-            <a:avLst>
-              <a:gd name="adj" fmla="val 2198"/>
-            </a:avLst>
-          </a:prstGeom>
-          <a:solidFill>
-            <a:srgbClr val="EEF2F4"/>
-          </a:solidFill>
-          <a:ln w="19050">
+            <a:avLst/>
+          </a:prstGeom>
+          <a:solidFill>
+            <a:srgbClr val="24262B"/>
+          </a:solidFill>
+          <a:ln w="12700">
             <a:solidFill>
-              <a:srgbClr val="4E6A78"/>
+              <a:srgbClr val="383A3F"/>
             </a:solidFill>
             <a:prstDash val="solid"/>
           </a:ln>
@@ -3274,14 +5401,14 @@
       </p:sp>
       <p:sp>
         <p:nvSpPr>
-          <p:cNvPr id="7" name="Text 5"/>
-          <p:cNvSpPr/>
-          <p:nvPr/>
-        </p:nvSpPr>
-        <p:spPr>
-          <a:xfrm>
-            <a:off x="6931152" y="2103120"/>
-            <a:ext cx="3657600" cy="457200"/>
+          <p:cNvPr id="36" name="Text 34"/>
+          <p:cNvSpPr/>
+          <p:nvPr/>
+        </p:nvSpPr>
+        <p:spPr>
+          <a:xfrm>
+            <a:off x="6644488" y="2651760"/>
+            <a:ext cx="4449928" cy="320040"/>
           </a:xfrm>
           <a:prstGeom prst="rect">
             <a:avLst/>
@@ -3297,30 +5424,53 @@
               <a:buNone/>
             </a:pPr>
             <a:r>
-              <a:rPr lang="en-US" sz="1900" b="1" dirty="0">
+              <a:rPr lang="en-US" sz="1200" b="1" spc="200" kern="0" dirty="0">
                 <a:solidFill>
-                  <a:srgbClr val="4E6A78"/>
+                  <a:srgbClr val="4FAE82"/>
                 </a:solidFill>
-                <a:latin typeface="Bookman Old Style" pitchFamily="34" charset="0"/>
-                <a:ea typeface="Bookman Old Style" pitchFamily="34" charset="-122"/>
-                <a:cs typeface="Bookman Old Style" pitchFamily="34" charset="-120"/>
+                <a:latin typeface="Calibri" pitchFamily="34" charset="0"/>
+                <a:ea typeface="Calibri" pitchFamily="34" charset="-122"/>
+                <a:cs typeface="Calibri" pitchFamily="34" charset="-120"/>
               </a:rPr>
-              <a:t>Solution</a:t>
+              <a:t>SOLUTION</a:t>
             </a:r>
-            <a:endParaRPr lang="en-US" sz="1900" dirty="0"/>
+            <a:endParaRPr lang="en-US" sz="1200" dirty="0"/>
           </a:p>
         </p:txBody>
       </p:sp>
       <p:sp>
         <p:nvSpPr>
-          <p:cNvPr id="8" name="Text 6"/>
-          <p:cNvSpPr/>
-          <p:nvPr/>
-        </p:nvSpPr>
-        <p:spPr>
-          <a:xfrm>
-            <a:off x="6931152" y="2651760"/>
-            <a:ext cx="4343400" cy="3200400"/>
+          <p:cNvPr id="37" name="Shape 35"/>
+          <p:cNvSpPr/>
+          <p:nvPr/>
+        </p:nvSpPr>
+        <p:spPr>
+          <a:xfrm>
+            <a:off x="6644488" y="3035808"/>
+            <a:ext cx="4449928" cy="0"/>
+          </a:xfrm>
+          <a:prstGeom prst="line">
+            <a:avLst/>
+          </a:prstGeom>
+          <a:noFill/>
+          <a:ln w="19050">
+            <a:solidFill>
+              <a:srgbClr val="4FAE82"/>
+            </a:solidFill>
+            <a:prstDash val="solid"/>
+          </a:ln>
+        </p:spPr>
+      </p:sp>
+      <p:sp>
+        <p:nvSpPr>
+          <p:cNvPr id="38" name="Text 36"/>
+          <p:cNvSpPr/>
+          <p:nvPr/>
+        </p:nvSpPr>
+        <p:spPr>
+          <a:xfrm>
+            <a:off x="6644488" y="3200400"/>
+            <a:ext cx="4449928" cy="2377440"/>
           </a:xfrm>
           <a:prstGeom prst="rect">
             <a:avLst/>
@@ -3329,19 +5479,19 @@
           <a:ln/>
         </p:spPr>
         <p:txBody>
-          <a:bodyPr wrap="square" lIns="0" tIns="0" rIns="0" bIns="0" rtlCol="0" anchor="ctr"/>
+          <a:bodyPr wrap="square" lIns="0" tIns="0" rIns="0" bIns="0" rtlCol="0" anchor="t"/>
           <a:lstStyle/>
           <a:p>
             <a:pPr indent="0" marL="0">
               <a:lnSpc>
-                <a:spcPct val="112000"/>
+                <a:spcPct val="128000"/>
               </a:lnSpc>
               <a:buNone/>
             </a:pPr>
             <a:r>
               <a:rPr lang="en-US" sz="1350" dirty="0">
                 <a:solidFill>
-                  <a:srgbClr val="1E2A33"/>
+                  <a:srgbClr val="ECE9E2"/>
                 </a:solidFill>
                 <a:latin typeface="Calibri" pitchFamily="34" charset="0"/>
                 <a:ea typeface="Calibri" pitchFamily="34" charset="-122"/>
@@ -3352,26 +5502,6 @@
             <a:endParaRPr lang="en-US" sz="1350" dirty="0"/>
           </a:p>
         </p:txBody>
-      </p:sp>
-      <p:sp>
-        <p:nvSpPr>
-          <p:cNvPr id="9" name="Shape 7"/>
-          <p:cNvSpPr/>
-          <p:nvPr/>
-        </p:nvSpPr>
-        <p:spPr>
-          <a:xfrm>
-            <a:off x="5669280" y="3703320"/>
-            <a:ext cx="841248" cy="512064"/>
-          </a:xfrm>
-          <a:prstGeom prst="rightArrow">
-            <a:avLst/>
-          </a:prstGeom>
-          <a:solidFill>
-            <a:srgbClr val="37474F"/>
-          </a:solidFill>
-          <a:ln/>
-        </p:spPr>
       </p:sp>
     </p:spTree>
   </p:cSld>
